--- a/六年一班班親會_全套簡報.pptx
+++ b/六年一班班親會_全套簡報.pptx
@@ -31,6 +31,7 @@
     <p:sldId id="279" r:id="rId30"/>
     <p:sldId id="280" r:id="rId31"/>
     <p:sldId id="281" r:id="rId32"/>
+    <p:sldId id="282" r:id="rId33"/>
   </p:sldIdLst>
   <p:sldSz cx="12191999" cy="6858000" type="screen4x3"/>
   <p:notesSz cx="6858000" cy="9144000"/>
@@ -3524,7 +3525,7 @@
                 <a:latin typeface="Microsoft JhengHei"/>
                 <a:ea typeface="Microsoft JhengHei"/>
               </a:rPr>
-              <a:t>PAGE 10 / 26</a:t>
+              <a:t>PAGE 10 / 27</a:t>
             </a:r>
           </a:p>
         </p:txBody>
@@ -4406,7 +4407,7 @@
                 <a:latin typeface="Microsoft JhengHei"/>
                 <a:ea typeface="Microsoft JhengHei"/>
               </a:rPr>
-              <a:t>PAGE 11 / 26</a:t>
+              <a:t>PAGE 11 / 27</a:t>
             </a:r>
           </a:p>
         </p:txBody>
@@ -5288,7 +5289,7 @@
                 <a:latin typeface="Microsoft JhengHei"/>
                 <a:ea typeface="Microsoft JhengHei"/>
               </a:rPr>
-              <a:t>PAGE 12 / 26</a:t>
+              <a:t>PAGE 12 / 27</a:t>
             </a:r>
           </a:p>
         </p:txBody>
@@ -5890,7 +5891,7 @@
                 <a:latin typeface="Microsoft JhengHei"/>
                 <a:ea typeface="Microsoft JhengHei"/>
               </a:rPr>
-              <a:t>PAGE 13 / 26</a:t>
+              <a:t>PAGE 13 / 27</a:t>
             </a:r>
           </a:p>
         </p:txBody>
@@ -6352,7 +6353,7 @@
                 <a:latin typeface="Microsoft JhengHei"/>
                 <a:ea typeface="Microsoft JhengHei"/>
               </a:rPr>
-              <a:t>PAGE 14 / 26</a:t>
+              <a:t>PAGE 14 / 27</a:t>
             </a:r>
           </a:p>
         </p:txBody>
@@ -6954,7 +6955,7 @@
                 <a:latin typeface="Microsoft JhengHei"/>
                 <a:ea typeface="Microsoft JhengHei"/>
               </a:rPr>
-              <a:t>PAGE 15 / 26</a:t>
+              <a:t>PAGE 15 / 27</a:t>
             </a:r>
           </a:p>
         </p:txBody>
@@ -7556,7 +7557,7 @@
                 <a:latin typeface="Microsoft JhengHei"/>
                 <a:ea typeface="Microsoft JhengHei"/>
               </a:rPr>
-              <a:t>PAGE 16 / 26</a:t>
+              <a:t>PAGE 16 / 27</a:t>
             </a:r>
           </a:p>
         </p:txBody>
@@ -8088,7 +8089,7 @@
                 <a:latin typeface="Microsoft JhengHei"/>
                 <a:ea typeface="Microsoft JhengHei"/>
               </a:rPr>
-              <a:t>PAGE 17 / 26</a:t>
+              <a:t>PAGE 17 / 27</a:t>
             </a:r>
           </a:p>
         </p:txBody>
@@ -8970,7 +8971,7 @@
                 <a:latin typeface="Microsoft JhengHei"/>
                 <a:ea typeface="Microsoft JhengHei"/>
               </a:rPr>
-              <a:t>PAGE 18 / 26</a:t>
+              <a:t>PAGE 18 / 27</a:t>
             </a:r>
           </a:p>
         </p:txBody>
@@ -9625,7 +9626,7 @@
       <p:grpSpPr/>
       <p:pic>
         <p:nvPicPr>
-          <p:cNvPr id="2" name="Picture 1" descr="19-election.png"/>
+          <p:cNvPr id="2" name="Picture 1" descr="19-album-quotation.png"/>
           <p:cNvPicPr>
             <a:picLocks noChangeAspect="1"/>
           </p:cNvPicPr>
@@ -9712,7 +9713,7 @@
                 <a:latin typeface="Microsoft JhengHei"/>
                 <a:ea typeface="Microsoft JhengHei"/>
               </a:rPr>
-              <a:t>PAGE 19 / 26</a:t>
+              <a:t>PAGE 19 / 27</a:t>
             </a:r>
           </a:p>
         </p:txBody>
@@ -9726,7 +9727,7 @@
         <p:spPr>
           <a:xfrm>
             <a:off x="507999" y="717550"/>
-            <a:ext cx="9066275" cy="495299"/>
+            <a:ext cx="9436099" cy="495299"/>
           </a:xfrm>
           <a:prstGeom prst="rect">
             <a:avLst/>
@@ -9747,7 +9748,7 @@
                 <a:latin typeface="Microsoft JhengHei"/>
                 <a:ea typeface="Microsoft JhengHei"/>
               </a:rPr>
-              <a:t>班級自治：推選 601 班親會「會長」與「總務」</a:t>
+              <a:t>【畢業專案費用公開】畢業紀念冊規格、攝影與費用預估</a:t>
             </a:r>
           </a:p>
         </p:txBody>
@@ -9761,7 +9762,7 @@
         <p:spPr>
           <a:xfrm>
             <a:off x="507999" y="1162050"/>
-            <a:ext cx="5922771" cy="247649"/>
+            <a:ext cx="8326627" cy="247649"/>
           </a:xfrm>
           <a:prstGeom prst="rect">
             <a:avLst/>
@@ -9782,7 +9783,7 @@
                 <a:latin typeface="Microsoft JhengHei"/>
                 <a:ea typeface="Microsoft JhengHei"/>
               </a:rPr>
-              <a:t>正因有畢業旅行與畢業紀念冊等重大專案，更需要家長幹部共同把關！</a:t>
+              <a:t>天藝數位影像工坊專案報價・直式 A4 蝴蝶書硬殼精裝・每生專屬頁・含升學證件照・透明把關</a:t>
             </a:r>
           </a:p>
         </p:txBody>
@@ -9795,29 +9796,29 @@
         </p:nvSpPr>
         <p:spPr>
           <a:xfrm>
-            <a:off x="977899" y="1987550"/>
-            <a:ext cx="1584451" cy="266699"/>
-          </a:xfrm>
-          <a:prstGeom prst="rect">
-            <a:avLst/>
-          </a:prstGeom>
-          <a:noFill/>
-        </p:spPr>
-        <p:txBody>
-          <a:bodyPr wrap="none" lIns="0" rIns="0" tIns="0" bIns="0">
-            <a:spAutoFit/>
-          </a:bodyPr>
-          <a:lstStyle/>
-          <a:p>
-            <a:r>
-              <a:rPr sz="2100" b="1">
+            <a:off x="882649" y="1828800"/>
+            <a:ext cx="1214627" cy="228600"/>
+          </a:xfrm>
+          <a:prstGeom prst="rect">
+            <a:avLst/>
+          </a:prstGeom>
+          <a:noFill/>
+        </p:spPr>
+        <p:txBody>
+          <a:bodyPr wrap="none" lIns="0" rIns="0" tIns="0" bIns="0">
+            <a:spAutoFit/>
+          </a:bodyPr>
+          <a:lstStyle/>
+          <a:p>
+            <a:r>
+              <a:rPr sz="1800" b="1">
                 <a:solidFill>
                   <a:srgbClr val="FFFFFF"/>
                 </a:solidFill>
                 <a:latin typeface="Microsoft JhengHei"/>
                 <a:ea typeface="Microsoft JhengHei"/>
               </a:rPr>
-              <a:t>幹部推選 01</a:t>
+              <a:t>價格公開透明</a:t>
             </a:r>
           </a:p>
         </p:txBody>
@@ -9830,449 +9831,764 @@
         </p:nvSpPr>
         <p:spPr>
           <a:xfrm>
-            <a:off x="825499" y="2368550"/>
-            <a:ext cx="3134867" cy="438149"/>
-          </a:xfrm>
-          <a:prstGeom prst="rect">
-            <a:avLst/>
-          </a:prstGeom>
-          <a:noFill/>
-        </p:spPr>
-        <p:txBody>
-          <a:bodyPr wrap="none" lIns="0" rIns="0" tIns="0" bIns="0">
-            <a:spAutoFit/>
-          </a:bodyPr>
-          <a:lstStyle/>
-          <a:p>
-            <a:r>
-              <a:rPr sz="3450" b="1">
+            <a:off x="730249" y="2178050"/>
+            <a:ext cx="3774947" cy="342900"/>
+          </a:xfrm>
+          <a:prstGeom prst="rect">
+            <a:avLst/>
+          </a:prstGeom>
+          <a:noFill/>
+        </p:spPr>
+        <p:txBody>
+          <a:bodyPr wrap="none" lIns="0" rIns="0" tIns="0" bIns="0">
+            <a:spAutoFit/>
+          </a:bodyPr>
+          <a:lstStyle/>
+          <a:p>
+            <a:r>
+              <a:rPr sz="2700" b="1">
+                <a:solidFill>
+                  <a:srgbClr val="E88D67"/>
+                </a:solidFill>
+                <a:latin typeface="Microsoft JhengHei"/>
+                <a:ea typeface="Microsoft JhengHei"/>
+              </a:rPr>
+              <a:t>【費用預估】每本 870 元</a:t>
+            </a:r>
+          </a:p>
+        </p:txBody>
+      </p:sp>
+      <p:sp>
+        <p:nvSpPr>
+          <p:cNvPr id="9" name="TextBox 8"/>
+          <p:cNvSpPr txBox="1"/>
+          <p:nvPr/>
+        </p:nvSpPr>
+        <p:spPr>
+          <a:xfrm>
+            <a:off x="920749" y="2813050"/>
+            <a:ext cx="3149091" cy="247649"/>
+          </a:xfrm>
+          <a:prstGeom prst="rect">
+            <a:avLst/>
+          </a:prstGeom>
+          <a:noFill/>
+        </p:spPr>
+        <p:txBody>
+          <a:bodyPr wrap="none" lIns="0" rIns="0" tIns="0" bIns="0">
+            <a:spAutoFit/>
+          </a:bodyPr>
+          <a:lstStyle/>
+          <a:p>
+            <a:r>
+              <a:rPr sz="1950" b="0">
+                <a:solidFill>
+                  <a:srgbClr val="2D3748"/>
+                </a:solidFill>
+                <a:latin typeface="Microsoft JhengHei"/>
+                <a:ea typeface="Microsoft JhengHei"/>
+              </a:rPr>
+              <a:t>購買整本紀念冊：每本 870 元</a:t>
+            </a:r>
+          </a:p>
+        </p:txBody>
+      </p:sp>
+      <p:sp>
+        <p:nvSpPr>
+          <p:cNvPr id="10" name="TextBox 9"/>
+          <p:cNvSpPr txBox="1"/>
+          <p:nvPr/>
+        </p:nvSpPr>
+        <p:spPr>
+          <a:xfrm>
+            <a:off x="920749" y="3321050"/>
+            <a:ext cx="4073651" cy="247649"/>
+          </a:xfrm>
+          <a:prstGeom prst="rect">
+            <a:avLst/>
+          </a:prstGeom>
+          <a:noFill/>
+        </p:spPr>
+        <p:txBody>
+          <a:bodyPr wrap="none" lIns="0" rIns="0" tIns="0" bIns="0">
+            <a:spAutoFit/>
+          </a:bodyPr>
+          <a:lstStyle/>
+          <a:p>
+            <a:r>
+              <a:rPr sz="1950" b="0">
+                <a:solidFill>
+                  <a:srgbClr val="2D3748"/>
+                </a:solidFill>
+                <a:latin typeface="Microsoft JhengHei"/>
+                <a:ea typeface="Microsoft JhengHei"/>
+              </a:rPr>
+              <a:t>僅拍照不購冊者：每人 250 元（工本費）</a:t>
+            </a:r>
+          </a:p>
+        </p:txBody>
+      </p:sp>
+      <p:sp>
+        <p:nvSpPr>
+          <p:cNvPr id="11" name="TextBox 10"/>
+          <p:cNvSpPr txBox="1"/>
+          <p:nvPr/>
+        </p:nvSpPr>
+        <p:spPr>
+          <a:xfrm>
+            <a:off x="920749" y="3829050"/>
+            <a:ext cx="2594355" cy="247649"/>
+          </a:xfrm>
+          <a:prstGeom prst="rect">
+            <a:avLst/>
+          </a:prstGeom>
+          <a:noFill/>
+        </p:spPr>
+        <p:txBody>
+          <a:bodyPr wrap="none" lIns="0" rIns="0" tIns="0" bIns="0">
+            <a:spAutoFit/>
+          </a:bodyPr>
+          <a:lstStyle/>
+          <a:p>
+            <a:r>
+              <a:rPr sz="1950" b="0">
+                <a:solidFill>
+                  <a:srgbClr val="2D3748"/>
+                </a:solidFill>
+                <a:latin typeface="Microsoft JhengHei"/>
+                <a:ea typeface="Microsoft JhengHei"/>
+              </a:rPr>
+              <a:t>依班級實際購買人數計算總價</a:t>
+            </a:r>
+          </a:p>
+        </p:txBody>
+      </p:sp>
+      <p:sp>
+        <p:nvSpPr>
+          <p:cNvPr id="12" name="TextBox 11"/>
+          <p:cNvSpPr txBox="1"/>
+          <p:nvPr/>
+        </p:nvSpPr>
+        <p:spPr>
+          <a:xfrm>
+            <a:off x="920749" y="4337050"/>
+            <a:ext cx="3149091" cy="247649"/>
+          </a:xfrm>
+          <a:prstGeom prst="rect">
+            <a:avLst/>
+          </a:prstGeom>
+          <a:noFill/>
+        </p:spPr>
+        <p:txBody>
+          <a:bodyPr wrap="none" lIns="0" rIns="0" tIns="0" bIns="0">
+            <a:spAutoFit/>
+          </a:bodyPr>
+          <a:lstStyle/>
+          <a:p>
+            <a:r>
+              <a:rPr sz="1950" b="0">
+                <a:solidFill>
+                  <a:srgbClr val="2D3748"/>
+                </a:solidFill>
+                <a:latin typeface="Microsoft JhengHei"/>
+                <a:ea typeface="Microsoft JhengHei"/>
+              </a:rPr>
+              <a:t>含全套攝影＋精修＋證件照＋精裝書</a:t>
+            </a:r>
+          </a:p>
+        </p:txBody>
+      </p:sp>
+      <p:sp>
+        <p:nvSpPr>
+          <p:cNvPr id="13" name="TextBox 12"/>
+          <p:cNvSpPr txBox="1"/>
+          <p:nvPr/>
+        </p:nvSpPr>
+        <p:spPr>
+          <a:xfrm>
+            <a:off x="920749" y="4845050"/>
+            <a:ext cx="3149091" cy="247649"/>
+          </a:xfrm>
+          <a:prstGeom prst="rect">
+            <a:avLst/>
+          </a:prstGeom>
+          <a:noFill/>
+        </p:spPr>
+        <p:txBody>
+          <a:bodyPr wrap="none" lIns="0" rIns="0" tIns="0" bIns="0">
+            <a:spAutoFit/>
+          </a:bodyPr>
+          <a:lstStyle/>
+          <a:p>
+            <a:r>
+              <a:rPr sz="1950" b="0">
+                <a:solidFill>
+                  <a:srgbClr val="2D3748"/>
+                </a:solidFill>
+                <a:latin typeface="Microsoft JhengHei"/>
+                <a:ea typeface="Microsoft JhengHei"/>
+              </a:rPr>
+              <a:t>絕無任何隱形加價，驗收滿意後付款</a:t>
+            </a:r>
+          </a:p>
+        </p:txBody>
+      </p:sp>
+      <p:sp>
+        <p:nvSpPr>
+          <p:cNvPr id="14" name="TextBox 13"/>
+          <p:cNvSpPr txBox="1"/>
+          <p:nvPr/>
+        </p:nvSpPr>
+        <p:spPr>
+          <a:xfrm>
+            <a:off x="4597399" y="1828800"/>
+            <a:ext cx="1214627" cy="228600"/>
+          </a:xfrm>
+          <a:prstGeom prst="rect">
+            <a:avLst/>
+          </a:prstGeom>
+          <a:noFill/>
+        </p:spPr>
+        <p:txBody>
+          <a:bodyPr wrap="none" lIns="0" rIns="0" tIns="0" bIns="0">
+            <a:spAutoFit/>
+          </a:bodyPr>
+          <a:lstStyle/>
+          <a:p>
+            <a:r>
+              <a:rPr sz="1800" b="1">
+                <a:solidFill>
+                  <a:srgbClr val="FFFFFF"/>
+                </a:solidFill>
+                <a:latin typeface="Microsoft JhengHei"/>
+                <a:ea typeface="Microsoft JhengHei"/>
+              </a:rPr>
+              <a:t>典藏級蝴蝶裝</a:t>
+            </a:r>
+          </a:p>
+        </p:txBody>
+      </p:sp>
+      <p:sp>
+        <p:nvSpPr>
+          <p:cNvPr id="15" name="TextBox 14"/>
+          <p:cNvSpPr txBox="1"/>
+          <p:nvPr/>
+        </p:nvSpPr>
+        <p:spPr>
+          <a:xfrm>
+            <a:off x="4444999" y="2178050"/>
+            <a:ext cx="4030979" cy="342900"/>
+          </a:xfrm>
+          <a:prstGeom prst="rect">
+            <a:avLst/>
+          </a:prstGeom>
+          <a:noFill/>
+        </p:spPr>
+        <p:txBody>
+          <a:bodyPr wrap="none" lIns="0" rIns="0" tIns="0" bIns="0">
+            <a:spAutoFit/>
+          </a:bodyPr>
+          <a:lstStyle/>
+          <a:p>
+            <a:r>
+              <a:rPr sz="2700" b="1">
                 <a:solidFill>
                   <a:srgbClr val="2C5E8A"/>
                 </a:solidFill>
                 <a:latin typeface="Microsoft JhengHei"/>
                 <a:ea typeface="Microsoft JhengHei"/>
               </a:rPr>
-              <a:t>班親會「會長」職責</a:t>
-            </a:r>
-          </a:p>
-        </p:txBody>
-      </p:sp>
-      <p:sp>
-        <p:nvSpPr>
-          <p:cNvPr id="9" name="TextBox 8"/>
-          <p:cNvSpPr txBox="1"/>
-          <p:nvPr/>
-        </p:nvSpPr>
-        <p:spPr>
-          <a:xfrm>
-            <a:off x="1092199" y="3003549"/>
-            <a:ext cx="3604259" cy="304800"/>
-          </a:xfrm>
-          <a:prstGeom prst="rect">
-            <a:avLst/>
-          </a:prstGeom>
-          <a:noFill/>
-        </p:spPr>
-        <p:txBody>
-          <a:bodyPr wrap="none" lIns="0" rIns="0" tIns="0" bIns="0">
-            <a:spAutoFit/>
-          </a:bodyPr>
-          <a:lstStyle/>
-          <a:p>
-            <a:r>
-              <a:rPr sz="2400" b="1">
-                <a:solidFill>
-                  <a:srgbClr val="2D3748"/>
-                </a:solidFill>
-                <a:latin typeface="Microsoft JhengHei"/>
-                <a:ea typeface="Microsoft JhengHei"/>
-              </a:rPr>
-              <a:t>代表六年一班全體家長發聲與協調</a:t>
-            </a:r>
-          </a:p>
-        </p:txBody>
-      </p:sp>
-      <p:sp>
-        <p:nvSpPr>
-          <p:cNvPr id="10" name="TextBox 9"/>
-          <p:cNvSpPr txBox="1"/>
-          <p:nvPr/>
-        </p:nvSpPr>
-        <p:spPr>
-          <a:xfrm>
-            <a:off x="1092199" y="3498850"/>
-            <a:ext cx="4514595" cy="304800"/>
-          </a:xfrm>
-          <a:prstGeom prst="rect">
-            <a:avLst/>
-          </a:prstGeom>
-          <a:noFill/>
-        </p:spPr>
-        <p:txBody>
-          <a:bodyPr wrap="none" lIns="0" rIns="0" tIns="0" bIns="0">
-            <a:spAutoFit/>
-          </a:bodyPr>
-          <a:lstStyle/>
-          <a:p>
-            <a:r>
-              <a:rPr sz="2400" b="1">
-                <a:solidFill>
-                  <a:srgbClr val="2D3748"/>
-                </a:solidFill>
-                <a:latin typeface="Microsoft JhengHei"/>
-                <a:ea typeface="Microsoft JhengHei"/>
-              </a:rPr>
-              <a:t>協助策劃支援班級重大活動（畢旅、專案）</a:t>
-            </a:r>
-          </a:p>
-        </p:txBody>
-      </p:sp>
-      <p:sp>
-        <p:nvSpPr>
-          <p:cNvPr id="11" name="TextBox 10"/>
-          <p:cNvSpPr txBox="1"/>
-          <p:nvPr/>
-        </p:nvSpPr>
-        <p:spPr>
-          <a:xfrm>
-            <a:off x="1092199" y="3994150"/>
-            <a:ext cx="4059427" cy="304800"/>
-          </a:xfrm>
-          <a:prstGeom prst="rect">
-            <a:avLst/>
-          </a:prstGeom>
-          <a:noFill/>
-        </p:spPr>
-        <p:txBody>
-          <a:bodyPr wrap="none" lIns="0" rIns="0" tIns="0" bIns="0">
-            <a:spAutoFit/>
-          </a:bodyPr>
-          <a:lstStyle/>
-          <a:p>
-            <a:r>
-              <a:rPr sz="2400" b="1">
-                <a:solidFill>
-                  <a:srgbClr val="2D3748"/>
-                </a:solidFill>
-                <a:latin typeface="Microsoft JhengHei"/>
-                <a:ea typeface="Microsoft JhengHei"/>
-              </a:rPr>
-              <a:t>擔任家長與學校行政、導師間最佳橋樑</a:t>
-            </a:r>
-          </a:p>
-        </p:txBody>
-      </p:sp>
-      <p:sp>
-        <p:nvSpPr>
-          <p:cNvPr id="12" name="TextBox 11"/>
-          <p:cNvSpPr txBox="1"/>
-          <p:nvPr/>
-        </p:nvSpPr>
-        <p:spPr>
-          <a:xfrm>
-            <a:off x="1092199" y="4489450"/>
-            <a:ext cx="4287011" cy="304800"/>
-          </a:xfrm>
-          <a:prstGeom prst="rect">
-            <a:avLst/>
-          </a:prstGeom>
-          <a:noFill/>
-        </p:spPr>
-        <p:txBody>
-          <a:bodyPr wrap="none" lIns="0" rIns="0" tIns="0" bIns="0">
-            <a:spAutoFit/>
-          </a:bodyPr>
-          <a:lstStyle/>
-          <a:p>
-            <a:r>
-              <a:rPr sz="2400" b="1">
-                <a:solidFill>
-                  <a:srgbClr val="2D3748"/>
-                </a:solidFill>
-                <a:latin typeface="Microsoft JhengHei"/>
-                <a:ea typeface="Microsoft JhengHei"/>
-              </a:rPr>
-              <a:t>凝聚全班家長向心力，營造溫暖親師社群</a:t>
-            </a:r>
-          </a:p>
-        </p:txBody>
-      </p:sp>
-      <p:sp>
-        <p:nvSpPr>
-          <p:cNvPr id="13" name="TextBox 12"/>
-          <p:cNvSpPr txBox="1"/>
-          <p:nvPr/>
-        </p:nvSpPr>
-        <p:spPr>
-          <a:xfrm>
-            <a:off x="1092199" y="4984750"/>
-            <a:ext cx="4287011" cy="304800"/>
-          </a:xfrm>
-          <a:prstGeom prst="rect">
-            <a:avLst/>
-          </a:prstGeom>
-          <a:noFill/>
-        </p:spPr>
-        <p:txBody>
-          <a:bodyPr wrap="none" lIns="0" rIns="0" tIns="0" bIns="0">
-            <a:spAutoFit/>
-          </a:bodyPr>
-          <a:lstStyle/>
-          <a:p>
-            <a:r>
-              <a:rPr sz="2400" b="1">
-                <a:solidFill>
-                  <a:srgbClr val="2D3748"/>
-                </a:solidFill>
-                <a:latin typeface="Microsoft JhengHei"/>
-                <a:ea typeface="Microsoft JhengHei"/>
-              </a:rPr>
-              <a:t>歡迎熱心、富使命感的家長自薦或推薦！</a:t>
-            </a:r>
-          </a:p>
-        </p:txBody>
-      </p:sp>
-      <p:sp>
-        <p:nvSpPr>
-          <p:cNvPr id="14" name="TextBox 13"/>
-          <p:cNvSpPr txBox="1"/>
-          <p:nvPr/>
-        </p:nvSpPr>
-        <p:spPr>
-          <a:xfrm>
-            <a:off x="6375399" y="1987550"/>
-            <a:ext cx="1584451" cy="266699"/>
-          </a:xfrm>
-          <a:prstGeom prst="rect">
-            <a:avLst/>
-          </a:prstGeom>
-          <a:noFill/>
-        </p:spPr>
-        <p:txBody>
-          <a:bodyPr wrap="none" lIns="0" rIns="0" tIns="0" bIns="0">
-            <a:spAutoFit/>
-          </a:bodyPr>
-          <a:lstStyle/>
-          <a:p>
-            <a:r>
-              <a:rPr sz="2100" b="1">
+              <a:t>【精裝規格】直式 A4 蝴蝶書</a:t>
+            </a:r>
+          </a:p>
+        </p:txBody>
+      </p:sp>
+      <p:sp>
+        <p:nvSpPr>
+          <p:cNvPr id="16" name="TextBox 15"/>
+          <p:cNvSpPr txBox="1"/>
+          <p:nvPr/>
+        </p:nvSpPr>
+        <p:spPr>
+          <a:xfrm>
+            <a:off x="4635499" y="2813050"/>
+            <a:ext cx="4258563" cy="247649"/>
+          </a:xfrm>
+          <a:prstGeom prst="rect">
+            <a:avLst/>
+          </a:prstGeom>
+          <a:noFill/>
+        </p:spPr>
+        <p:txBody>
+          <a:bodyPr wrap="none" lIns="0" rIns="0" tIns="0" bIns="0">
+            <a:spAutoFit/>
+          </a:bodyPr>
+          <a:lstStyle/>
+          <a:p>
+            <a:r>
+              <a:rPr sz="1950" b="0">
+                <a:solidFill>
+                  <a:srgbClr val="2D3748"/>
+                </a:solidFill>
+                <a:latin typeface="Microsoft JhengHei"/>
+                <a:ea typeface="Microsoft JhengHei"/>
+              </a:rPr>
+              <a:t>直式 A4 蝴蝶書：180 度跨頁平攤不吃字</a:t>
+            </a:r>
+          </a:p>
+        </p:txBody>
+      </p:sp>
+      <p:sp>
+        <p:nvSpPr>
+          <p:cNvPr id="17" name="TextBox 16"/>
+          <p:cNvSpPr txBox="1"/>
+          <p:nvPr/>
+        </p:nvSpPr>
+        <p:spPr>
+          <a:xfrm>
+            <a:off x="4635499" y="3321050"/>
+            <a:ext cx="3334003" cy="247649"/>
+          </a:xfrm>
+          <a:prstGeom prst="rect">
+            <a:avLst/>
+          </a:prstGeom>
+          <a:noFill/>
+        </p:spPr>
+        <p:txBody>
+          <a:bodyPr wrap="none" lIns="0" rIns="0" tIns="0" bIns="0">
+            <a:spAutoFit/>
+          </a:bodyPr>
+          <a:lstStyle/>
+          <a:p>
+            <a:r>
+              <a:rPr sz="1950" b="0">
+                <a:solidFill>
+                  <a:srgbClr val="2D3748"/>
+                </a:solidFill>
+                <a:latin typeface="Microsoft JhengHei"/>
+                <a:ea typeface="Microsoft JhengHei"/>
+              </a:rPr>
+              <a:t>封面：48 盎司厚板硬殼＋特銅亮膜</a:t>
+            </a:r>
+          </a:p>
+        </p:txBody>
+      </p:sp>
+      <p:sp>
+        <p:nvSpPr>
+          <p:cNvPr id="18" name="TextBox 17"/>
+          <p:cNvSpPr txBox="1"/>
+          <p:nvPr/>
+        </p:nvSpPr>
+        <p:spPr>
+          <a:xfrm>
+            <a:off x="4635499" y="3829050"/>
+            <a:ext cx="3334003" cy="247649"/>
+          </a:xfrm>
+          <a:prstGeom prst="rect">
+            <a:avLst/>
+          </a:prstGeom>
+          <a:noFill/>
+        </p:spPr>
+        <p:txBody>
+          <a:bodyPr wrap="none" lIns="0" rIns="0" tIns="0" bIns="0">
+            <a:spAutoFit/>
+          </a:bodyPr>
+          <a:lstStyle/>
+          <a:p>
+            <a:r>
+              <a:rPr sz="1950" b="0">
+                <a:solidFill>
+                  <a:srgbClr val="2D3748"/>
+                </a:solidFill>
+                <a:latin typeface="Microsoft JhengHei"/>
+                <a:ea typeface="Microsoft JhengHei"/>
+              </a:rPr>
+              <a:t>內頁：200P 銅西雙面上膜防潑水</a:t>
+            </a:r>
+          </a:p>
+        </p:txBody>
+      </p:sp>
+      <p:sp>
+        <p:nvSpPr>
+          <p:cNvPr id="19" name="TextBox 18"/>
+          <p:cNvSpPr txBox="1"/>
+          <p:nvPr/>
+        </p:nvSpPr>
+        <p:spPr>
+          <a:xfrm>
+            <a:off x="4635499" y="4337050"/>
+            <a:ext cx="4258563" cy="247649"/>
+          </a:xfrm>
+          <a:prstGeom prst="rect">
+            <a:avLst/>
+          </a:prstGeom>
+          <a:noFill/>
+        </p:spPr>
+        <p:txBody>
+          <a:bodyPr wrap="none" lIns="0" rIns="0" tIns="0" bIns="0">
+            <a:spAutoFit/>
+          </a:bodyPr>
+          <a:lstStyle/>
+          <a:p>
+            <a:r>
+              <a:rPr sz="1950" b="0">
+                <a:solidFill>
+                  <a:srgbClr val="2D3748"/>
+                </a:solidFill>
+                <a:latin typeface="Microsoft JhengHei"/>
+                <a:ea typeface="Microsoft JhengHei"/>
+              </a:rPr>
+              <a:t>每生專屬頁：28 位學生每人享有 1 整頁！</a:t>
+            </a:r>
+          </a:p>
+        </p:txBody>
+      </p:sp>
+      <p:sp>
+        <p:nvSpPr>
+          <p:cNvPr id="20" name="TextBox 19"/>
+          <p:cNvSpPr txBox="1"/>
+          <p:nvPr/>
+        </p:nvSpPr>
+        <p:spPr>
+          <a:xfrm>
+            <a:off x="4635499" y="4845050"/>
+            <a:ext cx="4443475" cy="247649"/>
+          </a:xfrm>
+          <a:prstGeom prst="rect">
+            <a:avLst/>
+          </a:prstGeom>
+          <a:noFill/>
+        </p:spPr>
+        <p:txBody>
+          <a:bodyPr wrap="none" lIns="0" rIns="0" tIns="0" bIns="0">
+            <a:spAutoFit/>
+          </a:bodyPr>
+          <a:lstStyle/>
+          <a:p>
+            <a:r>
+              <a:rPr sz="1950" b="0">
+                <a:solidFill>
+                  <a:srgbClr val="2D3748"/>
+                </a:solidFill>
+                <a:latin typeface="Microsoft JhengHei"/>
+                <a:ea typeface="Microsoft JhengHei"/>
+              </a:rPr>
+              <a:t>全冊 36~40 頁，含師長、活動、個人與留言</a:t>
+            </a:r>
+          </a:p>
+        </p:txBody>
+      </p:sp>
+      <p:sp>
+        <p:nvSpPr>
+          <p:cNvPr id="21" name="TextBox 20"/>
+          <p:cNvSpPr txBox="1"/>
+          <p:nvPr/>
+        </p:nvSpPr>
+        <p:spPr>
+          <a:xfrm>
+            <a:off x="8312149" y="1828800"/>
+            <a:ext cx="1214627" cy="228600"/>
+          </a:xfrm>
+          <a:prstGeom prst="rect">
+            <a:avLst/>
+          </a:prstGeom>
+          <a:noFill/>
+        </p:spPr>
+        <p:txBody>
+          <a:bodyPr wrap="none" lIns="0" rIns="0" tIns="0" bIns="0">
+            <a:spAutoFit/>
+          </a:bodyPr>
+          <a:lstStyle/>
+          <a:p>
+            <a:r>
+              <a:rPr sz="1800" b="1">
                 <a:solidFill>
                   <a:srgbClr val="FFFFFF"/>
                 </a:solidFill>
                 <a:latin typeface="Microsoft JhengHei"/>
                 <a:ea typeface="Microsoft JhengHei"/>
               </a:rPr>
-              <a:t>幹部推選 02</a:t>
-            </a:r>
-          </a:p>
-        </p:txBody>
-      </p:sp>
-      <p:sp>
-        <p:nvSpPr>
-          <p:cNvPr id="15" name="TextBox 14"/>
-          <p:cNvSpPr txBox="1"/>
-          <p:nvPr/>
-        </p:nvSpPr>
-        <p:spPr>
-          <a:xfrm>
-            <a:off x="6222999" y="2368550"/>
-            <a:ext cx="3134867" cy="438149"/>
-          </a:xfrm>
-          <a:prstGeom prst="rect">
-            <a:avLst/>
-          </a:prstGeom>
-          <a:noFill/>
-        </p:spPr>
-        <p:txBody>
-          <a:bodyPr wrap="none" lIns="0" rIns="0" tIns="0" bIns="0">
-            <a:spAutoFit/>
-          </a:bodyPr>
-          <a:lstStyle/>
-          <a:p>
-            <a:r>
-              <a:rPr sz="3450" b="1">
-                <a:solidFill>
-                  <a:srgbClr val="E88D67"/>
-                </a:solidFill>
-                <a:latin typeface="Microsoft JhengHei"/>
-                <a:ea typeface="Microsoft JhengHei"/>
-              </a:rPr>
-              <a:t>班親會「總務」職責</a:t>
-            </a:r>
-          </a:p>
-        </p:txBody>
-      </p:sp>
-      <p:sp>
-        <p:nvSpPr>
-          <p:cNvPr id="16" name="TextBox 15"/>
-          <p:cNvSpPr txBox="1"/>
-          <p:nvPr/>
-        </p:nvSpPr>
-        <p:spPr>
-          <a:xfrm>
-            <a:off x="6489699" y="3003549"/>
-            <a:ext cx="3604259" cy="304800"/>
-          </a:xfrm>
-          <a:prstGeom prst="rect">
-            <a:avLst/>
-          </a:prstGeom>
-          <a:noFill/>
-        </p:spPr>
-        <p:txBody>
-          <a:bodyPr wrap="none" lIns="0" rIns="0" tIns="0" bIns="0">
-            <a:spAutoFit/>
-          </a:bodyPr>
-          <a:lstStyle/>
-          <a:p>
-            <a:r>
-              <a:rPr sz="2400" b="1">
-                <a:solidFill>
-                  <a:srgbClr val="2D3748"/>
-                </a:solidFill>
-                <a:latin typeface="Microsoft JhengHei"/>
-                <a:ea typeface="Microsoft JhengHei"/>
-              </a:rPr>
-              <a:t>管理班級專屬經費帳戶，專款專用</a:t>
-            </a:r>
-          </a:p>
-        </p:txBody>
-      </p:sp>
-      <p:sp>
-        <p:nvSpPr>
-          <p:cNvPr id="17" name="TextBox 16"/>
-          <p:cNvSpPr txBox="1"/>
-          <p:nvPr/>
-        </p:nvSpPr>
-        <p:spPr>
-          <a:xfrm>
-            <a:off x="6489699" y="3498850"/>
-            <a:ext cx="4287011" cy="304800"/>
-          </a:xfrm>
-          <a:prstGeom prst="rect">
-            <a:avLst/>
-          </a:prstGeom>
-          <a:noFill/>
-        </p:spPr>
-        <p:txBody>
-          <a:bodyPr wrap="none" lIns="0" rIns="0" tIns="0" bIns="0">
-            <a:spAutoFit/>
-          </a:bodyPr>
-          <a:lstStyle/>
-          <a:p>
-            <a:r>
-              <a:rPr sz="2400" b="1">
-                <a:solidFill>
-                  <a:srgbClr val="2D3748"/>
-                </a:solidFill>
-                <a:latin typeface="Microsoft JhengHei"/>
-                <a:ea typeface="Microsoft JhengHei"/>
-              </a:rPr>
-              <a:t>負責畢業各項活動與專案款項之收取保管</a:t>
-            </a:r>
-          </a:p>
-        </p:txBody>
-      </p:sp>
-      <p:sp>
-        <p:nvSpPr>
-          <p:cNvPr id="18" name="TextBox 17"/>
-          <p:cNvSpPr txBox="1"/>
-          <p:nvPr/>
-        </p:nvSpPr>
-        <p:spPr>
-          <a:xfrm>
-            <a:off x="6489699" y="3994150"/>
-            <a:ext cx="3831843" cy="304800"/>
-          </a:xfrm>
-          <a:prstGeom prst="rect">
-            <a:avLst/>
-          </a:prstGeom>
-          <a:noFill/>
-        </p:spPr>
-        <p:txBody>
-          <a:bodyPr wrap="none" lIns="0" rIns="0" tIns="0" bIns="0">
-            <a:spAutoFit/>
-          </a:bodyPr>
-          <a:lstStyle/>
-          <a:p>
-            <a:r>
-              <a:rPr sz="2400" b="1">
-                <a:solidFill>
-                  <a:srgbClr val="2D3748"/>
-                </a:solidFill>
-                <a:latin typeface="Microsoft JhengHei"/>
-                <a:ea typeface="Microsoft JhengHei"/>
-              </a:rPr>
-              <a:t>完整保留每一筆開銷單據與合法發票</a:t>
-            </a:r>
-          </a:p>
-        </p:txBody>
-      </p:sp>
-      <p:sp>
-        <p:nvSpPr>
-          <p:cNvPr id="19" name="TextBox 18"/>
-          <p:cNvSpPr txBox="1"/>
-          <p:nvPr/>
-        </p:nvSpPr>
-        <p:spPr>
-          <a:xfrm>
-            <a:off x="6489699" y="4489450"/>
-            <a:ext cx="4059427" cy="304800"/>
-          </a:xfrm>
-          <a:prstGeom prst="rect">
-            <a:avLst/>
-          </a:prstGeom>
-          <a:noFill/>
-        </p:spPr>
-        <p:txBody>
-          <a:bodyPr wrap="none" lIns="0" rIns="0" tIns="0" bIns="0">
-            <a:spAutoFit/>
-          </a:bodyPr>
-          <a:lstStyle/>
-          <a:p>
-            <a:r>
-              <a:rPr sz="2400" b="1">
-                <a:solidFill>
-                  <a:srgbClr val="2D3748"/>
-                </a:solidFill>
-                <a:latin typeface="Microsoft JhengHei"/>
-                <a:ea typeface="Microsoft JhengHei"/>
-              </a:rPr>
-              <a:t>定期公開收支報表，財務透明全員安心</a:t>
-            </a:r>
-          </a:p>
-        </p:txBody>
-      </p:sp>
-      <p:sp>
-        <p:nvSpPr>
-          <p:cNvPr id="20" name="TextBox 19"/>
-          <p:cNvSpPr txBox="1"/>
-          <p:nvPr/>
-        </p:nvSpPr>
-        <p:spPr>
-          <a:xfrm>
-            <a:off x="6489699" y="4984750"/>
-            <a:ext cx="4287011" cy="304800"/>
-          </a:xfrm>
-          <a:prstGeom prst="rect">
-            <a:avLst/>
-          </a:prstGeom>
-          <a:noFill/>
-        </p:spPr>
-        <p:txBody>
-          <a:bodyPr wrap="none" lIns="0" rIns="0" tIns="0" bIns="0">
-            <a:spAutoFit/>
-          </a:bodyPr>
-          <a:lstStyle/>
-          <a:p>
-            <a:r>
-              <a:rPr sz="2400" b="1">
-                <a:solidFill>
-                  <a:srgbClr val="2D3748"/>
-                </a:solidFill>
-                <a:latin typeface="Microsoft JhengHei"/>
-                <a:ea typeface="Microsoft JhengHei"/>
-              </a:rPr>
-              <a:t>歡迎細心、具財務經驗的家長熱情加入！</a:t>
+              <a:t>省下額外開銷</a:t>
+            </a:r>
+          </a:p>
+        </p:txBody>
+      </p:sp>
+      <p:sp>
+        <p:nvSpPr>
+          <p:cNvPr id="22" name="TextBox 21"/>
+          <p:cNvSpPr txBox="1"/>
+          <p:nvPr/>
+        </p:nvSpPr>
+        <p:spPr>
+          <a:xfrm>
+            <a:off x="8159749" y="2178050"/>
+            <a:ext cx="3774947" cy="342900"/>
+          </a:xfrm>
+          <a:prstGeom prst="rect">
+            <a:avLst/>
+          </a:prstGeom>
+          <a:noFill/>
+        </p:spPr>
+        <p:txBody>
+          <a:bodyPr wrap="none" lIns="0" rIns="0" tIns="0" bIns="0">
+            <a:spAutoFit/>
+          </a:bodyPr>
+          <a:lstStyle/>
+          <a:p>
+            <a:r>
+              <a:rPr sz="2700" b="1">
+                <a:solidFill>
+                  <a:srgbClr val="58A47E"/>
+                </a:solidFill>
+                <a:latin typeface="Microsoft JhengHei"/>
+                <a:ea typeface="Microsoft JhengHei"/>
+              </a:rPr>
+              <a:t>【攝影配套】含 2 吋證件照</a:t>
+            </a:r>
+          </a:p>
+        </p:txBody>
+      </p:sp>
+      <p:sp>
+        <p:nvSpPr>
+          <p:cNvPr id="23" name="TextBox 22"/>
+          <p:cNvSpPr txBox="1"/>
+          <p:nvPr/>
+        </p:nvSpPr>
+        <p:spPr>
+          <a:xfrm>
+            <a:off x="8350249" y="2813050"/>
+            <a:ext cx="3704590" cy="247649"/>
+          </a:xfrm>
+          <a:prstGeom prst="rect">
+            <a:avLst/>
+          </a:prstGeom>
+          <a:noFill/>
+        </p:spPr>
+        <p:txBody>
+          <a:bodyPr wrap="none" lIns="0" rIns="0" tIns="0" bIns="0">
+            <a:spAutoFit/>
+          </a:bodyPr>
+          <a:lstStyle/>
+          <a:p>
+            <a:r>
+              <a:rPr sz="1950" b="0">
+                <a:solidFill>
+                  <a:srgbClr val="2D3748"/>
+                </a:solidFill>
+                <a:latin typeface="Microsoft JhengHei"/>
+                <a:ea typeface="Microsoft JhengHei"/>
+              </a:rPr>
+              <a:t>升國中證件照：每人 2 吋 8 張＋QR 電子檔</a:t>
+            </a:r>
+          </a:p>
+        </p:txBody>
+      </p:sp>
+      <p:sp>
+        <p:nvSpPr>
+          <p:cNvPr id="24" name="TextBox 23"/>
+          <p:cNvSpPr txBox="1"/>
+          <p:nvPr/>
+        </p:nvSpPr>
+        <p:spPr>
+          <a:xfrm>
+            <a:off x="8350249" y="3321050"/>
+            <a:ext cx="3704590" cy="247649"/>
+          </a:xfrm>
+          <a:prstGeom prst="rect">
+            <a:avLst/>
+          </a:prstGeom>
+          <a:noFill/>
+        </p:spPr>
+        <p:txBody>
+          <a:bodyPr wrap="none" lIns="0" rIns="0" tIns="0" bIns="0">
+            <a:spAutoFit/>
+          </a:bodyPr>
+          <a:lstStyle/>
+          <a:p>
+            <a:r>
+              <a:rPr sz="1950" b="0">
+                <a:solidFill>
+                  <a:srgbClr val="2D3748"/>
+                </a:solidFill>
+                <a:latin typeface="Microsoft JhengHei"/>
+                <a:ea typeface="Microsoft JhengHei"/>
+              </a:rPr>
+              <a:t>個人戶外生活照：每人專屬拍攝 3 張入冊</a:t>
+            </a:r>
+          </a:p>
+        </p:txBody>
+      </p:sp>
+      <p:sp>
+        <p:nvSpPr>
+          <p:cNvPr id="25" name="TextBox 24"/>
+          <p:cNvSpPr txBox="1"/>
+          <p:nvPr/>
+        </p:nvSpPr>
+        <p:spPr>
+          <a:xfrm>
+            <a:off x="8350249" y="3829050"/>
+            <a:ext cx="3704590" cy="247649"/>
+          </a:xfrm>
+          <a:prstGeom prst="rect">
+            <a:avLst/>
+          </a:prstGeom>
+          <a:noFill/>
+        </p:spPr>
+        <p:txBody>
+          <a:bodyPr wrap="none" lIns="0" rIns="0" tIns="0" bIns="0">
+            <a:spAutoFit/>
+          </a:bodyPr>
+          <a:lstStyle/>
+          <a:p>
+            <a:r>
+              <a:rPr sz="1950" b="0">
+                <a:solidFill>
+                  <a:srgbClr val="2D3748"/>
+                </a:solidFill>
+                <a:latin typeface="Microsoft JhengHei"/>
+                <a:ea typeface="Microsoft JhengHei"/>
+              </a:rPr>
+              <a:t>小組與團體照：5-6 人分組照＋3 款全班團照</a:t>
+            </a:r>
+          </a:p>
+        </p:txBody>
+      </p:sp>
+      <p:sp>
+        <p:nvSpPr>
+          <p:cNvPr id="26" name="TextBox 25"/>
+          <p:cNvSpPr txBox="1"/>
+          <p:nvPr/>
+        </p:nvSpPr>
+        <p:spPr>
+          <a:xfrm>
+            <a:off x="8350249" y="4337050"/>
+            <a:ext cx="3704590" cy="247649"/>
+          </a:xfrm>
+          <a:prstGeom prst="rect">
+            <a:avLst/>
+          </a:prstGeom>
+          <a:noFill/>
+        </p:spPr>
+        <p:txBody>
+          <a:bodyPr wrap="none" lIns="0" rIns="0" tIns="0" bIns="0">
+            <a:spAutoFit/>
+          </a:bodyPr>
+          <a:lstStyle/>
+          <a:p>
+            <a:r>
+              <a:rPr sz="1950" b="0">
+                <a:solidFill>
+                  <a:srgbClr val="2D3748"/>
+                </a:solidFill>
+                <a:latin typeface="Microsoft JhengHei"/>
+                <a:ea typeface="Microsoft JhengHei"/>
+              </a:rPr>
+              <a:t>校正保障：印刷前進行 2～3 次嚴格校對</a:t>
+            </a:r>
+          </a:p>
+        </p:txBody>
+      </p:sp>
+      <p:sp>
+        <p:nvSpPr>
+          <p:cNvPr id="27" name="TextBox 26"/>
+          <p:cNvSpPr txBox="1"/>
+          <p:nvPr/>
+        </p:nvSpPr>
+        <p:spPr>
+          <a:xfrm>
+            <a:off x="8350249" y="4845050"/>
+            <a:ext cx="3704590" cy="247649"/>
+          </a:xfrm>
+          <a:prstGeom prst="rect">
+            <a:avLst/>
+          </a:prstGeom>
+          <a:noFill/>
+        </p:spPr>
+        <p:txBody>
+          <a:bodyPr wrap="none" lIns="0" rIns="0" tIns="0" bIns="0">
+            <a:spAutoFit/>
+          </a:bodyPr>
+          <a:lstStyle/>
+          <a:p>
+            <a:r>
+              <a:rPr sz="1950" b="0">
+                <a:solidFill>
+                  <a:srgbClr val="2D3748"/>
+                </a:solidFill>
+                <a:latin typeface="Microsoft JhengHei"/>
+                <a:ea typeface="Microsoft JhengHei"/>
+              </a:rPr>
+              <a:t>預計 116.06.05 畢業前交貨，把關品質</a:t>
+            </a:r>
+          </a:p>
+        </p:txBody>
+      </p:sp>
+      <p:sp>
+        <p:nvSpPr>
+          <p:cNvPr id="28" name="TextBox 27"/>
+          <p:cNvSpPr txBox="1"/>
+          <p:nvPr/>
+        </p:nvSpPr>
+        <p:spPr>
+          <a:xfrm>
+            <a:off x="914399" y="5734050"/>
+            <a:ext cx="1299971" cy="247649"/>
+          </a:xfrm>
+          <a:prstGeom prst="rect">
+            <a:avLst/>
+          </a:prstGeom>
+          <a:noFill/>
+        </p:spPr>
+        <p:txBody>
+          <a:bodyPr wrap="none" lIns="0" rIns="0" tIns="0" bIns="0">
+            <a:spAutoFit/>
+          </a:bodyPr>
+          <a:lstStyle/>
+          <a:p>
+            <a:r>
+              <a:rPr sz="1950" b="1">
+                <a:solidFill>
+                  <a:srgbClr val="FFFFFF"/>
+                </a:solidFill>
+                <a:latin typeface="Microsoft JhengHei"/>
+                <a:ea typeface="Microsoft JhengHei"/>
+              </a:rPr>
+              <a:t>導師把關原則</a:t>
+            </a:r>
+          </a:p>
+        </p:txBody>
+      </p:sp>
+      <p:sp>
+        <p:nvSpPr>
+          <p:cNvPr id="29" name="TextBox 28"/>
+          <p:cNvSpPr txBox="1"/>
+          <p:nvPr/>
+        </p:nvSpPr>
+        <p:spPr>
+          <a:xfrm>
+            <a:off x="2216149" y="5721349"/>
+            <a:ext cx="8511539" cy="285750"/>
+          </a:xfrm>
+          <a:prstGeom prst="rect">
+            <a:avLst/>
+          </a:prstGeom>
+          <a:noFill/>
+        </p:spPr>
+        <p:txBody>
+          <a:bodyPr wrap="none" lIns="0" rIns="0" tIns="0" bIns="0">
+            <a:spAutoFit/>
+          </a:bodyPr>
+          <a:lstStyle/>
+          <a:p>
+            <a:r>
+              <a:rPr sz="2250" b="1">
+                <a:solidFill>
+                  <a:srgbClr val="2C5E8A"/>
+                </a:solidFill>
+                <a:latin typeface="Microsoft JhengHei"/>
+                <a:ea typeface="Microsoft JhengHei"/>
+              </a:rPr>
+              <a:t>「價格公開、品質把關；省下家長另外拍證件照的花費，更為孩子定格最燦爛的童年！」</a:t>
             </a:r>
           </a:p>
         </p:txBody>
@@ -10384,7 +10700,7 @@
                 <a:latin typeface="Microsoft JhengHei"/>
                 <a:ea typeface="Microsoft JhengHei"/>
               </a:rPr>
-              <a:t>PAGE 02 / 26</a:t>
+              <a:t>PAGE 02 / 27</a:t>
             </a:r>
           </a:p>
         </p:txBody>
@@ -10794,7 +11110,7 @@
       <p:grpSpPr/>
       <p:pic>
         <p:nvPicPr>
-          <p:cNvPr id="2" name="Picture 1" descr="20-finance-pledge.png"/>
+          <p:cNvPr id="2" name="Picture 1" descr="20-election.png"/>
           <p:cNvPicPr>
             <a:picLocks noChangeAspect="1"/>
           </p:cNvPicPr>
@@ -10881,7 +11197,7 @@
                 <a:latin typeface="Microsoft JhengHei"/>
                 <a:ea typeface="Microsoft JhengHei"/>
               </a:rPr>
-              <a:t>PAGE 20 / 26</a:t>
+              <a:t>PAGE 20 / 27</a:t>
             </a:r>
           </a:p>
         </p:txBody>
@@ -10895,7 +11211,7 @@
         <p:spPr>
           <a:xfrm>
             <a:off x="507999" y="717550"/>
-            <a:ext cx="7217155" cy="495299"/>
+            <a:ext cx="9066275" cy="495299"/>
           </a:xfrm>
           <a:prstGeom prst="rect">
             <a:avLst/>
@@ -10916,7 +11232,7 @@
                 <a:latin typeface="Microsoft JhengHei"/>
                 <a:ea typeface="Microsoft JhengHei"/>
               </a:rPr>
-              <a:t>財務公開透明：高老師與班親會的三大承諾</a:t>
+              <a:t>班級自治：推選 601 班親會「會長」與「總務」</a:t>
             </a:r>
           </a:p>
         </p:txBody>
@@ -10951,7 +11267,7 @@
                 <a:latin typeface="Microsoft JhengHei"/>
                 <a:ea typeface="Microsoft JhengHei"/>
               </a:rPr>
-              <a:t>讓每筆經費用在刀口・公開監督・老師專心教學、家長百分之百安心！</a:t>
+              <a:t>正因有畢業旅行與畢業紀念冊等重大專案，更需要家長幹部共同把關！</a:t>
             </a:r>
           </a:p>
         </p:txBody>
@@ -10964,29 +11280,29 @@
         </p:nvSpPr>
         <p:spPr>
           <a:xfrm>
-            <a:off x="1066799" y="2012950"/>
-            <a:ext cx="2124963" cy="323849"/>
-          </a:xfrm>
-          <a:prstGeom prst="rect">
-            <a:avLst/>
-          </a:prstGeom>
-          <a:noFill/>
-        </p:spPr>
-        <p:txBody>
-          <a:bodyPr wrap="none" lIns="0" rIns="0" tIns="0" bIns="0">
-            <a:spAutoFit/>
-          </a:bodyPr>
-          <a:lstStyle/>
-          <a:p>
-            <a:r>
-              <a:rPr sz="2550" b="1">
+            <a:off x="977899" y="1987550"/>
+            <a:ext cx="1584451" cy="266699"/>
+          </a:xfrm>
+          <a:prstGeom prst="rect">
+            <a:avLst/>
+          </a:prstGeom>
+          <a:noFill/>
+        </p:spPr>
+        <p:txBody>
+          <a:bodyPr wrap="none" lIns="0" rIns="0" tIns="0" bIns="0">
+            <a:spAutoFit/>
+          </a:bodyPr>
+          <a:lstStyle/>
+          <a:p>
+            <a:r>
+              <a:rPr sz="2100" b="1">
                 <a:solidFill>
                   <a:srgbClr val="FFFFFF"/>
                 </a:solidFill>
                 <a:latin typeface="Microsoft JhengHei"/>
                 <a:ea typeface="Microsoft JhengHei"/>
               </a:rPr>
-              <a:t>承諾一：專款專用</a:t>
+              <a:t>幹部推選 01</a:t>
             </a:r>
           </a:p>
         </p:txBody>
@@ -10999,29 +11315,29 @@
         </p:nvSpPr>
         <p:spPr>
           <a:xfrm>
-            <a:off x="888999" y="2400300"/>
-            <a:ext cx="6591299" cy="342900"/>
-          </a:xfrm>
-          <a:prstGeom prst="rect">
-            <a:avLst/>
-          </a:prstGeom>
-          <a:noFill/>
-        </p:spPr>
-        <p:txBody>
-          <a:bodyPr wrap="none" lIns="0" rIns="0" tIns="0" bIns="0">
-            <a:spAutoFit/>
-          </a:bodyPr>
-          <a:lstStyle/>
-          <a:p>
-            <a:r>
-              <a:rPr sz="2700" b="0">
-                <a:solidFill>
-                  <a:srgbClr val="2D3748"/>
-                </a:solidFill>
-                <a:latin typeface="Microsoft JhengHei"/>
-                <a:ea typeface="Microsoft JhengHei"/>
-              </a:rPr>
-              <a:t>班級與畢業所有經費獨立建帳保管，絕不任意挪作他用。</a:t>
+            <a:off x="825499" y="2368550"/>
+            <a:ext cx="3134867" cy="438149"/>
+          </a:xfrm>
+          <a:prstGeom prst="rect">
+            <a:avLst/>
+          </a:prstGeom>
+          <a:noFill/>
+        </p:spPr>
+        <p:txBody>
+          <a:bodyPr wrap="none" lIns="0" rIns="0" tIns="0" bIns="0">
+            <a:spAutoFit/>
+          </a:bodyPr>
+          <a:lstStyle/>
+          <a:p>
+            <a:r>
+              <a:rPr sz="3450" b="1">
+                <a:solidFill>
+                  <a:srgbClr val="2C5E8A"/>
+                </a:solidFill>
+                <a:latin typeface="Microsoft JhengHei"/>
+                <a:ea typeface="Microsoft JhengHei"/>
+              </a:rPr>
+              <a:t>班親會「會長」職責</a:t>
             </a:r>
           </a:p>
         </p:txBody>
@@ -11034,134 +11350,414 @@
         </p:nvSpPr>
         <p:spPr>
           <a:xfrm>
-            <a:off x="1066799" y="3409950"/>
-            <a:ext cx="2124963" cy="323849"/>
-          </a:xfrm>
-          <a:prstGeom prst="rect">
-            <a:avLst/>
-          </a:prstGeom>
-          <a:noFill/>
-        </p:spPr>
-        <p:txBody>
-          <a:bodyPr wrap="none" lIns="0" rIns="0" tIns="0" bIns="0">
-            <a:spAutoFit/>
-          </a:bodyPr>
-          <a:lstStyle/>
-          <a:p>
-            <a:r>
-              <a:rPr sz="2550" b="1">
+            <a:off x="1092199" y="3003549"/>
+            <a:ext cx="3604259" cy="304800"/>
+          </a:xfrm>
+          <a:prstGeom prst="rect">
+            <a:avLst/>
+          </a:prstGeom>
+          <a:noFill/>
+        </p:spPr>
+        <p:txBody>
+          <a:bodyPr wrap="none" lIns="0" rIns="0" tIns="0" bIns="0">
+            <a:spAutoFit/>
+          </a:bodyPr>
+          <a:lstStyle/>
+          <a:p>
+            <a:r>
+              <a:rPr sz="2400" b="1">
+                <a:solidFill>
+                  <a:srgbClr val="2D3748"/>
+                </a:solidFill>
+                <a:latin typeface="Microsoft JhengHei"/>
+                <a:ea typeface="Microsoft JhengHei"/>
+              </a:rPr>
+              <a:t>代表六年一班全體家長發聲與協調</a:t>
+            </a:r>
+          </a:p>
+        </p:txBody>
+      </p:sp>
+      <p:sp>
+        <p:nvSpPr>
+          <p:cNvPr id="10" name="TextBox 9"/>
+          <p:cNvSpPr txBox="1"/>
+          <p:nvPr/>
+        </p:nvSpPr>
+        <p:spPr>
+          <a:xfrm>
+            <a:off x="1092199" y="3498850"/>
+            <a:ext cx="4514595" cy="304800"/>
+          </a:xfrm>
+          <a:prstGeom prst="rect">
+            <a:avLst/>
+          </a:prstGeom>
+          <a:noFill/>
+        </p:spPr>
+        <p:txBody>
+          <a:bodyPr wrap="none" lIns="0" rIns="0" tIns="0" bIns="0">
+            <a:spAutoFit/>
+          </a:bodyPr>
+          <a:lstStyle/>
+          <a:p>
+            <a:r>
+              <a:rPr sz="2400" b="1">
+                <a:solidFill>
+                  <a:srgbClr val="2D3748"/>
+                </a:solidFill>
+                <a:latin typeface="Microsoft JhengHei"/>
+                <a:ea typeface="Microsoft JhengHei"/>
+              </a:rPr>
+              <a:t>協助策劃支援班級重大活動（畢旅、專案）</a:t>
+            </a:r>
+          </a:p>
+        </p:txBody>
+      </p:sp>
+      <p:sp>
+        <p:nvSpPr>
+          <p:cNvPr id="11" name="TextBox 10"/>
+          <p:cNvSpPr txBox="1"/>
+          <p:nvPr/>
+        </p:nvSpPr>
+        <p:spPr>
+          <a:xfrm>
+            <a:off x="1092199" y="3994150"/>
+            <a:ext cx="4059427" cy="304800"/>
+          </a:xfrm>
+          <a:prstGeom prst="rect">
+            <a:avLst/>
+          </a:prstGeom>
+          <a:noFill/>
+        </p:spPr>
+        <p:txBody>
+          <a:bodyPr wrap="none" lIns="0" rIns="0" tIns="0" bIns="0">
+            <a:spAutoFit/>
+          </a:bodyPr>
+          <a:lstStyle/>
+          <a:p>
+            <a:r>
+              <a:rPr sz="2400" b="1">
+                <a:solidFill>
+                  <a:srgbClr val="2D3748"/>
+                </a:solidFill>
+                <a:latin typeface="Microsoft JhengHei"/>
+                <a:ea typeface="Microsoft JhengHei"/>
+              </a:rPr>
+              <a:t>擔任家長與學校行政、導師間最佳橋樑</a:t>
+            </a:r>
+          </a:p>
+        </p:txBody>
+      </p:sp>
+      <p:sp>
+        <p:nvSpPr>
+          <p:cNvPr id="12" name="TextBox 11"/>
+          <p:cNvSpPr txBox="1"/>
+          <p:nvPr/>
+        </p:nvSpPr>
+        <p:spPr>
+          <a:xfrm>
+            <a:off x="1092199" y="4489450"/>
+            <a:ext cx="4287011" cy="304800"/>
+          </a:xfrm>
+          <a:prstGeom prst="rect">
+            <a:avLst/>
+          </a:prstGeom>
+          <a:noFill/>
+        </p:spPr>
+        <p:txBody>
+          <a:bodyPr wrap="none" lIns="0" rIns="0" tIns="0" bIns="0">
+            <a:spAutoFit/>
+          </a:bodyPr>
+          <a:lstStyle/>
+          <a:p>
+            <a:r>
+              <a:rPr sz="2400" b="1">
+                <a:solidFill>
+                  <a:srgbClr val="2D3748"/>
+                </a:solidFill>
+                <a:latin typeface="Microsoft JhengHei"/>
+                <a:ea typeface="Microsoft JhengHei"/>
+              </a:rPr>
+              <a:t>凝聚全班家長向心力，營造溫暖親師社群</a:t>
+            </a:r>
+          </a:p>
+        </p:txBody>
+      </p:sp>
+      <p:sp>
+        <p:nvSpPr>
+          <p:cNvPr id="13" name="TextBox 12"/>
+          <p:cNvSpPr txBox="1"/>
+          <p:nvPr/>
+        </p:nvSpPr>
+        <p:spPr>
+          <a:xfrm>
+            <a:off x="1092199" y="4984750"/>
+            <a:ext cx="4287011" cy="304800"/>
+          </a:xfrm>
+          <a:prstGeom prst="rect">
+            <a:avLst/>
+          </a:prstGeom>
+          <a:noFill/>
+        </p:spPr>
+        <p:txBody>
+          <a:bodyPr wrap="none" lIns="0" rIns="0" tIns="0" bIns="0">
+            <a:spAutoFit/>
+          </a:bodyPr>
+          <a:lstStyle/>
+          <a:p>
+            <a:r>
+              <a:rPr sz="2400" b="1">
+                <a:solidFill>
+                  <a:srgbClr val="2D3748"/>
+                </a:solidFill>
+                <a:latin typeface="Microsoft JhengHei"/>
+                <a:ea typeface="Microsoft JhengHei"/>
+              </a:rPr>
+              <a:t>歡迎熱心、富使命感的家長自薦或推薦！</a:t>
+            </a:r>
+          </a:p>
+        </p:txBody>
+      </p:sp>
+      <p:sp>
+        <p:nvSpPr>
+          <p:cNvPr id="14" name="TextBox 13"/>
+          <p:cNvSpPr txBox="1"/>
+          <p:nvPr/>
+        </p:nvSpPr>
+        <p:spPr>
+          <a:xfrm>
+            <a:off x="6375399" y="1987550"/>
+            <a:ext cx="1584451" cy="266699"/>
+          </a:xfrm>
+          <a:prstGeom prst="rect">
+            <a:avLst/>
+          </a:prstGeom>
+          <a:noFill/>
+        </p:spPr>
+        <p:txBody>
+          <a:bodyPr wrap="none" lIns="0" rIns="0" tIns="0" bIns="0">
+            <a:spAutoFit/>
+          </a:bodyPr>
+          <a:lstStyle/>
+          <a:p>
+            <a:r>
+              <a:rPr sz="2100" b="1">
                 <a:solidFill>
                   <a:srgbClr val="FFFFFF"/>
                 </a:solidFill>
                 <a:latin typeface="Microsoft JhengHei"/>
                 <a:ea typeface="Microsoft JhengHei"/>
               </a:rPr>
-              <a:t>承諾二：帳目透明</a:t>
-            </a:r>
-          </a:p>
-        </p:txBody>
-      </p:sp>
-      <p:sp>
-        <p:nvSpPr>
-          <p:cNvPr id="10" name="TextBox 9"/>
-          <p:cNvSpPr txBox="1"/>
-          <p:nvPr/>
-        </p:nvSpPr>
-        <p:spPr>
-          <a:xfrm>
-            <a:off x="888999" y="3797300"/>
-            <a:ext cx="7615427" cy="342900"/>
-          </a:xfrm>
-          <a:prstGeom prst="rect">
-            <a:avLst/>
-          </a:prstGeom>
-          <a:noFill/>
-        </p:spPr>
-        <p:txBody>
-          <a:bodyPr wrap="none" lIns="0" rIns="0" tIns="0" bIns="0">
-            <a:spAutoFit/>
-          </a:bodyPr>
-          <a:lstStyle/>
-          <a:p>
-            <a:r>
-              <a:rPr sz="2700" b="0">
-                <a:solidFill>
-                  <a:srgbClr val="2D3748"/>
-                </a:solidFill>
-                <a:latin typeface="Microsoft JhengHei"/>
-                <a:ea typeface="Microsoft JhengHei"/>
-              </a:rPr>
-              <a:t>所有單據與發票完整建檔留存，定期於群組公開清楚明細供檢視。</a:t>
-            </a:r>
-          </a:p>
-        </p:txBody>
-      </p:sp>
-      <p:sp>
-        <p:nvSpPr>
-          <p:cNvPr id="11" name="TextBox 10"/>
-          <p:cNvSpPr txBox="1"/>
-          <p:nvPr/>
-        </p:nvSpPr>
-        <p:spPr>
-          <a:xfrm>
-            <a:off x="1066799" y="4806949"/>
-            <a:ext cx="2124963" cy="323849"/>
-          </a:xfrm>
-          <a:prstGeom prst="rect">
-            <a:avLst/>
-          </a:prstGeom>
-          <a:noFill/>
-        </p:spPr>
-        <p:txBody>
-          <a:bodyPr wrap="none" lIns="0" rIns="0" tIns="0" bIns="0">
-            <a:spAutoFit/>
-          </a:bodyPr>
-          <a:lstStyle/>
-          <a:p>
-            <a:r>
-              <a:rPr sz="2550" b="1">
-                <a:solidFill>
-                  <a:srgbClr val="FFFFFF"/>
-                </a:solidFill>
-                <a:latin typeface="Microsoft JhengHei"/>
-                <a:ea typeface="Microsoft JhengHei"/>
-              </a:rPr>
-              <a:t>承諾三：雙人覆核</a:t>
-            </a:r>
-          </a:p>
-        </p:txBody>
-      </p:sp>
-      <p:sp>
-        <p:nvSpPr>
-          <p:cNvPr id="12" name="TextBox 11"/>
-          <p:cNvSpPr txBox="1"/>
-          <p:nvPr/>
-        </p:nvSpPr>
-        <p:spPr>
-          <a:xfrm>
-            <a:off x="888999" y="5194300"/>
-            <a:ext cx="7871459" cy="342900"/>
-          </a:xfrm>
-          <a:prstGeom prst="rect">
-            <a:avLst/>
-          </a:prstGeom>
-          <a:noFill/>
-        </p:spPr>
-        <p:txBody>
-          <a:bodyPr wrap="none" lIns="0" rIns="0" tIns="0" bIns="0">
-            <a:spAutoFit/>
-          </a:bodyPr>
-          <a:lstStyle/>
-          <a:p>
-            <a:r>
-              <a:rPr sz="2700" b="0">
-                <a:solidFill>
-                  <a:srgbClr val="2D3748"/>
-                </a:solidFill>
-                <a:latin typeface="Microsoft JhengHei"/>
-                <a:ea typeface="Microsoft JhengHei"/>
-              </a:rPr>
-              <a:t>總務負責記帳、會長負責監督核銷，雙重把關確保每分錢清清楚楚。</a:t>
+              <a:t>幹部推選 02</a:t>
+            </a:r>
+          </a:p>
+        </p:txBody>
+      </p:sp>
+      <p:sp>
+        <p:nvSpPr>
+          <p:cNvPr id="15" name="TextBox 14"/>
+          <p:cNvSpPr txBox="1"/>
+          <p:nvPr/>
+        </p:nvSpPr>
+        <p:spPr>
+          <a:xfrm>
+            <a:off x="6222999" y="2368550"/>
+            <a:ext cx="3134867" cy="438149"/>
+          </a:xfrm>
+          <a:prstGeom prst="rect">
+            <a:avLst/>
+          </a:prstGeom>
+          <a:noFill/>
+        </p:spPr>
+        <p:txBody>
+          <a:bodyPr wrap="none" lIns="0" rIns="0" tIns="0" bIns="0">
+            <a:spAutoFit/>
+          </a:bodyPr>
+          <a:lstStyle/>
+          <a:p>
+            <a:r>
+              <a:rPr sz="3450" b="1">
+                <a:solidFill>
+                  <a:srgbClr val="E88D67"/>
+                </a:solidFill>
+                <a:latin typeface="Microsoft JhengHei"/>
+                <a:ea typeface="Microsoft JhengHei"/>
+              </a:rPr>
+              <a:t>班親會「總務」職責</a:t>
+            </a:r>
+          </a:p>
+        </p:txBody>
+      </p:sp>
+      <p:sp>
+        <p:nvSpPr>
+          <p:cNvPr id="16" name="TextBox 15"/>
+          <p:cNvSpPr txBox="1"/>
+          <p:nvPr/>
+        </p:nvSpPr>
+        <p:spPr>
+          <a:xfrm>
+            <a:off x="6489699" y="3003549"/>
+            <a:ext cx="3604259" cy="304800"/>
+          </a:xfrm>
+          <a:prstGeom prst="rect">
+            <a:avLst/>
+          </a:prstGeom>
+          <a:noFill/>
+        </p:spPr>
+        <p:txBody>
+          <a:bodyPr wrap="none" lIns="0" rIns="0" tIns="0" bIns="0">
+            <a:spAutoFit/>
+          </a:bodyPr>
+          <a:lstStyle/>
+          <a:p>
+            <a:r>
+              <a:rPr sz="2400" b="1">
+                <a:solidFill>
+                  <a:srgbClr val="2D3748"/>
+                </a:solidFill>
+                <a:latin typeface="Microsoft JhengHei"/>
+                <a:ea typeface="Microsoft JhengHei"/>
+              </a:rPr>
+              <a:t>管理班級專屬經費帳戶，專款專用</a:t>
+            </a:r>
+          </a:p>
+        </p:txBody>
+      </p:sp>
+      <p:sp>
+        <p:nvSpPr>
+          <p:cNvPr id="17" name="TextBox 16"/>
+          <p:cNvSpPr txBox="1"/>
+          <p:nvPr/>
+        </p:nvSpPr>
+        <p:spPr>
+          <a:xfrm>
+            <a:off x="6489699" y="3498850"/>
+            <a:ext cx="4287011" cy="304800"/>
+          </a:xfrm>
+          <a:prstGeom prst="rect">
+            <a:avLst/>
+          </a:prstGeom>
+          <a:noFill/>
+        </p:spPr>
+        <p:txBody>
+          <a:bodyPr wrap="none" lIns="0" rIns="0" tIns="0" bIns="0">
+            <a:spAutoFit/>
+          </a:bodyPr>
+          <a:lstStyle/>
+          <a:p>
+            <a:r>
+              <a:rPr sz="2400" b="1">
+                <a:solidFill>
+                  <a:srgbClr val="2D3748"/>
+                </a:solidFill>
+                <a:latin typeface="Microsoft JhengHei"/>
+                <a:ea typeface="Microsoft JhengHei"/>
+              </a:rPr>
+              <a:t>負責畢業各項活動與專案款項之收取保管</a:t>
+            </a:r>
+          </a:p>
+        </p:txBody>
+      </p:sp>
+      <p:sp>
+        <p:nvSpPr>
+          <p:cNvPr id="18" name="TextBox 17"/>
+          <p:cNvSpPr txBox="1"/>
+          <p:nvPr/>
+        </p:nvSpPr>
+        <p:spPr>
+          <a:xfrm>
+            <a:off x="6489699" y="3994150"/>
+            <a:ext cx="3831843" cy="304800"/>
+          </a:xfrm>
+          <a:prstGeom prst="rect">
+            <a:avLst/>
+          </a:prstGeom>
+          <a:noFill/>
+        </p:spPr>
+        <p:txBody>
+          <a:bodyPr wrap="none" lIns="0" rIns="0" tIns="0" bIns="0">
+            <a:spAutoFit/>
+          </a:bodyPr>
+          <a:lstStyle/>
+          <a:p>
+            <a:r>
+              <a:rPr sz="2400" b="1">
+                <a:solidFill>
+                  <a:srgbClr val="2D3748"/>
+                </a:solidFill>
+                <a:latin typeface="Microsoft JhengHei"/>
+                <a:ea typeface="Microsoft JhengHei"/>
+              </a:rPr>
+              <a:t>完整保留每一筆開銷單據與合法發票</a:t>
+            </a:r>
+          </a:p>
+        </p:txBody>
+      </p:sp>
+      <p:sp>
+        <p:nvSpPr>
+          <p:cNvPr id="19" name="TextBox 18"/>
+          <p:cNvSpPr txBox="1"/>
+          <p:nvPr/>
+        </p:nvSpPr>
+        <p:spPr>
+          <a:xfrm>
+            <a:off x="6489699" y="4489450"/>
+            <a:ext cx="4059427" cy="304800"/>
+          </a:xfrm>
+          <a:prstGeom prst="rect">
+            <a:avLst/>
+          </a:prstGeom>
+          <a:noFill/>
+        </p:spPr>
+        <p:txBody>
+          <a:bodyPr wrap="none" lIns="0" rIns="0" tIns="0" bIns="0">
+            <a:spAutoFit/>
+          </a:bodyPr>
+          <a:lstStyle/>
+          <a:p>
+            <a:r>
+              <a:rPr sz="2400" b="1">
+                <a:solidFill>
+                  <a:srgbClr val="2D3748"/>
+                </a:solidFill>
+                <a:latin typeface="Microsoft JhengHei"/>
+                <a:ea typeface="Microsoft JhengHei"/>
+              </a:rPr>
+              <a:t>定期公開收支報表，財務透明全員安心</a:t>
+            </a:r>
+          </a:p>
+        </p:txBody>
+      </p:sp>
+      <p:sp>
+        <p:nvSpPr>
+          <p:cNvPr id="20" name="TextBox 19"/>
+          <p:cNvSpPr txBox="1"/>
+          <p:nvPr/>
+        </p:nvSpPr>
+        <p:spPr>
+          <a:xfrm>
+            <a:off x="6489699" y="4984750"/>
+            <a:ext cx="4287011" cy="304800"/>
+          </a:xfrm>
+          <a:prstGeom prst="rect">
+            <a:avLst/>
+          </a:prstGeom>
+          <a:noFill/>
+        </p:spPr>
+        <p:txBody>
+          <a:bodyPr wrap="none" lIns="0" rIns="0" tIns="0" bIns="0">
+            <a:spAutoFit/>
+          </a:bodyPr>
+          <a:lstStyle/>
+          <a:p>
+            <a:r>
+              <a:rPr sz="2400" b="1">
+                <a:solidFill>
+                  <a:srgbClr val="2D3748"/>
+                </a:solidFill>
+                <a:latin typeface="Microsoft JhengHei"/>
+                <a:ea typeface="Microsoft JhengHei"/>
+              </a:rPr>
+              <a:t>歡迎細心、具財務經驗的家長熱情加入！</a:t>
             </a:r>
           </a:p>
         </p:txBody>
@@ -11186,7 +11782,7 @@
       <p:grpSpPr/>
       <p:pic>
         <p:nvPicPr>
-          <p:cNvPr id="2" name="Picture 1" descr="21-committee.png"/>
+          <p:cNvPr id="2" name="Picture 1" descr="21-finance-pledge.png"/>
           <p:cNvPicPr>
             <a:picLocks noChangeAspect="1"/>
           </p:cNvPicPr>
@@ -11273,7 +11869,7 @@
                 <a:latin typeface="Microsoft JhengHei"/>
                 <a:ea typeface="Microsoft JhengHei"/>
               </a:rPr>
-              <a:t>PAGE 21 / 26</a:t>
+              <a:t>PAGE 21 / 27</a:t>
             </a:r>
           </a:p>
         </p:txBody>
@@ -11287,7 +11883,7 @@
         <p:spPr>
           <a:xfrm>
             <a:off x="507999" y="717550"/>
-            <a:ext cx="4628387" cy="495299"/>
+            <a:ext cx="7217155" cy="495299"/>
           </a:xfrm>
           <a:prstGeom prst="rect">
             <a:avLst/>
@@ -11308,7 +11904,7 @@
                 <a:latin typeface="Microsoft JhengHei"/>
                 <a:ea typeface="Microsoft JhengHei"/>
               </a:rPr>
-              <a:t>誠摯致謝：家長委員會委員</a:t>
+              <a:t>財務公開透明：高老師與班親會的三大承諾</a:t>
             </a:r>
           </a:p>
         </p:txBody>
@@ -11322,7 +11918,7 @@
         <p:spPr>
           <a:xfrm>
             <a:off x="507999" y="1162050"/>
-            <a:ext cx="6107683" cy="247649"/>
+            <a:ext cx="5922771" cy="247649"/>
           </a:xfrm>
           <a:prstGeom prst="rect">
             <a:avLst/>
@@ -11343,7 +11939,7 @@
                 <a:latin typeface="Microsoft JhengHei"/>
                 <a:ea typeface="Microsoft JhengHei"/>
               </a:rPr>
-              <a:t>感謝家長委員熱心承擔重任・成為六年一班與全校孩子最堅實的溫暖後盾</a:t>
+              <a:t>讓每筆經費用在刀口・公開監督・老師專心教學、家長百分之百安心！</a:t>
             </a:r>
           </a:p>
         </p:txBody>
@@ -11356,29 +11952,29 @@
         </p:nvSpPr>
         <p:spPr>
           <a:xfrm>
-            <a:off x="1295399" y="1987550"/>
-            <a:ext cx="2110739" cy="285750"/>
-          </a:xfrm>
-          <a:prstGeom prst="rect">
-            <a:avLst/>
-          </a:prstGeom>
-          <a:noFill/>
-        </p:spPr>
-        <p:txBody>
-          <a:bodyPr wrap="none" lIns="0" rIns="0" tIns="0" bIns="0">
-            <a:spAutoFit/>
-          </a:bodyPr>
-          <a:lstStyle/>
-          <a:p>
-            <a:r>
-              <a:rPr sz="2250" b="1">
+            <a:off x="1066799" y="2012950"/>
+            <a:ext cx="2124963" cy="323849"/>
+          </a:xfrm>
+          <a:prstGeom prst="rect">
+            <a:avLst/>
+          </a:prstGeom>
+          <a:noFill/>
+        </p:spPr>
+        <p:txBody>
+          <a:bodyPr wrap="none" lIns="0" rIns="0" tIns="0" bIns="0">
+            <a:spAutoFit/>
+          </a:bodyPr>
+          <a:lstStyle/>
+          <a:p>
+            <a:r>
+              <a:rPr sz="2550" b="1">
                 <a:solidFill>
                   <a:srgbClr val="FFFFFF"/>
                 </a:solidFill>
                 <a:latin typeface="Microsoft JhengHei"/>
                 <a:ea typeface="Microsoft JhengHei"/>
               </a:rPr>
-              <a:t>衷心感謝・熱誠奉獻</a:t>
+              <a:t>承諾一：專款專用</a:t>
             </a:r>
           </a:p>
         </p:txBody>
@@ -11391,29 +11987,29 @@
         </p:nvSpPr>
         <p:spPr>
           <a:xfrm>
-            <a:off x="1142999" y="2400300"/>
-            <a:ext cx="6676643" cy="457200"/>
-          </a:xfrm>
-          <a:prstGeom prst="rect">
-            <a:avLst/>
-          </a:prstGeom>
-          <a:noFill/>
-        </p:spPr>
-        <p:txBody>
-          <a:bodyPr wrap="none" lIns="0" rIns="0" tIns="0" bIns="0">
-            <a:spAutoFit/>
-          </a:bodyPr>
-          <a:lstStyle/>
-          <a:p>
-            <a:r>
-              <a:rPr sz="3600" b="1">
-                <a:solidFill>
-                  <a:srgbClr val="2C5E8A"/>
-                </a:solidFill>
-                <a:latin typeface="Microsoft JhengHei"/>
-                <a:ea typeface="Microsoft JhengHei"/>
-              </a:rPr>
-              <a:t>恭喜並感謝本班家長委員會委員確認產生！</a:t>
+            <a:off x="888999" y="2400300"/>
+            <a:ext cx="6591299" cy="342900"/>
+          </a:xfrm>
+          <a:prstGeom prst="rect">
+            <a:avLst/>
+          </a:prstGeom>
+          <a:noFill/>
+        </p:spPr>
+        <p:txBody>
+          <a:bodyPr wrap="none" lIns="0" rIns="0" tIns="0" bIns="0">
+            <a:spAutoFit/>
+          </a:bodyPr>
+          <a:lstStyle/>
+          <a:p>
+            <a:r>
+              <a:rPr sz="2700" b="0">
+                <a:solidFill>
+                  <a:srgbClr val="2D3748"/>
+                </a:solidFill>
+                <a:latin typeface="Microsoft JhengHei"/>
+                <a:ea typeface="Microsoft JhengHei"/>
+              </a:rPr>
+              <a:t>班級與畢業所有經費獨立建帳保管，絕不任意挪作他用。</a:t>
             </a:r>
           </a:p>
         </p:txBody>
@@ -11426,29 +12022,29 @@
         </p:nvSpPr>
         <p:spPr>
           <a:xfrm>
-            <a:off x="1142999" y="2908300"/>
-            <a:ext cx="7700771" cy="304800"/>
-          </a:xfrm>
-          <a:prstGeom prst="rect">
-            <a:avLst/>
-          </a:prstGeom>
-          <a:noFill/>
-        </p:spPr>
-        <p:txBody>
-          <a:bodyPr wrap="none" lIns="0" rIns="0" tIns="0" bIns="0">
-            <a:spAutoFit/>
-          </a:bodyPr>
-          <a:lstStyle/>
-          <a:p>
-            <a:r>
-              <a:rPr sz="2400" b="0">
-                <a:solidFill>
-                  <a:srgbClr val="2D3748"/>
-                </a:solidFill>
-                <a:latin typeface="Microsoft JhengHei"/>
-                <a:ea typeface="Microsoft JhengHei"/>
-              </a:rPr>
-              <a:t>經過前期的意願調查與推選，我們班已順利確定學校家長委員會委員名單。</a:t>
+            <a:off x="1066799" y="3409950"/>
+            <a:ext cx="2124963" cy="323849"/>
+          </a:xfrm>
+          <a:prstGeom prst="rect">
+            <a:avLst/>
+          </a:prstGeom>
+          <a:noFill/>
+        </p:spPr>
+        <p:txBody>
+          <a:bodyPr wrap="none" lIns="0" rIns="0" tIns="0" bIns="0">
+            <a:spAutoFit/>
+          </a:bodyPr>
+          <a:lstStyle/>
+          <a:p>
+            <a:r>
+              <a:rPr sz="2550" b="1">
+                <a:solidFill>
+                  <a:srgbClr val="FFFFFF"/>
+                </a:solidFill>
+                <a:latin typeface="Microsoft JhengHei"/>
+                <a:ea typeface="Microsoft JhengHei"/>
+              </a:rPr>
+              <a:t>承諾二：帳目透明</a:t>
             </a:r>
           </a:p>
         </p:txBody>
@@ -11461,64 +12057,64 @@
         </p:nvSpPr>
         <p:spPr>
           <a:xfrm>
-            <a:off x="1295399" y="3600450"/>
-            <a:ext cx="1299971" cy="247649"/>
-          </a:xfrm>
-          <a:prstGeom prst="rect">
-            <a:avLst/>
-          </a:prstGeom>
-          <a:noFill/>
-        </p:spPr>
-        <p:txBody>
-          <a:bodyPr wrap="none" lIns="0" rIns="0" tIns="0" bIns="0">
-            <a:spAutoFit/>
-          </a:bodyPr>
-          <a:lstStyle/>
-          <a:p>
-            <a:r>
-              <a:rPr sz="1950" b="1">
+            <a:off x="888999" y="3797300"/>
+            <a:ext cx="7615427" cy="342900"/>
+          </a:xfrm>
+          <a:prstGeom prst="rect">
+            <a:avLst/>
+          </a:prstGeom>
+          <a:noFill/>
+        </p:spPr>
+        <p:txBody>
+          <a:bodyPr wrap="none" lIns="0" rIns="0" tIns="0" bIns="0">
+            <a:spAutoFit/>
+          </a:bodyPr>
+          <a:lstStyle/>
+          <a:p>
+            <a:r>
+              <a:rPr sz="2700" b="0">
+                <a:solidFill>
+                  <a:srgbClr val="2D3748"/>
+                </a:solidFill>
+                <a:latin typeface="Microsoft JhengHei"/>
+                <a:ea typeface="Microsoft JhengHei"/>
+              </a:rPr>
+              <a:t>所有單據與發票完整建檔留存，定期於群組公開清楚明細供檢視。</a:t>
+            </a:r>
+          </a:p>
+        </p:txBody>
+      </p:sp>
+      <p:sp>
+        <p:nvSpPr>
+          <p:cNvPr id="11" name="TextBox 10"/>
+          <p:cNvSpPr txBox="1"/>
+          <p:nvPr/>
+        </p:nvSpPr>
+        <p:spPr>
+          <a:xfrm>
+            <a:off x="1066799" y="4806949"/>
+            <a:ext cx="2124963" cy="323849"/>
+          </a:xfrm>
+          <a:prstGeom prst="rect">
+            <a:avLst/>
+          </a:prstGeom>
+          <a:noFill/>
+        </p:spPr>
+        <p:txBody>
+          <a:bodyPr wrap="none" lIns="0" rIns="0" tIns="0" bIns="0">
+            <a:spAutoFit/>
+          </a:bodyPr>
+          <a:lstStyle/>
+          <a:p>
+            <a:r>
+              <a:rPr sz="2550" b="1">
                 <a:solidFill>
                   <a:srgbClr val="FFFFFF"/>
                 </a:solidFill>
                 <a:latin typeface="Microsoft JhengHei"/>
                 <a:ea typeface="Microsoft JhengHei"/>
               </a:rPr>
-              <a:t>搭建親師橋樑</a:t>
-            </a:r>
-          </a:p>
-        </p:txBody>
-      </p:sp>
-      <p:sp>
-        <p:nvSpPr>
-          <p:cNvPr id="11" name="TextBox 10"/>
-          <p:cNvSpPr txBox="1"/>
-          <p:nvPr/>
-        </p:nvSpPr>
-        <p:spPr>
-          <a:xfrm>
-            <a:off x="2539999" y="3575049"/>
-            <a:ext cx="5880099" cy="304800"/>
-          </a:xfrm>
-          <a:prstGeom prst="rect">
-            <a:avLst/>
-          </a:prstGeom>
-          <a:noFill/>
-        </p:spPr>
-        <p:txBody>
-          <a:bodyPr wrap="none" lIns="0" rIns="0" tIns="0" bIns="0">
-            <a:spAutoFit/>
-          </a:bodyPr>
-          <a:lstStyle/>
-          <a:p>
-            <a:r>
-              <a:rPr sz="2400" b="0">
-                <a:solidFill>
-                  <a:srgbClr val="2D3748"/>
-                </a:solidFill>
-                <a:latin typeface="Microsoft JhengHei"/>
-                <a:ea typeface="Microsoft JhengHei"/>
-              </a:rPr>
-              <a:t>代表班級參與學校校務會議，暢通班級與行政溝通管道。</a:t>
+              <a:t>承諾三：雙人覆核</a:t>
             </a:r>
           </a:p>
         </p:txBody>
@@ -11531,204 +12127,29 @@
         </p:nvSpPr>
         <p:spPr>
           <a:xfrm>
-            <a:off x="1295399" y="4121149"/>
-            <a:ext cx="1299971" cy="247649"/>
-          </a:xfrm>
-          <a:prstGeom prst="rect">
-            <a:avLst/>
-          </a:prstGeom>
-          <a:noFill/>
-        </p:spPr>
-        <p:txBody>
-          <a:bodyPr wrap="none" lIns="0" rIns="0" tIns="0" bIns="0">
-            <a:spAutoFit/>
-          </a:bodyPr>
-          <a:lstStyle/>
-          <a:p>
-            <a:r>
-              <a:rPr sz="1950" b="1">
-                <a:solidFill>
-                  <a:srgbClr val="FFFFFF"/>
-                </a:solidFill>
-                <a:latin typeface="Microsoft JhengHei"/>
-                <a:ea typeface="Microsoft JhengHei"/>
-              </a:rPr>
-              <a:t>爭取豐沛資源</a:t>
-            </a:r>
-          </a:p>
-        </p:txBody>
-      </p:sp>
-      <p:sp>
-        <p:nvSpPr>
-          <p:cNvPr id="13" name="TextBox 12"/>
-          <p:cNvSpPr txBox="1"/>
-          <p:nvPr/>
-        </p:nvSpPr>
-        <p:spPr>
-          <a:xfrm>
-            <a:off x="2539999" y="4095749"/>
-            <a:ext cx="5880099" cy="304800"/>
-          </a:xfrm>
-          <a:prstGeom prst="rect">
-            <a:avLst/>
-          </a:prstGeom>
-          <a:noFill/>
-        </p:spPr>
-        <p:txBody>
-          <a:bodyPr wrap="none" lIns="0" rIns="0" tIns="0" bIns="0">
-            <a:spAutoFit/>
-          </a:bodyPr>
-          <a:lstStyle/>
-          <a:p>
-            <a:r>
-              <a:rPr sz="2400" b="0">
-                <a:solidFill>
-                  <a:srgbClr val="2D3748"/>
-                </a:solidFill>
-                <a:latin typeface="Microsoft JhengHei"/>
-                <a:ea typeface="Microsoft JhengHei"/>
-              </a:rPr>
-              <a:t>為學童營造更優質學習環境，充實各項設備與活動基金。</a:t>
-            </a:r>
-          </a:p>
-        </p:txBody>
-      </p:sp>
-      <p:sp>
-        <p:nvSpPr>
-          <p:cNvPr id="14" name="TextBox 13"/>
-          <p:cNvSpPr txBox="1"/>
-          <p:nvPr/>
-        </p:nvSpPr>
-        <p:spPr>
-          <a:xfrm>
-            <a:off x="1295399" y="4641850"/>
-            <a:ext cx="1299971" cy="247649"/>
-          </a:xfrm>
-          <a:prstGeom prst="rect">
-            <a:avLst/>
-          </a:prstGeom>
-          <a:noFill/>
-        </p:spPr>
-        <p:txBody>
-          <a:bodyPr wrap="none" lIns="0" rIns="0" tIns="0" bIns="0">
-            <a:spAutoFit/>
-          </a:bodyPr>
-          <a:lstStyle/>
-          <a:p>
-            <a:r>
-              <a:rPr sz="1950" b="1">
-                <a:solidFill>
-                  <a:srgbClr val="FFFFFF"/>
-                </a:solidFill>
-                <a:latin typeface="Microsoft JhengHei"/>
-                <a:ea typeface="Microsoft JhengHei"/>
-              </a:rPr>
-              <a:t>守護校園安全</a:t>
-            </a:r>
-          </a:p>
-        </p:txBody>
-      </p:sp>
-      <p:sp>
-        <p:nvSpPr>
-          <p:cNvPr id="15" name="TextBox 14"/>
-          <p:cNvSpPr txBox="1"/>
-          <p:nvPr/>
-        </p:nvSpPr>
-        <p:spPr>
-          <a:xfrm>
-            <a:off x="2539999" y="4616450"/>
-            <a:ext cx="6107683" cy="304800"/>
-          </a:xfrm>
-          <a:prstGeom prst="rect">
-            <a:avLst/>
-          </a:prstGeom>
-          <a:noFill/>
-        </p:spPr>
-        <p:txBody>
-          <a:bodyPr wrap="none" lIns="0" rIns="0" tIns="0" bIns="0">
-            <a:spAutoFit/>
-          </a:bodyPr>
-          <a:lstStyle/>
-          <a:p>
-            <a:r>
-              <a:rPr sz="2400" b="0">
-                <a:solidFill>
-                  <a:srgbClr val="2D3748"/>
-                </a:solidFill>
-                <a:latin typeface="Microsoft JhengHei"/>
-                <a:ea typeface="Microsoft JhengHei"/>
-              </a:rPr>
-              <a:t>在各項校務決策中發揮家長專業，全面守護孩子身心安全。</a:t>
-            </a:r>
-          </a:p>
-        </p:txBody>
-      </p:sp>
-      <p:sp>
-        <p:nvSpPr>
-          <p:cNvPr id="16" name="TextBox 15"/>
-          <p:cNvSpPr txBox="1"/>
-          <p:nvPr/>
-        </p:nvSpPr>
-        <p:spPr>
-          <a:xfrm>
-            <a:off x="1295399" y="5162550"/>
-            <a:ext cx="1299971" cy="247649"/>
-          </a:xfrm>
-          <a:prstGeom prst="rect">
-            <a:avLst/>
-          </a:prstGeom>
-          <a:noFill/>
-        </p:spPr>
-        <p:txBody>
-          <a:bodyPr wrap="none" lIns="0" rIns="0" tIns="0" bIns="0">
-            <a:spAutoFit/>
-          </a:bodyPr>
-          <a:lstStyle/>
-          <a:p>
-            <a:r>
-              <a:rPr sz="1950" b="1">
-                <a:solidFill>
-                  <a:srgbClr val="FFFFFF"/>
-                </a:solidFill>
-                <a:latin typeface="Microsoft JhengHei"/>
-                <a:ea typeface="Microsoft JhengHei"/>
-              </a:rPr>
-              <a:t>致上班級敬意</a:t>
-            </a:r>
-          </a:p>
-        </p:txBody>
-      </p:sp>
-      <p:sp>
-        <p:nvSpPr>
-          <p:cNvPr id="17" name="TextBox 16"/>
-          <p:cNvSpPr txBox="1"/>
-          <p:nvPr/>
-        </p:nvSpPr>
-        <p:spPr>
-          <a:xfrm>
-            <a:off x="2539999" y="5137150"/>
-            <a:ext cx="6335267" cy="304800"/>
-          </a:xfrm>
-          <a:prstGeom prst="rect">
-            <a:avLst/>
-          </a:prstGeom>
-          <a:noFill/>
-        </p:spPr>
-        <p:txBody>
-          <a:bodyPr wrap="none" lIns="0" rIns="0" tIns="0" bIns="0">
-            <a:spAutoFit/>
-          </a:bodyPr>
-          <a:lstStyle/>
-          <a:p>
-            <a:r>
-              <a:rPr sz="2400" b="0">
-                <a:solidFill>
-                  <a:srgbClr val="2D3748"/>
-                </a:solidFill>
-                <a:latin typeface="Microsoft JhengHei"/>
-                <a:ea typeface="Microsoft JhengHei"/>
-              </a:rPr>
-              <a:t>高老師代表全班孩子與家長，致上最誠摯的感謝與熱烈掌聲！</a:t>
+            <a:off x="888999" y="5194300"/>
+            <a:ext cx="7871459" cy="342900"/>
+          </a:xfrm>
+          <a:prstGeom prst="rect">
+            <a:avLst/>
+          </a:prstGeom>
+          <a:noFill/>
+        </p:spPr>
+        <p:txBody>
+          <a:bodyPr wrap="none" lIns="0" rIns="0" tIns="0" bIns="0">
+            <a:spAutoFit/>
+          </a:bodyPr>
+          <a:lstStyle/>
+          <a:p>
+            <a:r>
+              <a:rPr sz="2700" b="0">
+                <a:solidFill>
+                  <a:srgbClr val="2D3748"/>
+                </a:solidFill>
+                <a:latin typeface="Microsoft JhengHei"/>
+                <a:ea typeface="Microsoft JhengHei"/>
+              </a:rPr>
+              <a:t>總務負責記帳、會長負責監督核銷，雙重把關確保每分錢清清楚楚。</a:t>
             </a:r>
           </a:p>
         </p:txBody>
@@ -11753,7 +12174,7 @@
       <p:grpSpPr/>
       <p:pic>
         <p:nvPicPr>
-          <p:cNvPr id="2" name="Picture 1" descr="22-volunteer.png"/>
+          <p:cNvPr id="2" name="Picture 1" descr="22-committee.png"/>
           <p:cNvPicPr>
             <a:picLocks noChangeAspect="1"/>
           </p:cNvPicPr>
@@ -11840,7 +12261,7 @@
                 <a:latin typeface="Microsoft JhengHei"/>
                 <a:ea typeface="Microsoft JhengHei"/>
               </a:rPr>
-              <a:t>PAGE 22 / 26</a:t>
+              <a:t>PAGE 22 / 27</a:t>
             </a:r>
           </a:p>
         </p:txBody>
@@ -11854,7 +12275,7 @@
         <p:spPr>
           <a:xfrm>
             <a:off x="507999" y="717550"/>
-            <a:ext cx="6107683" cy="495299"/>
+            <a:ext cx="4628387" cy="495299"/>
           </a:xfrm>
           <a:prstGeom prst="rect">
             <a:avLst/>
@@ -11875,7 +12296,7 @@
                 <a:latin typeface="Microsoft JhengHei"/>
                 <a:ea typeface="Microsoft JhengHei"/>
               </a:rPr>
-              <a:t>熱忱招募：115學年度愛心志工隊</a:t>
+              <a:t>誠摯致謝：家長委員會委員</a:t>
             </a:r>
           </a:p>
         </p:txBody>
@@ -11889,7 +12310,7 @@
         <p:spPr>
           <a:xfrm>
             <a:off x="507999" y="1162050"/>
-            <a:ext cx="5552947" cy="247649"/>
+            <a:ext cx="6107683" cy="247649"/>
           </a:xfrm>
           <a:prstGeom prst="rect">
             <a:avLst/>
@@ -11910,7 +12331,7 @@
                 <a:latin typeface="Microsoft JhengHei"/>
                 <a:ea typeface="Microsoft JhengHei"/>
               </a:rPr>
-              <a:t>因為有您，孩子的安全更有保障；因為有您，孩子的笑容更加燦爛</a:t>
+              <a:t>感謝家長委員熱心承擔重任・成為六年一班與全校孩子最堅實的溫暖後盾</a:t>
             </a:r>
           </a:p>
         </p:txBody>
@@ -11923,8 +12344,113 @@
         </p:nvSpPr>
         <p:spPr>
           <a:xfrm>
-            <a:off x="977899" y="1924049"/>
-            <a:ext cx="1115059" cy="247649"/>
+            <a:off x="1295399" y="1987550"/>
+            <a:ext cx="2110739" cy="285750"/>
+          </a:xfrm>
+          <a:prstGeom prst="rect">
+            <a:avLst/>
+          </a:prstGeom>
+          <a:noFill/>
+        </p:spPr>
+        <p:txBody>
+          <a:bodyPr wrap="none" lIns="0" rIns="0" tIns="0" bIns="0">
+            <a:spAutoFit/>
+          </a:bodyPr>
+          <a:lstStyle/>
+          <a:p>
+            <a:r>
+              <a:rPr sz="2250" b="1">
+                <a:solidFill>
+                  <a:srgbClr val="FFFFFF"/>
+                </a:solidFill>
+                <a:latin typeface="Microsoft JhengHei"/>
+                <a:ea typeface="Microsoft JhengHei"/>
+              </a:rPr>
+              <a:t>衷心感謝・熱誠奉獻</a:t>
+            </a:r>
+          </a:p>
+        </p:txBody>
+      </p:sp>
+      <p:sp>
+        <p:nvSpPr>
+          <p:cNvPr id="8" name="TextBox 7"/>
+          <p:cNvSpPr txBox="1"/>
+          <p:nvPr/>
+        </p:nvSpPr>
+        <p:spPr>
+          <a:xfrm>
+            <a:off x="1142999" y="2400300"/>
+            <a:ext cx="6676643" cy="457200"/>
+          </a:xfrm>
+          <a:prstGeom prst="rect">
+            <a:avLst/>
+          </a:prstGeom>
+          <a:noFill/>
+        </p:spPr>
+        <p:txBody>
+          <a:bodyPr wrap="none" lIns="0" rIns="0" tIns="0" bIns="0">
+            <a:spAutoFit/>
+          </a:bodyPr>
+          <a:lstStyle/>
+          <a:p>
+            <a:r>
+              <a:rPr sz="3600" b="1">
+                <a:solidFill>
+                  <a:srgbClr val="2C5E8A"/>
+                </a:solidFill>
+                <a:latin typeface="Microsoft JhengHei"/>
+                <a:ea typeface="Microsoft JhengHei"/>
+              </a:rPr>
+              <a:t>恭喜並感謝本班家長委員會委員確認產生！</a:t>
+            </a:r>
+          </a:p>
+        </p:txBody>
+      </p:sp>
+      <p:sp>
+        <p:nvSpPr>
+          <p:cNvPr id="9" name="TextBox 8"/>
+          <p:cNvSpPr txBox="1"/>
+          <p:nvPr/>
+        </p:nvSpPr>
+        <p:spPr>
+          <a:xfrm>
+            <a:off x="1142999" y="2908300"/>
+            <a:ext cx="7700771" cy="304800"/>
+          </a:xfrm>
+          <a:prstGeom prst="rect">
+            <a:avLst/>
+          </a:prstGeom>
+          <a:noFill/>
+        </p:spPr>
+        <p:txBody>
+          <a:bodyPr wrap="none" lIns="0" rIns="0" tIns="0" bIns="0">
+            <a:spAutoFit/>
+          </a:bodyPr>
+          <a:lstStyle/>
+          <a:p>
+            <a:r>
+              <a:rPr sz="2400" b="0">
+                <a:solidFill>
+                  <a:srgbClr val="2D3748"/>
+                </a:solidFill>
+                <a:latin typeface="Microsoft JhengHei"/>
+                <a:ea typeface="Microsoft JhengHei"/>
+              </a:rPr>
+              <a:t>經過前期的意願調查與推選，我們班已順利確定學校家長委員會委員名單。</a:t>
+            </a:r>
+          </a:p>
+        </p:txBody>
+      </p:sp>
+      <p:sp>
+        <p:nvSpPr>
+          <p:cNvPr id="10" name="TextBox 9"/>
+          <p:cNvSpPr txBox="1"/>
+          <p:nvPr/>
+        </p:nvSpPr>
+        <p:spPr>
+          <a:xfrm>
+            <a:off x="1295399" y="3600450"/>
+            <a:ext cx="1299971" cy="247649"/>
           </a:xfrm>
           <a:prstGeom prst="rect">
             <a:avLst/>
@@ -11945,56 +12471,56 @@
                 <a:latin typeface="Microsoft JhengHei"/>
                 <a:ea typeface="Microsoft JhengHei"/>
               </a:rPr>
-              <a:t>通學守護組</a:t>
-            </a:r>
-          </a:p>
-        </p:txBody>
-      </p:sp>
-      <p:sp>
-        <p:nvSpPr>
-          <p:cNvPr id="8" name="TextBox 7"/>
-          <p:cNvSpPr txBox="1"/>
-          <p:nvPr/>
-        </p:nvSpPr>
-        <p:spPr>
-          <a:xfrm>
-            <a:off x="825499" y="2273300"/>
-            <a:ext cx="3035299" cy="381000"/>
-          </a:xfrm>
-          <a:prstGeom prst="rect">
-            <a:avLst/>
-          </a:prstGeom>
-          <a:noFill/>
-        </p:spPr>
-        <p:txBody>
-          <a:bodyPr wrap="none" lIns="0" rIns="0" tIns="0" bIns="0">
-            <a:spAutoFit/>
-          </a:bodyPr>
-          <a:lstStyle/>
-          <a:p>
-            <a:r>
-              <a:rPr sz="3000" b="1">
-                <a:solidFill>
-                  <a:srgbClr val="E88D67"/>
-                </a:solidFill>
-                <a:latin typeface="Microsoft JhengHei"/>
-                <a:ea typeface="Microsoft JhengHei"/>
-              </a:rPr>
-              <a:t>交通組：學童安全維護</a:t>
-            </a:r>
-          </a:p>
-        </p:txBody>
-      </p:sp>
-      <p:sp>
-        <p:nvSpPr>
-          <p:cNvPr id="9" name="TextBox 8"/>
-          <p:cNvSpPr txBox="1"/>
-          <p:nvPr/>
-        </p:nvSpPr>
-        <p:spPr>
-          <a:xfrm>
-            <a:off x="825499" y="2654300"/>
-            <a:ext cx="3888739" cy="247649"/>
+              <a:t>搭建親師橋樑</a:t>
+            </a:r>
+          </a:p>
+        </p:txBody>
+      </p:sp>
+      <p:sp>
+        <p:nvSpPr>
+          <p:cNvPr id="11" name="TextBox 10"/>
+          <p:cNvSpPr txBox="1"/>
+          <p:nvPr/>
+        </p:nvSpPr>
+        <p:spPr>
+          <a:xfrm>
+            <a:off x="2539999" y="3575049"/>
+            <a:ext cx="5880099" cy="304800"/>
+          </a:xfrm>
+          <a:prstGeom prst="rect">
+            <a:avLst/>
+          </a:prstGeom>
+          <a:noFill/>
+        </p:spPr>
+        <p:txBody>
+          <a:bodyPr wrap="none" lIns="0" rIns="0" tIns="0" bIns="0">
+            <a:spAutoFit/>
+          </a:bodyPr>
+          <a:lstStyle/>
+          <a:p>
+            <a:r>
+              <a:rPr sz="2400" b="0">
+                <a:solidFill>
+                  <a:srgbClr val="2D3748"/>
+                </a:solidFill>
+                <a:latin typeface="Microsoft JhengHei"/>
+                <a:ea typeface="Microsoft JhengHei"/>
+              </a:rPr>
+              <a:t>代表班級參與學校校務會議，暢通班級與行政溝通管道。</a:t>
+            </a:r>
+          </a:p>
+        </p:txBody>
+      </p:sp>
+      <p:sp>
+        <p:nvSpPr>
+          <p:cNvPr id="12" name="TextBox 11"/>
+          <p:cNvSpPr txBox="1"/>
+          <p:nvPr/>
+        </p:nvSpPr>
+        <p:spPr>
+          <a:xfrm>
+            <a:off x="1295399" y="4121149"/>
+            <a:ext cx="1299971" cy="247649"/>
           </a:xfrm>
           <a:prstGeom prst="rect">
             <a:avLst/>
@@ -12010,257 +12536,152 @@
             <a:r>
               <a:rPr sz="1950" b="1">
                 <a:solidFill>
-                  <a:srgbClr val="2D3748"/>
-                </a:solidFill>
-                <a:latin typeface="Microsoft JhengHei"/>
-                <a:ea typeface="Microsoft JhengHei"/>
-              </a:rPr>
-              <a:t>服務任務：上、下學時協助維護兒童交通安全</a:t>
-            </a:r>
-          </a:p>
-        </p:txBody>
-      </p:sp>
-      <p:sp>
-        <p:nvSpPr>
-          <p:cNvPr id="10" name="TextBox 9"/>
-          <p:cNvSpPr txBox="1"/>
-          <p:nvPr/>
-        </p:nvSpPr>
-        <p:spPr>
-          <a:xfrm>
-            <a:off x="977899" y="3035300"/>
-            <a:ext cx="2693923" cy="209549"/>
-          </a:xfrm>
-          <a:prstGeom prst="rect">
-            <a:avLst/>
-          </a:prstGeom>
-          <a:noFill/>
-        </p:spPr>
-        <p:txBody>
-          <a:bodyPr wrap="none" lIns="0" rIns="0" tIns="0" bIns="0">
-            <a:spAutoFit/>
-          </a:bodyPr>
-          <a:lstStyle/>
-          <a:p>
-            <a:r>
-              <a:rPr sz="1650" b="1">
-                <a:solidFill>
                   <a:srgbClr val="FFFFFF"/>
                 </a:solidFill>
                 <a:latin typeface="Microsoft JhengHei"/>
                 <a:ea typeface="Microsoft JhengHei"/>
               </a:rPr>
-              <a:t>執勤時段（週一至週五・彈性單選）</a:t>
-            </a:r>
-          </a:p>
-        </p:txBody>
-      </p:sp>
-      <p:sp>
-        <p:nvSpPr>
-          <p:cNvPr id="11" name="TextBox 10"/>
-          <p:cNvSpPr txBox="1"/>
-          <p:nvPr/>
-        </p:nvSpPr>
-        <p:spPr>
-          <a:xfrm>
-            <a:off x="927099" y="3390899"/>
-            <a:ext cx="816355" cy="209549"/>
-          </a:xfrm>
-          <a:prstGeom prst="rect">
-            <a:avLst/>
-          </a:prstGeom>
-          <a:noFill/>
-        </p:spPr>
-        <p:txBody>
-          <a:bodyPr wrap="none" lIns="0" rIns="0" tIns="0" bIns="0">
-            <a:spAutoFit/>
-          </a:bodyPr>
-          <a:lstStyle/>
-          <a:p>
-            <a:r>
-              <a:rPr sz="1650" b="1">
+              <a:t>爭取豐沛資源</a:t>
+            </a:r>
+          </a:p>
+        </p:txBody>
+      </p:sp>
+      <p:sp>
+        <p:nvSpPr>
+          <p:cNvPr id="13" name="TextBox 12"/>
+          <p:cNvSpPr txBox="1"/>
+          <p:nvPr/>
+        </p:nvSpPr>
+        <p:spPr>
+          <a:xfrm>
+            <a:off x="2539999" y="4095749"/>
+            <a:ext cx="5880099" cy="304800"/>
+          </a:xfrm>
+          <a:prstGeom prst="rect">
+            <a:avLst/>
+          </a:prstGeom>
+          <a:noFill/>
+        </p:spPr>
+        <p:txBody>
+          <a:bodyPr wrap="none" lIns="0" rIns="0" tIns="0" bIns="0">
+            <a:spAutoFit/>
+          </a:bodyPr>
+          <a:lstStyle/>
+          <a:p>
+            <a:r>
+              <a:rPr sz="2400" b="0">
+                <a:solidFill>
+                  <a:srgbClr val="2D3748"/>
+                </a:solidFill>
+                <a:latin typeface="Microsoft JhengHei"/>
+                <a:ea typeface="Microsoft JhengHei"/>
+              </a:rPr>
+              <a:t>為學童營造更優質學習環境，充實各項設備與活動基金。</a:t>
+            </a:r>
+          </a:p>
+        </p:txBody>
+      </p:sp>
+      <p:sp>
+        <p:nvSpPr>
+          <p:cNvPr id="14" name="TextBox 13"/>
+          <p:cNvSpPr txBox="1"/>
+          <p:nvPr/>
+        </p:nvSpPr>
+        <p:spPr>
+          <a:xfrm>
+            <a:off x="1295399" y="4641850"/>
+            <a:ext cx="1299971" cy="247649"/>
+          </a:xfrm>
+          <a:prstGeom prst="rect">
+            <a:avLst/>
+          </a:prstGeom>
+          <a:noFill/>
+        </p:spPr>
+        <p:txBody>
+          <a:bodyPr wrap="none" lIns="0" rIns="0" tIns="0" bIns="0">
+            <a:spAutoFit/>
+          </a:bodyPr>
+          <a:lstStyle/>
+          <a:p>
+            <a:r>
+              <a:rPr sz="1950" b="1">
                 <a:solidFill>
                   <a:srgbClr val="FFFFFF"/>
                 </a:solidFill>
                 <a:latin typeface="Microsoft JhengHei"/>
                 <a:ea typeface="Microsoft JhengHei"/>
               </a:rPr>
-              <a:t>早上時段</a:t>
-            </a:r>
-          </a:p>
-        </p:txBody>
-      </p:sp>
-      <p:sp>
-        <p:nvSpPr>
-          <p:cNvPr id="12" name="TextBox 11"/>
-          <p:cNvSpPr txBox="1"/>
-          <p:nvPr/>
-        </p:nvSpPr>
-        <p:spPr>
-          <a:xfrm>
-            <a:off x="1650999" y="3365500"/>
-            <a:ext cx="2779267" cy="266699"/>
-          </a:xfrm>
-          <a:prstGeom prst="rect">
-            <a:avLst/>
-          </a:prstGeom>
-          <a:noFill/>
-        </p:spPr>
-        <p:txBody>
-          <a:bodyPr wrap="none" lIns="0" rIns="0" tIns="0" bIns="0">
-            <a:spAutoFit/>
-          </a:bodyPr>
-          <a:lstStyle/>
-          <a:p>
-            <a:r>
-              <a:rPr sz="2100" b="1">
-                <a:solidFill>
-                  <a:srgbClr val="2C5E8A"/>
-                </a:solidFill>
-                <a:latin typeface="Microsoft JhengHei"/>
-                <a:ea typeface="Microsoft JhengHei"/>
-              </a:rPr>
-              <a:t>07:10 - 07:50</a:t>
-            </a:r>
-          </a:p>
-        </p:txBody>
-      </p:sp>
-      <p:sp>
-        <p:nvSpPr>
-          <p:cNvPr id="13" name="TextBox 12"/>
-          <p:cNvSpPr txBox="1"/>
-          <p:nvPr/>
-        </p:nvSpPr>
-        <p:spPr>
-          <a:xfrm>
-            <a:off x="825499" y="3632199"/>
-            <a:ext cx="2644139" cy="219074"/>
-          </a:xfrm>
-          <a:prstGeom prst="rect">
-            <a:avLst/>
-          </a:prstGeom>
-          <a:noFill/>
-        </p:spPr>
-        <p:txBody>
-          <a:bodyPr wrap="none" lIns="0" rIns="0" tIns="0" bIns="0">
-            <a:spAutoFit/>
-          </a:bodyPr>
-          <a:lstStyle/>
-          <a:p>
-            <a:r>
-              <a:rPr sz="1725" b="0">
-                <a:solidFill>
-                  <a:srgbClr val="718096"/>
-                </a:solidFill>
-                <a:latin typeface="Microsoft JhengHei"/>
-                <a:ea typeface="Microsoft JhengHei"/>
-              </a:rPr>
-              <a:t>• 晨間通學巔峰路口導護與疏導</a:t>
-            </a:r>
-          </a:p>
-        </p:txBody>
-      </p:sp>
-      <p:sp>
-        <p:nvSpPr>
-          <p:cNvPr id="14" name="TextBox 13"/>
-          <p:cNvSpPr txBox="1"/>
-          <p:nvPr/>
-        </p:nvSpPr>
-        <p:spPr>
-          <a:xfrm>
-            <a:off x="927099" y="3867149"/>
-            <a:ext cx="816355" cy="209549"/>
-          </a:xfrm>
-          <a:prstGeom prst="rect">
-            <a:avLst/>
-          </a:prstGeom>
-          <a:noFill/>
-        </p:spPr>
-        <p:txBody>
-          <a:bodyPr wrap="none" lIns="0" rIns="0" tIns="0" bIns="0">
-            <a:spAutoFit/>
-          </a:bodyPr>
-          <a:lstStyle/>
-          <a:p>
-            <a:r>
-              <a:rPr sz="1650" b="1">
+              <a:t>守護校園安全</a:t>
+            </a:r>
+          </a:p>
+        </p:txBody>
+      </p:sp>
+      <p:sp>
+        <p:nvSpPr>
+          <p:cNvPr id="15" name="TextBox 14"/>
+          <p:cNvSpPr txBox="1"/>
+          <p:nvPr/>
+        </p:nvSpPr>
+        <p:spPr>
+          <a:xfrm>
+            <a:off x="2539999" y="4616450"/>
+            <a:ext cx="6107683" cy="304800"/>
+          </a:xfrm>
+          <a:prstGeom prst="rect">
+            <a:avLst/>
+          </a:prstGeom>
+          <a:noFill/>
+        </p:spPr>
+        <p:txBody>
+          <a:bodyPr wrap="none" lIns="0" rIns="0" tIns="0" bIns="0">
+            <a:spAutoFit/>
+          </a:bodyPr>
+          <a:lstStyle/>
+          <a:p>
+            <a:r>
+              <a:rPr sz="2400" b="0">
+                <a:solidFill>
+                  <a:srgbClr val="2D3748"/>
+                </a:solidFill>
+                <a:latin typeface="Microsoft JhengHei"/>
+                <a:ea typeface="Microsoft JhengHei"/>
+              </a:rPr>
+              <a:t>在各項校務決策中發揮家長專業，全面守護孩子身心安全。</a:t>
+            </a:r>
+          </a:p>
+        </p:txBody>
+      </p:sp>
+      <p:sp>
+        <p:nvSpPr>
+          <p:cNvPr id="16" name="TextBox 15"/>
+          <p:cNvSpPr txBox="1"/>
+          <p:nvPr/>
+        </p:nvSpPr>
+        <p:spPr>
+          <a:xfrm>
+            <a:off x="1295399" y="5162550"/>
+            <a:ext cx="1299971" cy="247649"/>
+          </a:xfrm>
+          <a:prstGeom prst="rect">
+            <a:avLst/>
+          </a:prstGeom>
+          <a:noFill/>
+        </p:spPr>
+        <p:txBody>
+          <a:bodyPr wrap="none" lIns="0" rIns="0" tIns="0" bIns="0">
+            <a:spAutoFit/>
+          </a:bodyPr>
+          <a:lstStyle/>
+          <a:p>
+            <a:r>
+              <a:rPr sz="1950" b="1">
                 <a:solidFill>
                   <a:srgbClr val="FFFFFF"/>
                 </a:solidFill>
                 <a:latin typeface="Microsoft JhengHei"/>
                 <a:ea typeface="Microsoft JhengHei"/>
               </a:rPr>
-              <a:t>中午時段</a:t>
-            </a:r>
-          </a:p>
-        </p:txBody>
-      </p:sp>
-      <p:sp>
-        <p:nvSpPr>
-          <p:cNvPr id="15" name="TextBox 14"/>
-          <p:cNvSpPr txBox="1"/>
-          <p:nvPr/>
-        </p:nvSpPr>
-        <p:spPr>
-          <a:xfrm>
-            <a:off x="1650999" y="3841749"/>
-            <a:ext cx="2779267" cy="266699"/>
-          </a:xfrm>
-          <a:prstGeom prst="rect">
-            <a:avLst/>
-          </a:prstGeom>
-          <a:noFill/>
-        </p:spPr>
-        <p:txBody>
-          <a:bodyPr wrap="none" lIns="0" rIns="0" tIns="0" bIns="0">
-            <a:spAutoFit/>
-          </a:bodyPr>
-          <a:lstStyle/>
-          <a:p>
-            <a:r>
-              <a:rPr sz="2100" b="1">
-                <a:solidFill>
-                  <a:srgbClr val="2C5E8A"/>
-                </a:solidFill>
-                <a:latin typeface="Microsoft JhengHei"/>
-                <a:ea typeface="Microsoft JhengHei"/>
-              </a:rPr>
-              <a:t>12:45 - 13:10</a:t>
-            </a:r>
-          </a:p>
-        </p:txBody>
-      </p:sp>
-      <p:sp>
-        <p:nvSpPr>
-          <p:cNvPr id="16" name="TextBox 15"/>
-          <p:cNvSpPr txBox="1"/>
-          <p:nvPr/>
-        </p:nvSpPr>
-        <p:spPr>
-          <a:xfrm>
-            <a:off x="825499" y="4108450"/>
-            <a:ext cx="2807715" cy="219074"/>
-          </a:xfrm>
-          <a:prstGeom prst="rect">
-            <a:avLst/>
-          </a:prstGeom>
-          <a:noFill/>
-        </p:spPr>
-        <p:txBody>
-          <a:bodyPr wrap="none" lIns="0" rIns="0" tIns="0" bIns="0">
-            <a:spAutoFit/>
-          </a:bodyPr>
-          <a:lstStyle/>
-          <a:p>
-            <a:r>
-              <a:rPr sz="1725" b="0">
-                <a:solidFill>
-                  <a:srgbClr val="718096"/>
-                </a:solidFill>
-                <a:latin typeface="Microsoft JhengHei"/>
-                <a:ea typeface="Microsoft JhengHei"/>
-              </a:rPr>
-              <a:t>• 低年級或半天放學離校安全護送</a:t>
+              <a:t>致上班級敬意</a:t>
             </a:r>
           </a:p>
         </p:txBody>
@@ -12273,554 +12694,29 @@
         </p:nvSpPr>
         <p:spPr>
           <a:xfrm>
-            <a:off x="927099" y="4343400"/>
-            <a:ext cx="816355" cy="209549"/>
-          </a:xfrm>
-          <a:prstGeom prst="rect">
-            <a:avLst/>
-          </a:prstGeom>
-          <a:noFill/>
-        </p:spPr>
-        <p:txBody>
-          <a:bodyPr wrap="none" lIns="0" rIns="0" tIns="0" bIns="0">
-            <a:spAutoFit/>
-          </a:bodyPr>
-          <a:lstStyle/>
-          <a:p>
-            <a:r>
-              <a:rPr sz="1650" b="1">
-                <a:solidFill>
-                  <a:srgbClr val="FFFFFF"/>
-                </a:solidFill>
-                <a:latin typeface="Microsoft JhengHei"/>
-                <a:ea typeface="Microsoft JhengHei"/>
-              </a:rPr>
-              <a:t>下午時段</a:t>
-            </a:r>
-          </a:p>
-        </p:txBody>
-      </p:sp>
-      <p:sp>
-        <p:nvSpPr>
-          <p:cNvPr id="18" name="TextBox 17"/>
-          <p:cNvSpPr txBox="1"/>
-          <p:nvPr/>
-        </p:nvSpPr>
-        <p:spPr>
-          <a:xfrm>
-            <a:off x="1650999" y="4318000"/>
-            <a:ext cx="2779267" cy="266699"/>
-          </a:xfrm>
-          <a:prstGeom prst="rect">
-            <a:avLst/>
-          </a:prstGeom>
-          <a:noFill/>
-        </p:spPr>
-        <p:txBody>
-          <a:bodyPr wrap="none" lIns="0" rIns="0" tIns="0" bIns="0">
-            <a:spAutoFit/>
-          </a:bodyPr>
-          <a:lstStyle/>
-          <a:p>
-            <a:r>
-              <a:rPr sz="2100" b="1">
-                <a:solidFill>
-                  <a:srgbClr val="2C5E8A"/>
-                </a:solidFill>
-                <a:latin typeface="Microsoft JhengHei"/>
-                <a:ea typeface="Microsoft JhengHei"/>
-              </a:rPr>
-              <a:t>15:45 - 16:10</a:t>
-            </a:r>
-          </a:p>
-        </p:txBody>
-      </p:sp>
-      <p:sp>
-        <p:nvSpPr>
-          <p:cNvPr id="19" name="TextBox 18"/>
-          <p:cNvSpPr txBox="1"/>
-          <p:nvPr/>
-        </p:nvSpPr>
-        <p:spPr>
-          <a:xfrm>
-            <a:off x="825499" y="4584700"/>
-            <a:ext cx="2644139" cy="219074"/>
-          </a:xfrm>
-          <a:prstGeom prst="rect">
-            <a:avLst/>
-          </a:prstGeom>
-          <a:noFill/>
-        </p:spPr>
-        <p:txBody>
-          <a:bodyPr wrap="none" lIns="0" rIns="0" tIns="0" bIns="0">
-            <a:spAutoFit/>
-          </a:bodyPr>
-          <a:lstStyle/>
-          <a:p>
-            <a:r>
-              <a:rPr sz="1725" b="0">
-                <a:solidFill>
-                  <a:srgbClr val="718096"/>
-                </a:solidFill>
-                <a:latin typeface="Microsoft JhengHei"/>
-                <a:ea typeface="Microsoft JhengHei"/>
-              </a:rPr>
-              <a:t>• 全校放學重要路段守望與交管</a:t>
-            </a:r>
-          </a:p>
-        </p:txBody>
-      </p:sp>
-      <p:sp>
-        <p:nvSpPr>
-          <p:cNvPr id="20" name="TextBox 19"/>
-          <p:cNvSpPr txBox="1"/>
-          <p:nvPr/>
-        </p:nvSpPr>
-        <p:spPr>
-          <a:xfrm>
-            <a:off x="6629399" y="1924049"/>
-            <a:ext cx="1115059" cy="247649"/>
-          </a:xfrm>
-          <a:prstGeom prst="rect">
-            <a:avLst/>
-          </a:prstGeom>
-          <a:noFill/>
-        </p:spPr>
-        <p:txBody>
-          <a:bodyPr wrap="none" lIns="0" rIns="0" tIns="0" bIns="0">
-            <a:spAutoFit/>
-          </a:bodyPr>
-          <a:lstStyle/>
-          <a:p>
-            <a:r>
-              <a:rPr sz="1950" b="1">
-                <a:solidFill>
-                  <a:srgbClr val="FFFFFF"/>
-                </a:solidFill>
-                <a:latin typeface="Microsoft JhengHei"/>
-                <a:ea typeface="Microsoft JhengHei"/>
-              </a:rPr>
-              <a:t>校園悅讀組</a:t>
-            </a:r>
-          </a:p>
-        </p:txBody>
-      </p:sp>
-      <p:sp>
-        <p:nvSpPr>
-          <p:cNvPr id="21" name="TextBox 20"/>
-          <p:cNvSpPr txBox="1"/>
-          <p:nvPr/>
-        </p:nvSpPr>
-        <p:spPr>
-          <a:xfrm>
-            <a:off x="6476999" y="2273300"/>
-            <a:ext cx="3319779" cy="381000"/>
-          </a:xfrm>
-          <a:prstGeom prst="rect">
-            <a:avLst/>
-          </a:prstGeom>
-          <a:noFill/>
-        </p:spPr>
-        <p:txBody>
-          <a:bodyPr wrap="none" lIns="0" rIns="0" tIns="0" bIns="0">
-            <a:spAutoFit/>
-          </a:bodyPr>
-          <a:lstStyle/>
-          <a:p>
-            <a:r>
-              <a:rPr sz="3000" b="1">
-                <a:solidFill>
-                  <a:srgbClr val="58A47E"/>
-                </a:solidFill>
-                <a:latin typeface="Microsoft JhengHei"/>
-                <a:ea typeface="Microsoft JhengHei"/>
-              </a:rPr>
-              <a:t>圖書組：書籍整理與借還</a:t>
-            </a:r>
-          </a:p>
-        </p:txBody>
-      </p:sp>
-      <p:sp>
-        <p:nvSpPr>
-          <p:cNvPr id="22" name="TextBox 21"/>
-          <p:cNvSpPr txBox="1"/>
-          <p:nvPr/>
-        </p:nvSpPr>
-        <p:spPr>
-          <a:xfrm>
-            <a:off x="6476999" y="2654300"/>
-            <a:ext cx="4258563" cy="247649"/>
-          </a:xfrm>
-          <a:prstGeom prst="rect">
-            <a:avLst/>
-          </a:prstGeom>
-          <a:noFill/>
-        </p:spPr>
-        <p:txBody>
-          <a:bodyPr wrap="none" lIns="0" rIns="0" tIns="0" bIns="0">
-            <a:spAutoFit/>
-          </a:bodyPr>
-          <a:lstStyle/>
-          <a:p>
-            <a:r>
-              <a:rPr sz="1950" b="1">
-                <a:solidFill>
-                  <a:srgbClr val="2D3748"/>
-                </a:solidFill>
-                <a:latin typeface="Microsoft JhengHei"/>
-                <a:ea typeface="Microsoft JhengHei"/>
-              </a:rPr>
-              <a:t>服務任務：協助圖書室書籍整理、借閱歸還與推廣</a:t>
-            </a:r>
-          </a:p>
-        </p:txBody>
-      </p:sp>
-      <p:sp>
-        <p:nvSpPr>
-          <p:cNvPr id="23" name="TextBox 22"/>
-          <p:cNvSpPr txBox="1"/>
-          <p:nvPr/>
-        </p:nvSpPr>
-        <p:spPr>
-          <a:xfrm>
-            <a:off x="6629399" y="3035300"/>
-            <a:ext cx="2693923" cy="209549"/>
-          </a:xfrm>
-          <a:prstGeom prst="rect">
-            <a:avLst/>
-          </a:prstGeom>
-          <a:noFill/>
-        </p:spPr>
-        <p:txBody>
-          <a:bodyPr wrap="none" lIns="0" rIns="0" tIns="0" bIns="0">
-            <a:spAutoFit/>
-          </a:bodyPr>
-          <a:lstStyle/>
-          <a:p>
-            <a:r>
-              <a:rPr sz="1650" b="1">
-                <a:solidFill>
-                  <a:srgbClr val="FFFFFF"/>
-                </a:solidFill>
-                <a:latin typeface="Microsoft JhengHei"/>
-                <a:ea typeface="Microsoft JhengHei"/>
-              </a:rPr>
-              <a:t>執勤時段（週一至週五・上午半天）</a:t>
-            </a:r>
-          </a:p>
-        </p:txBody>
-      </p:sp>
-      <p:sp>
-        <p:nvSpPr>
-          <p:cNvPr id="24" name="TextBox 23"/>
-          <p:cNvSpPr txBox="1"/>
-          <p:nvPr/>
-        </p:nvSpPr>
-        <p:spPr>
-          <a:xfrm>
-            <a:off x="6578599" y="3390899"/>
-            <a:ext cx="816355" cy="209549"/>
-          </a:xfrm>
-          <a:prstGeom prst="rect">
-            <a:avLst/>
-          </a:prstGeom>
-          <a:noFill/>
-        </p:spPr>
-        <p:txBody>
-          <a:bodyPr wrap="none" lIns="0" rIns="0" tIns="0" bIns="0">
-            <a:spAutoFit/>
-          </a:bodyPr>
-          <a:lstStyle/>
-          <a:p>
-            <a:r>
-              <a:rPr sz="1650" b="1">
-                <a:solidFill>
-                  <a:srgbClr val="FFFFFF"/>
-                </a:solidFill>
-                <a:latin typeface="Microsoft JhengHei"/>
-                <a:ea typeface="Microsoft JhengHei"/>
-              </a:rPr>
-              <a:t>值勤時間</a:t>
-            </a:r>
-          </a:p>
-        </p:txBody>
-      </p:sp>
-      <p:sp>
-        <p:nvSpPr>
-          <p:cNvPr id="25" name="TextBox 24"/>
-          <p:cNvSpPr txBox="1"/>
-          <p:nvPr/>
-        </p:nvSpPr>
-        <p:spPr>
-          <a:xfrm>
-            <a:off x="7302499" y="3365500"/>
-            <a:ext cx="2779267" cy="266699"/>
-          </a:xfrm>
-          <a:prstGeom prst="rect">
-            <a:avLst/>
-          </a:prstGeom>
-          <a:noFill/>
-        </p:spPr>
-        <p:txBody>
-          <a:bodyPr wrap="none" lIns="0" rIns="0" tIns="0" bIns="0">
-            <a:spAutoFit/>
-          </a:bodyPr>
-          <a:lstStyle/>
-          <a:p>
-            <a:r>
-              <a:rPr sz="2100" b="1">
-                <a:solidFill>
-                  <a:srgbClr val="2C5E8A"/>
-                </a:solidFill>
-                <a:latin typeface="Microsoft JhengHei"/>
-                <a:ea typeface="Microsoft JhengHei"/>
-              </a:rPr>
-              <a:t>08:30 - 11:30</a:t>
-            </a:r>
-          </a:p>
-        </p:txBody>
-      </p:sp>
-      <p:sp>
-        <p:nvSpPr>
-          <p:cNvPr id="26" name="TextBox 25"/>
-          <p:cNvSpPr txBox="1"/>
-          <p:nvPr/>
-        </p:nvSpPr>
-        <p:spPr>
-          <a:xfrm>
-            <a:off x="6476999" y="3632199"/>
-            <a:ext cx="2971291" cy="219074"/>
-          </a:xfrm>
-          <a:prstGeom prst="rect">
-            <a:avLst/>
-          </a:prstGeom>
-          <a:noFill/>
-        </p:spPr>
-        <p:txBody>
-          <a:bodyPr wrap="none" lIns="0" rIns="0" tIns="0" bIns="0">
-            <a:spAutoFit/>
-          </a:bodyPr>
-          <a:lstStyle/>
-          <a:p>
-            <a:r>
-              <a:rPr sz="1725" b="0">
-                <a:solidFill>
-                  <a:srgbClr val="718096"/>
-                </a:solidFill>
-                <a:latin typeface="Microsoft JhengHei"/>
-                <a:ea typeface="Microsoft JhengHei"/>
-              </a:rPr>
-              <a:t>• 晨間半天服務，沉浸溫馨書香氣息</a:t>
-            </a:r>
-          </a:p>
-        </p:txBody>
-      </p:sp>
-      <p:sp>
-        <p:nvSpPr>
-          <p:cNvPr id="27" name="TextBox 26"/>
-          <p:cNvSpPr txBox="1"/>
-          <p:nvPr/>
-        </p:nvSpPr>
-        <p:spPr>
-          <a:xfrm>
-            <a:off x="6616699" y="4089400"/>
-            <a:ext cx="759459" cy="190500"/>
-          </a:xfrm>
-          <a:prstGeom prst="rect">
-            <a:avLst/>
-          </a:prstGeom>
-          <a:noFill/>
-        </p:spPr>
-        <p:txBody>
-          <a:bodyPr wrap="none" lIns="0" rIns="0" tIns="0" bIns="0">
-            <a:spAutoFit/>
-          </a:bodyPr>
-          <a:lstStyle/>
-          <a:p>
-            <a:r>
-              <a:rPr sz="1500" b="1">
-                <a:solidFill>
-                  <a:srgbClr val="FFFFFF"/>
-                </a:solidFill>
-                <a:latin typeface="Microsoft JhengHei"/>
-                <a:ea typeface="Microsoft JhengHei"/>
-              </a:rPr>
-              <a:t>特別說明</a:t>
-            </a:r>
-          </a:p>
-        </p:txBody>
-      </p:sp>
-      <p:sp>
-        <p:nvSpPr>
-          <p:cNvPr id="28" name="TextBox 27"/>
-          <p:cNvSpPr txBox="1"/>
-          <p:nvPr/>
-        </p:nvSpPr>
-        <p:spPr>
-          <a:xfrm>
-            <a:off x="7302499" y="4076699"/>
-            <a:ext cx="2068067" cy="228600"/>
-          </a:xfrm>
-          <a:prstGeom prst="rect">
-            <a:avLst/>
-          </a:prstGeom>
-          <a:noFill/>
-        </p:spPr>
-        <p:txBody>
-          <a:bodyPr wrap="none" lIns="0" rIns="0" tIns="0" bIns="0">
-            <a:spAutoFit/>
-          </a:bodyPr>
-          <a:lstStyle/>
-          <a:p>
-            <a:r>
-              <a:rPr sz="1800" b="1">
-                <a:solidFill>
-                  <a:srgbClr val="2C5E8A"/>
-                </a:solidFill>
-                <a:latin typeface="Microsoft JhengHei"/>
-                <a:ea typeface="Microsoft JhengHei"/>
-              </a:rPr>
-              <a:t>先登記意願，開館即排班</a:t>
-            </a:r>
-          </a:p>
-        </p:txBody>
-      </p:sp>
-      <p:sp>
-        <p:nvSpPr>
-          <p:cNvPr id="29" name="TextBox 28"/>
-          <p:cNvSpPr txBox="1"/>
-          <p:nvPr/>
-        </p:nvSpPr>
-        <p:spPr>
-          <a:xfrm>
-            <a:off x="6540499" y="4337050"/>
-            <a:ext cx="4258563" cy="209549"/>
-          </a:xfrm>
-          <a:prstGeom prst="rect">
-            <a:avLst/>
-          </a:prstGeom>
-          <a:noFill/>
-        </p:spPr>
-        <p:txBody>
-          <a:bodyPr wrap="none" lIns="0" rIns="0" tIns="0" bIns="0">
-            <a:spAutoFit/>
-          </a:bodyPr>
-          <a:lstStyle/>
-          <a:p>
-            <a:r>
-              <a:rPr sz="1650" b="0">
-                <a:solidFill>
-                  <a:srgbClr val="2D3748"/>
-                </a:solidFill>
-                <a:latin typeface="Microsoft JhengHei"/>
-                <a:ea typeface="Microsoft JhengHei"/>
-              </a:rPr>
-              <a:t>※ 待學校活動中心整修驗收完畢後，即刻安排入館值勤！</a:t>
-            </a:r>
-          </a:p>
-        </p:txBody>
-      </p:sp>
-      <p:sp>
-        <p:nvSpPr>
-          <p:cNvPr id="30" name="TextBox 29"/>
-          <p:cNvSpPr txBox="1"/>
-          <p:nvPr/>
-        </p:nvSpPr>
-        <p:spPr>
-          <a:xfrm>
-            <a:off x="914399" y="5289550"/>
-            <a:ext cx="1129283" cy="209549"/>
-          </a:xfrm>
-          <a:prstGeom prst="rect">
-            <a:avLst/>
-          </a:prstGeom>
-          <a:noFill/>
-        </p:spPr>
-        <p:txBody>
-          <a:bodyPr wrap="none" lIns="0" rIns="0" tIns="0" bIns="0">
-            <a:spAutoFit/>
-          </a:bodyPr>
-          <a:lstStyle/>
-          <a:p>
-            <a:r>
-              <a:rPr sz="1650" b="1">
-                <a:solidFill>
-                  <a:srgbClr val="FFFFFF"/>
-                </a:solidFill>
-                <a:latin typeface="Microsoft JhengHei"/>
-                <a:ea typeface="Microsoft JhengHei"/>
-              </a:rPr>
-              <a:t>志工報名方式</a:t>
-            </a:r>
-          </a:p>
-        </p:txBody>
-      </p:sp>
-      <p:sp>
-        <p:nvSpPr>
-          <p:cNvPr id="31" name="TextBox 30"/>
-          <p:cNvSpPr txBox="1"/>
-          <p:nvPr/>
-        </p:nvSpPr>
-        <p:spPr>
-          <a:xfrm>
-            <a:off x="761999" y="5575300"/>
-            <a:ext cx="6662419" cy="247649"/>
-          </a:xfrm>
-          <a:prstGeom prst="rect">
-            <a:avLst/>
-          </a:prstGeom>
-          <a:noFill/>
-        </p:spPr>
-        <p:txBody>
-          <a:bodyPr wrap="none" lIns="0" rIns="0" tIns="0" bIns="0">
-            <a:spAutoFit/>
-          </a:bodyPr>
-          <a:lstStyle/>
-          <a:p>
-            <a:r>
-              <a:rPr sz="1950" b="1">
-                <a:solidFill>
-                  <a:srgbClr val="2D3748"/>
-                </a:solidFill>
-                <a:latin typeface="Microsoft JhengHei"/>
-                <a:ea typeface="Microsoft JhengHei"/>
-              </a:rPr>
-              <a:t>1. 紙本回條：填寫通知單回條並勾選組別與方便時段，交由孩子帶回學校。</a:t>
-            </a:r>
-          </a:p>
-        </p:txBody>
-      </p:sp>
-      <p:sp>
-        <p:nvSpPr>
-          <p:cNvPr id="32" name="TextBox 31"/>
-          <p:cNvSpPr txBox="1"/>
-          <p:nvPr/>
-        </p:nvSpPr>
-        <p:spPr>
-          <a:xfrm>
-            <a:off x="761999" y="5797550"/>
-            <a:ext cx="7586979" cy="247649"/>
-          </a:xfrm>
-          <a:prstGeom prst="rect">
-            <a:avLst/>
-          </a:prstGeom>
-          <a:noFill/>
-        </p:spPr>
-        <p:txBody>
-          <a:bodyPr wrap="none" lIns="0" rIns="0" tIns="0" bIns="0">
-            <a:spAutoFit/>
-          </a:bodyPr>
-          <a:lstStyle/>
-          <a:p>
-            <a:r>
-              <a:rPr sz="1950" b="1">
-                <a:solidFill>
-                  <a:srgbClr val="2C5E8A"/>
-                </a:solidFill>
-                <a:latin typeface="Microsoft JhengHei"/>
-                <a:ea typeface="Microsoft JhengHei"/>
-              </a:rPr>
-              <a:t>2. 導師登記：亦可直接向高志賢老師口頭登記，或於 LINE 班級官方訊息報名！</a:t>
+            <a:off x="2539999" y="5137150"/>
+            <a:ext cx="6335267" cy="304800"/>
+          </a:xfrm>
+          <a:prstGeom prst="rect">
+            <a:avLst/>
+          </a:prstGeom>
+          <a:noFill/>
+        </p:spPr>
+        <p:txBody>
+          <a:bodyPr wrap="none" lIns="0" rIns="0" tIns="0" bIns="0">
+            <a:spAutoFit/>
+          </a:bodyPr>
+          <a:lstStyle/>
+          <a:p>
+            <a:r>
+              <a:rPr sz="2400" b="0">
+                <a:solidFill>
+                  <a:srgbClr val="2D3748"/>
+                </a:solidFill>
+                <a:latin typeface="Microsoft JhengHei"/>
+                <a:ea typeface="Microsoft JhengHei"/>
+              </a:rPr>
+              <a:t>高老師代表全班孩子與家長，致上最誠摯的感謝與熱烈掌聲！</a:t>
             </a:r>
           </a:p>
         </p:txBody>
@@ -12845,7 +12741,7 @@
       <p:grpSpPr/>
       <p:pic>
         <p:nvPicPr>
-          <p:cNvPr id="2" name="Picture 1" descr="23-communication.png"/>
+          <p:cNvPr id="2" name="Picture 1" descr="23-volunteer.png"/>
           <p:cNvPicPr>
             <a:picLocks noChangeAspect="1"/>
           </p:cNvPicPr>
@@ -12932,7 +12828,7 @@
                 <a:latin typeface="Microsoft JhengHei"/>
                 <a:ea typeface="Microsoft JhengHei"/>
               </a:rPr>
-              <a:t>PAGE 23 / 26</a:t>
+              <a:t>PAGE 23 / 27</a:t>
             </a:r>
           </a:p>
         </p:txBody>
@@ -12946,7 +12842,7 @@
         <p:spPr>
           <a:xfrm>
             <a:off x="507999" y="717550"/>
-            <a:ext cx="6477507" cy="495299"/>
+            <a:ext cx="6107683" cy="495299"/>
           </a:xfrm>
           <a:prstGeom prst="rect">
             <a:avLst/>
@@ -12967,7 +12863,7 @@
                 <a:latin typeface="Microsoft JhengHei"/>
                 <a:ea typeface="Microsoft JhengHei"/>
               </a:rPr>
-              <a:t>親師即時連線：攜手同行做孩子的橋樑</a:t>
+              <a:t>熱忱招募：115學年度愛心志工隊</a:t>
             </a:r>
           </a:p>
         </p:txBody>
@@ -12981,7 +12877,7 @@
         <p:spPr>
           <a:xfrm>
             <a:off x="507999" y="1162050"/>
-            <a:ext cx="6107683" cy="247649"/>
+            <a:ext cx="5552947" cy="247649"/>
           </a:xfrm>
           <a:prstGeom prst="rect">
             <a:avLst/>
@@ -13002,7 +12898,7 @@
                 <a:latin typeface="Microsoft JhengHei"/>
                 <a:ea typeface="Microsoft JhengHei"/>
               </a:rPr>
-              <a:t>孩子有任何狀況請第一時間與導師聯繫・親師互信合作比事後焦慮更有效</a:t>
+              <a:t>因為有您，孩子的安全更有保障；因為有您，孩子的笑容更加燦爛</a:t>
             </a:r>
           </a:p>
         </p:txBody>
@@ -13015,8 +12911,8 @@
         </p:nvSpPr>
         <p:spPr>
           <a:xfrm>
-            <a:off x="977899" y="2019299"/>
-            <a:ext cx="1299971" cy="247649"/>
+            <a:off x="977899" y="1924049"/>
+            <a:ext cx="1115059" cy="247649"/>
           </a:xfrm>
           <a:prstGeom prst="rect">
             <a:avLst/>
@@ -13037,7 +12933,7 @@
                 <a:latin typeface="Microsoft JhengHei"/>
                 <a:ea typeface="Microsoft JhengHei"/>
               </a:rPr>
-              <a:t>平時日常聯繫</a:t>
+              <a:t>通學守護組</a:t>
             </a:r>
           </a:p>
         </p:txBody>
@@ -13050,112 +12946,602 @@
         </p:nvSpPr>
         <p:spPr>
           <a:xfrm>
-            <a:off x="825499" y="2432049"/>
-            <a:ext cx="4073651" cy="400049"/>
-          </a:xfrm>
-          <a:prstGeom prst="rect">
-            <a:avLst/>
-          </a:prstGeom>
-          <a:noFill/>
-        </p:spPr>
-        <p:txBody>
-          <a:bodyPr wrap="none" lIns="0" rIns="0" tIns="0" bIns="0">
-            <a:spAutoFit/>
-          </a:bodyPr>
-          <a:lstStyle/>
-          <a:p>
-            <a:r>
-              <a:rPr sz="3150" b="1">
+            <a:off x="825499" y="2273300"/>
+            <a:ext cx="3035299" cy="381000"/>
+          </a:xfrm>
+          <a:prstGeom prst="rect">
+            <a:avLst/>
+          </a:prstGeom>
+          <a:noFill/>
+        </p:spPr>
+        <p:txBody>
+          <a:bodyPr wrap="none" lIns="0" rIns="0" tIns="0" bIns="0">
+            <a:spAutoFit/>
+          </a:bodyPr>
+          <a:lstStyle/>
+          <a:p>
+            <a:r>
+              <a:rPr sz="3000" b="1">
+                <a:solidFill>
+                  <a:srgbClr val="E88D67"/>
+                </a:solidFill>
+                <a:latin typeface="Microsoft JhengHei"/>
+                <a:ea typeface="Microsoft JhengHei"/>
+              </a:rPr>
+              <a:t>交通組：學童安全維護</a:t>
+            </a:r>
+          </a:p>
+        </p:txBody>
+      </p:sp>
+      <p:sp>
+        <p:nvSpPr>
+          <p:cNvPr id="9" name="TextBox 8"/>
+          <p:cNvSpPr txBox="1"/>
+          <p:nvPr/>
+        </p:nvSpPr>
+        <p:spPr>
+          <a:xfrm>
+            <a:off x="825499" y="2654300"/>
+            <a:ext cx="3888739" cy="247649"/>
+          </a:xfrm>
+          <a:prstGeom prst="rect">
+            <a:avLst/>
+          </a:prstGeom>
+          <a:noFill/>
+        </p:spPr>
+        <p:txBody>
+          <a:bodyPr wrap="none" lIns="0" rIns="0" tIns="0" bIns="0">
+            <a:spAutoFit/>
+          </a:bodyPr>
+          <a:lstStyle/>
+          <a:p>
+            <a:r>
+              <a:rPr sz="1950" b="1">
+                <a:solidFill>
+                  <a:srgbClr val="2D3748"/>
+                </a:solidFill>
+                <a:latin typeface="Microsoft JhengHei"/>
+                <a:ea typeface="Microsoft JhengHei"/>
+              </a:rPr>
+              <a:t>服務任務：上、下學時協助維護兒童交通安全</a:t>
+            </a:r>
+          </a:p>
+        </p:txBody>
+      </p:sp>
+      <p:sp>
+        <p:nvSpPr>
+          <p:cNvPr id="10" name="TextBox 9"/>
+          <p:cNvSpPr txBox="1"/>
+          <p:nvPr/>
+        </p:nvSpPr>
+        <p:spPr>
+          <a:xfrm>
+            <a:off x="977899" y="3035300"/>
+            <a:ext cx="2693923" cy="209549"/>
+          </a:xfrm>
+          <a:prstGeom prst="rect">
+            <a:avLst/>
+          </a:prstGeom>
+          <a:noFill/>
+        </p:spPr>
+        <p:txBody>
+          <a:bodyPr wrap="none" lIns="0" rIns="0" tIns="0" bIns="0">
+            <a:spAutoFit/>
+          </a:bodyPr>
+          <a:lstStyle/>
+          <a:p>
+            <a:r>
+              <a:rPr sz="1650" b="1">
+                <a:solidFill>
+                  <a:srgbClr val="FFFFFF"/>
+                </a:solidFill>
+                <a:latin typeface="Microsoft JhengHei"/>
+                <a:ea typeface="Microsoft JhengHei"/>
+              </a:rPr>
+              <a:t>執勤時段（週一至週五・彈性單選）</a:t>
+            </a:r>
+          </a:p>
+        </p:txBody>
+      </p:sp>
+      <p:sp>
+        <p:nvSpPr>
+          <p:cNvPr id="11" name="TextBox 10"/>
+          <p:cNvSpPr txBox="1"/>
+          <p:nvPr/>
+        </p:nvSpPr>
+        <p:spPr>
+          <a:xfrm>
+            <a:off x="927099" y="3390899"/>
+            <a:ext cx="816355" cy="209549"/>
+          </a:xfrm>
+          <a:prstGeom prst="rect">
+            <a:avLst/>
+          </a:prstGeom>
+          <a:noFill/>
+        </p:spPr>
+        <p:txBody>
+          <a:bodyPr wrap="none" lIns="0" rIns="0" tIns="0" bIns="0">
+            <a:spAutoFit/>
+          </a:bodyPr>
+          <a:lstStyle/>
+          <a:p>
+            <a:r>
+              <a:rPr sz="1650" b="1">
+                <a:solidFill>
+                  <a:srgbClr val="FFFFFF"/>
+                </a:solidFill>
+                <a:latin typeface="Microsoft JhengHei"/>
+                <a:ea typeface="Microsoft JhengHei"/>
+              </a:rPr>
+              <a:t>早上時段</a:t>
+            </a:r>
+          </a:p>
+        </p:txBody>
+      </p:sp>
+      <p:sp>
+        <p:nvSpPr>
+          <p:cNvPr id="12" name="TextBox 11"/>
+          <p:cNvSpPr txBox="1"/>
+          <p:nvPr/>
+        </p:nvSpPr>
+        <p:spPr>
+          <a:xfrm>
+            <a:off x="1650999" y="3365500"/>
+            <a:ext cx="2779267" cy="266699"/>
+          </a:xfrm>
+          <a:prstGeom prst="rect">
+            <a:avLst/>
+          </a:prstGeom>
+          <a:noFill/>
+        </p:spPr>
+        <p:txBody>
+          <a:bodyPr wrap="none" lIns="0" rIns="0" tIns="0" bIns="0">
+            <a:spAutoFit/>
+          </a:bodyPr>
+          <a:lstStyle/>
+          <a:p>
+            <a:r>
+              <a:rPr sz="2100" b="1">
+                <a:solidFill>
+                  <a:srgbClr val="2C5E8A"/>
+                </a:solidFill>
+                <a:latin typeface="Microsoft JhengHei"/>
+                <a:ea typeface="Microsoft JhengHei"/>
+              </a:rPr>
+              <a:t>07:10 - 07:50</a:t>
+            </a:r>
+          </a:p>
+        </p:txBody>
+      </p:sp>
+      <p:sp>
+        <p:nvSpPr>
+          <p:cNvPr id="13" name="TextBox 12"/>
+          <p:cNvSpPr txBox="1"/>
+          <p:nvPr/>
+        </p:nvSpPr>
+        <p:spPr>
+          <a:xfrm>
+            <a:off x="825499" y="3632199"/>
+            <a:ext cx="2644139" cy="219074"/>
+          </a:xfrm>
+          <a:prstGeom prst="rect">
+            <a:avLst/>
+          </a:prstGeom>
+          <a:noFill/>
+        </p:spPr>
+        <p:txBody>
+          <a:bodyPr wrap="none" lIns="0" rIns="0" tIns="0" bIns="0">
+            <a:spAutoFit/>
+          </a:bodyPr>
+          <a:lstStyle/>
+          <a:p>
+            <a:r>
+              <a:rPr sz="1725" b="0">
+                <a:solidFill>
+                  <a:srgbClr val="718096"/>
+                </a:solidFill>
+                <a:latin typeface="Microsoft JhengHei"/>
+                <a:ea typeface="Microsoft JhengHei"/>
+              </a:rPr>
+              <a:t>• 晨間通學巔峰路口導護與疏導</a:t>
+            </a:r>
+          </a:p>
+        </p:txBody>
+      </p:sp>
+      <p:sp>
+        <p:nvSpPr>
+          <p:cNvPr id="14" name="TextBox 13"/>
+          <p:cNvSpPr txBox="1"/>
+          <p:nvPr/>
+        </p:nvSpPr>
+        <p:spPr>
+          <a:xfrm>
+            <a:off x="927099" y="3867149"/>
+            <a:ext cx="816355" cy="209549"/>
+          </a:xfrm>
+          <a:prstGeom prst="rect">
+            <a:avLst/>
+          </a:prstGeom>
+          <a:noFill/>
+        </p:spPr>
+        <p:txBody>
+          <a:bodyPr wrap="none" lIns="0" rIns="0" tIns="0" bIns="0">
+            <a:spAutoFit/>
+          </a:bodyPr>
+          <a:lstStyle/>
+          <a:p>
+            <a:r>
+              <a:rPr sz="1650" b="1">
+                <a:solidFill>
+                  <a:srgbClr val="FFFFFF"/>
+                </a:solidFill>
+                <a:latin typeface="Microsoft JhengHei"/>
+                <a:ea typeface="Microsoft JhengHei"/>
+              </a:rPr>
+              <a:t>中午時段</a:t>
+            </a:r>
+          </a:p>
+        </p:txBody>
+      </p:sp>
+      <p:sp>
+        <p:nvSpPr>
+          <p:cNvPr id="15" name="TextBox 14"/>
+          <p:cNvSpPr txBox="1"/>
+          <p:nvPr/>
+        </p:nvSpPr>
+        <p:spPr>
+          <a:xfrm>
+            <a:off x="1650999" y="3841749"/>
+            <a:ext cx="2779267" cy="266699"/>
+          </a:xfrm>
+          <a:prstGeom prst="rect">
+            <a:avLst/>
+          </a:prstGeom>
+          <a:noFill/>
+        </p:spPr>
+        <p:txBody>
+          <a:bodyPr wrap="none" lIns="0" rIns="0" tIns="0" bIns="0">
+            <a:spAutoFit/>
+          </a:bodyPr>
+          <a:lstStyle/>
+          <a:p>
+            <a:r>
+              <a:rPr sz="2100" b="1">
+                <a:solidFill>
+                  <a:srgbClr val="2C5E8A"/>
+                </a:solidFill>
+                <a:latin typeface="Microsoft JhengHei"/>
+                <a:ea typeface="Microsoft JhengHei"/>
+              </a:rPr>
+              <a:t>12:45 - 13:10</a:t>
+            </a:r>
+          </a:p>
+        </p:txBody>
+      </p:sp>
+      <p:sp>
+        <p:nvSpPr>
+          <p:cNvPr id="16" name="TextBox 15"/>
+          <p:cNvSpPr txBox="1"/>
+          <p:nvPr/>
+        </p:nvSpPr>
+        <p:spPr>
+          <a:xfrm>
+            <a:off x="825499" y="4108450"/>
+            <a:ext cx="2807715" cy="219074"/>
+          </a:xfrm>
+          <a:prstGeom prst="rect">
+            <a:avLst/>
+          </a:prstGeom>
+          <a:noFill/>
+        </p:spPr>
+        <p:txBody>
+          <a:bodyPr wrap="none" lIns="0" rIns="0" tIns="0" bIns="0">
+            <a:spAutoFit/>
+          </a:bodyPr>
+          <a:lstStyle/>
+          <a:p>
+            <a:r>
+              <a:rPr sz="1725" b="0">
+                <a:solidFill>
+                  <a:srgbClr val="718096"/>
+                </a:solidFill>
+                <a:latin typeface="Microsoft JhengHei"/>
+                <a:ea typeface="Microsoft JhengHei"/>
+              </a:rPr>
+              <a:t>• 低年級或半天放學離校安全護送</a:t>
+            </a:r>
+          </a:p>
+        </p:txBody>
+      </p:sp>
+      <p:sp>
+        <p:nvSpPr>
+          <p:cNvPr id="17" name="TextBox 16"/>
+          <p:cNvSpPr txBox="1"/>
+          <p:nvPr/>
+        </p:nvSpPr>
+        <p:spPr>
+          <a:xfrm>
+            <a:off x="927099" y="4343400"/>
+            <a:ext cx="816355" cy="209549"/>
+          </a:xfrm>
+          <a:prstGeom prst="rect">
+            <a:avLst/>
+          </a:prstGeom>
+          <a:noFill/>
+        </p:spPr>
+        <p:txBody>
+          <a:bodyPr wrap="none" lIns="0" rIns="0" tIns="0" bIns="0">
+            <a:spAutoFit/>
+          </a:bodyPr>
+          <a:lstStyle/>
+          <a:p>
+            <a:r>
+              <a:rPr sz="1650" b="1">
+                <a:solidFill>
+                  <a:srgbClr val="FFFFFF"/>
+                </a:solidFill>
+                <a:latin typeface="Microsoft JhengHei"/>
+                <a:ea typeface="Microsoft JhengHei"/>
+              </a:rPr>
+              <a:t>下午時段</a:t>
+            </a:r>
+          </a:p>
+        </p:txBody>
+      </p:sp>
+      <p:sp>
+        <p:nvSpPr>
+          <p:cNvPr id="18" name="TextBox 17"/>
+          <p:cNvSpPr txBox="1"/>
+          <p:nvPr/>
+        </p:nvSpPr>
+        <p:spPr>
+          <a:xfrm>
+            <a:off x="1650999" y="4318000"/>
+            <a:ext cx="2779267" cy="266699"/>
+          </a:xfrm>
+          <a:prstGeom prst="rect">
+            <a:avLst/>
+          </a:prstGeom>
+          <a:noFill/>
+        </p:spPr>
+        <p:txBody>
+          <a:bodyPr wrap="none" lIns="0" rIns="0" tIns="0" bIns="0">
+            <a:spAutoFit/>
+          </a:bodyPr>
+          <a:lstStyle/>
+          <a:p>
+            <a:r>
+              <a:rPr sz="2100" b="1">
+                <a:solidFill>
+                  <a:srgbClr val="2C5E8A"/>
+                </a:solidFill>
+                <a:latin typeface="Microsoft JhengHei"/>
+                <a:ea typeface="Microsoft JhengHei"/>
+              </a:rPr>
+              <a:t>15:45 - 16:10</a:t>
+            </a:r>
+          </a:p>
+        </p:txBody>
+      </p:sp>
+      <p:sp>
+        <p:nvSpPr>
+          <p:cNvPr id="19" name="TextBox 18"/>
+          <p:cNvSpPr txBox="1"/>
+          <p:nvPr/>
+        </p:nvSpPr>
+        <p:spPr>
+          <a:xfrm>
+            <a:off x="825499" y="4584700"/>
+            <a:ext cx="2644139" cy="219074"/>
+          </a:xfrm>
+          <a:prstGeom prst="rect">
+            <a:avLst/>
+          </a:prstGeom>
+          <a:noFill/>
+        </p:spPr>
+        <p:txBody>
+          <a:bodyPr wrap="none" lIns="0" rIns="0" tIns="0" bIns="0">
+            <a:spAutoFit/>
+          </a:bodyPr>
+          <a:lstStyle/>
+          <a:p>
+            <a:r>
+              <a:rPr sz="1725" b="0">
+                <a:solidFill>
+                  <a:srgbClr val="718096"/>
+                </a:solidFill>
+                <a:latin typeface="Microsoft JhengHei"/>
+                <a:ea typeface="Microsoft JhengHei"/>
+              </a:rPr>
+              <a:t>• 全校放學重要路段守望與交管</a:t>
+            </a:r>
+          </a:p>
+        </p:txBody>
+      </p:sp>
+      <p:sp>
+        <p:nvSpPr>
+          <p:cNvPr id="20" name="TextBox 19"/>
+          <p:cNvSpPr txBox="1"/>
+          <p:nvPr/>
+        </p:nvSpPr>
+        <p:spPr>
+          <a:xfrm>
+            <a:off x="6629399" y="1924049"/>
+            <a:ext cx="1115059" cy="247649"/>
+          </a:xfrm>
+          <a:prstGeom prst="rect">
+            <a:avLst/>
+          </a:prstGeom>
+          <a:noFill/>
+        </p:spPr>
+        <p:txBody>
+          <a:bodyPr wrap="none" lIns="0" rIns="0" tIns="0" bIns="0">
+            <a:spAutoFit/>
+          </a:bodyPr>
+          <a:lstStyle/>
+          <a:p>
+            <a:r>
+              <a:rPr sz="1950" b="1">
+                <a:solidFill>
+                  <a:srgbClr val="FFFFFF"/>
+                </a:solidFill>
+                <a:latin typeface="Microsoft JhengHei"/>
+                <a:ea typeface="Microsoft JhengHei"/>
+              </a:rPr>
+              <a:t>校園悅讀組</a:t>
+            </a:r>
+          </a:p>
+        </p:txBody>
+      </p:sp>
+      <p:sp>
+        <p:nvSpPr>
+          <p:cNvPr id="21" name="TextBox 20"/>
+          <p:cNvSpPr txBox="1"/>
+          <p:nvPr/>
+        </p:nvSpPr>
+        <p:spPr>
+          <a:xfrm>
+            <a:off x="6476999" y="2273300"/>
+            <a:ext cx="3319779" cy="381000"/>
+          </a:xfrm>
+          <a:prstGeom prst="rect">
+            <a:avLst/>
+          </a:prstGeom>
+          <a:noFill/>
+        </p:spPr>
+        <p:txBody>
+          <a:bodyPr wrap="none" lIns="0" rIns="0" tIns="0" bIns="0">
+            <a:spAutoFit/>
+          </a:bodyPr>
+          <a:lstStyle/>
+          <a:p>
+            <a:r>
+              <a:rPr sz="3000" b="1">
                 <a:solidFill>
                   <a:srgbClr val="58A47E"/>
                 </a:solidFill>
                 <a:latin typeface="Microsoft JhengHei"/>
                 <a:ea typeface="Microsoft JhengHei"/>
               </a:rPr>
-              <a:t>LINE 官方訊息（推薦）</a:t>
-            </a:r>
-          </a:p>
-        </p:txBody>
-      </p:sp>
-      <p:sp>
-        <p:nvSpPr>
-          <p:cNvPr id="9" name="TextBox 8"/>
-          <p:cNvSpPr txBox="1"/>
-          <p:nvPr/>
-        </p:nvSpPr>
-        <p:spPr>
-          <a:xfrm>
-            <a:off x="1079499" y="2940050"/>
-            <a:ext cx="3177539" cy="266699"/>
-          </a:xfrm>
-          <a:prstGeom prst="rect">
-            <a:avLst/>
-          </a:prstGeom>
-          <a:noFill/>
-        </p:spPr>
-        <p:txBody>
-          <a:bodyPr wrap="none" lIns="0" rIns="0" tIns="0" bIns="0">
-            <a:spAutoFit/>
-          </a:bodyPr>
-          <a:lstStyle/>
-          <a:p>
-            <a:r>
-              <a:rPr sz="2100" b="0">
-                <a:solidFill>
-                  <a:srgbClr val="2D3748"/>
-                </a:solidFill>
-                <a:latin typeface="Microsoft JhengHei"/>
-                <a:ea typeface="Microsoft JhengHei"/>
-              </a:rPr>
-              <a:t>適用孩子平日學習狀況與作業諮詢</a:t>
-            </a:r>
-          </a:p>
-        </p:txBody>
-      </p:sp>
-      <p:sp>
-        <p:nvSpPr>
-          <p:cNvPr id="10" name="TextBox 9"/>
-          <p:cNvSpPr txBox="1"/>
-          <p:nvPr/>
-        </p:nvSpPr>
-        <p:spPr>
-          <a:xfrm>
-            <a:off x="1079499" y="3295650"/>
-            <a:ext cx="3376675" cy="266699"/>
-          </a:xfrm>
-          <a:prstGeom prst="rect">
-            <a:avLst/>
-          </a:prstGeom>
-          <a:noFill/>
-        </p:spPr>
-        <p:txBody>
-          <a:bodyPr wrap="none" lIns="0" rIns="0" tIns="0" bIns="0">
-            <a:spAutoFit/>
-          </a:bodyPr>
-          <a:lstStyle/>
-          <a:p>
-            <a:r>
-              <a:rPr sz="2100" b="0">
-                <a:solidFill>
-                  <a:srgbClr val="2D3748"/>
-                </a:solidFill>
-                <a:latin typeface="Microsoft JhengHei"/>
-                <a:ea typeface="Microsoft JhengHei"/>
-              </a:rPr>
-              <a:t>班級常規、作息或常態活動訊息交流</a:t>
-            </a:r>
-          </a:p>
-        </p:txBody>
-      </p:sp>
-      <p:sp>
-        <p:nvSpPr>
-          <p:cNvPr id="11" name="TextBox 10"/>
-          <p:cNvSpPr txBox="1"/>
-          <p:nvPr/>
-        </p:nvSpPr>
-        <p:spPr>
-          <a:xfrm>
-            <a:off x="1079499" y="3651250"/>
+              <a:t>圖書組：書籍整理與借還</a:t>
+            </a:r>
+          </a:p>
+        </p:txBody>
+      </p:sp>
+      <p:sp>
+        <p:nvSpPr>
+          <p:cNvPr id="22" name="TextBox 21"/>
+          <p:cNvSpPr txBox="1"/>
+          <p:nvPr/>
+        </p:nvSpPr>
+        <p:spPr>
+          <a:xfrm>
+            <a:off x="6476999" y="2654300"/>
+            <a:ext cx="4258563" cy="247649"/>
+          </a:xfrm>
+          <a:prstGeom prst="rect">
+            <a:avLst/>
+          </a:prstGeom>
+          <a:noFill/>
+        </p:spPr>
+        <p:txBody>
+          <a:bodyPr wrap="none" lIns="0" rIns="0" tIns="0" bIns="0">
+            <a:spAutoFit/>
+          </a:bodyPr>
+          <a:lstStyle/>
+          <a:p>
+            <a:r>
+              <a:rPr sz="1950" b="1">
+                <a:solidFill>
+                  <a:srgbClr val="2D3748"/>
+                </a:solidFill>
+                <a:latin typeface="Microsoft JhengHei"/>
+                <a:ea typeface="Microsoft JhengHei"/>
+              </a:rPr>
+              <a:t>服務任務：協助圖書室書籍整理、借閱歸還與推廣</a:t>
+            </a:r>
+          </a:p>
+        </p:txBody>
+      </p:sp>
+      <p:sp>
+        <p:nvSpPr>
+          <p:cNvPr id="23" name="TextBox 22"/>
+          <p:cNvSpPr txBox="1"/>
+          <p:nvPr/>
+        </p:nvSpPr>
+        <p:spPr>
+          <a:xfrm>
+            <a:off x="6629399" y="3035300"/>
+            <a:ext cx="2693923" cy="209549"/>
+          </a:xfrm>
+          <a:prstGeom prst="rect">
+            <a:avLst/>
+          </a:prstGeom>
+          <a:noFill/>
+        </p:spPr>
+        <p:txBody>
+          <a:bodyPr wrap="none" lIns="0" rIns="0" tIns="0" bIns="0">
+            <a:spAutoFit/>
+          </a:bodyPr>
+          <a:lstStyle/>
+          <a:p>
+            <a:r>
+              <a:rPr sz="1650" b="1">
+                <a:solidFill>
+                  <a:srgbClr val="FFFFFF"/>
+                </a:solidFill>
+                <a:latin typeface="Microsoft JhengHei"/>
+                <a:ea typeface="Microsoft JhengHei"/>
+              </a:rPr>
+              <a:t>執勤時段（週一至週五・上午半天）</a:t>
+            </a:r>
+          </a:p>
+        </p:txBody>
+      </p:sp>
+      <p:sp>
+        <p:nvSpPr>
+          <p:cNvPr id="24" name="TextBox 23"/>
+          <p:cNvSpPr txBox="1"/>
+          <p:nvPr/>
+        </p:nvSpPr>
+        <p:spPr>
+          <a:xfrm>
+            <a:off x="6578599" y="3390899"/>
+            <a:ext cx="816355" cy="209549"/>
+          </a:xfrm>
+          <a:prstGeom prst="rect">
+            <a:avLst/>
+          </a:prstGeom>
+          <a:noFill/>
+        </p:spPr>
+        <p:txBody>
+          <a:bodyPr wrap="none" lIns="0" rIns="0" tIns="0" bIns="0">
+            <a:spAutoFit/>
+          </a:bodyPr>
+          <a:lstStyle/>
+          <a:p>
+            <a:r>
+              <a:rPr sz="1650" b="1">
+                <a:solidFill>
+                  <a:srgbClr val="FFFFFF"/>
+                </a:solidFill>
+                <a:latin typeface="Microsoft JhengHei"/>
+                <a:ea typeface="Microsoft JhengHei"/>
+              </a:rPr>
+              <a:t>值勤時間</a:t>
+            </a:r>
+          </a:p>
+        </p:txBody>
+      </p:sp>
+      <p:sp>
+        <p:nvSpPr>
+          <p:cNvPr id="25" name="TextBox 24"/>
+          <p:cNvSpPr txBox="1"/>
+          <p:nvPr/>
+        </p:nvSpPr>
+        <p:spPr>
+          <a:xfrm>
+            <a:off x="7302499" y="3365500"/>
             <a:ext cx="2779267" cy="266699"/>
           </a:xfrm>
           <a:prstGeom prst="rect">
@@ -13170,98 +13556,203 @@
           <a:lstStyle/>
           <a:p>
             <a:r>
-              <a:rPr sz="2100" b="0">
-                <a:solidFill>
-                  <a:srgbClr val="2D3748"/>
-                </a:solidFill>
-                <a:latin typeface="Microsoft JhengHei"/>
-                <a:ea typeface="Microsoft JhengHei"/>
-              </a:rPr>
-              <a:t>上課期間老師全心在孩子身上</a:t>
-            </a:r>
-          </a:p>
-        </p:txBody>
-      </p:sp>
-      <p:sp>
-        <p:nvSpPr>
-          <p:cNvPr id="12" name="TextBox 11"/>
-          <p:cNvSpPr txBox="1"/>
-          <p:nvPr/>
-        </p:nvSpPr>
-        <p:spPr>
-          <a:xfrm>
-            <a:off x="1079499" y="4006850"/>
-            <a:ext cx="3575811" cy="266699"/>
-          </a:xfrm>
-          <a:prstGeom prst="rect">
-            <a:avLst/>
-          </a:prstGeom>
-          <a:noFill/>
-        </p:spPr>
-        <p:txBody>
-          <a:bodyPr wrap="none" lIns="0" rIns="0" tIns="0" bIns="0">
-            <a:spAutoFit/>
-          </a:bodyPr>
-          <a:lstStyle/>
-          <a:p>
-            <a:r>
-              <a:rPr sz="2100" b="0">
-                <a:solidFill>
-                  <a:srgbClr val="2D3748"/>
-                </a:solidFill>
-                <a:latin typeface="Microsoft JhengHei"/>
-                <a:ea typeface="Microsoft JhengHei"/>
-              </a:rPr>
-              <a:t>老師會利用課間空檔或放學後詳細回覆</a:t>
-            </a:r>
-          </a:p>
-        </p:txBody>
-      </p:sp>
-      <p:sp>
-        <p:nvSpPr>
-          <p:cNvPr id="13" name="TextBox 12"/>
-          <p:cNvSpPr txBox="1"/>
-          <p:nvPr/>
-        </p:nvSpPr>
-        <p:spPr>
-          <a:xfrm>
-            <a:off x="1079499" y="4362450"/>
-            <a:ext cx="2978403" cy="266699"/>
-          </a:xfrm>
-          <a:prstGeom prst="rect">
-            <a:avLst/>
-          </a:prstGeom>
-          <a:noFill/>
-        </p:spPr>
-        <p:txBody>
-          <a:bodyPr wrap="none" lIns="0" rIns="0" tIns="0" bIns="0">
-            <a:spAutoFit/>
-          </a:bodyPr>
-          <a:lstStyle/>
-          <a:p>
-            <a:r>
-              <a:rPr sz="2100" b="0">
-                <a:solidFill>
-                  <a:srgbClr val="2D3748"/>
-                </a:solidFill>
-                <a:latin typeface="Microsoft JhengHei"/>
-                <a:ea typeface="Microsoft JhengHei"/>
-              </a:rPr>
-              <a:t>歡迎隨時留言，不必擔心打擾！</a:t>
-            </a:r>
-          </a:p>
-        </p:txBody>
-      </p:sp>
-      <p:sp>
-        <p:nvSpPr>
-          <p:cNvPr id="14" name="TextBox 13"/>
-          <p:cNvSpPr txBox="1"/>
-          <p:nvPr/>
-        </p:nvSpPr>
-        <p:spPr>
-          <a:xfrm>
-            <a:off x="6375399" y="2019299"/>
-            <a:ext cx="1299971" cy="247649"/>
+              <a:rPr sz="2100" b="1">
+                <a:solidFill>
+                  <a:srgbClr val="2C5E8A"/>
+                </a:solidFill>
+                <a:latin typeface="Microsoft JhengHei"/>
+                <a:ea typeface="Microsoft JhengHei"/>
+              </a:rPr>
+              <a:t>08:30 - 11:30</a:t>
+            </a:r>
+          </a:p>
+        </p:txBody>
+      </p:sp>
+      <p:sp>
+        <p:nvSpPr>
+          <p:cNvPr id="26" name="TextBox 25"/>
+          <p:cNvSpPr txBox="1"/>
+          <p:nvPr/>
+        </p:nvSpPr>
+        <p:spPr>
+          <a:xfrm>
+            <a:off x="6476999" y="3632199"/>
+            <a:ext cx="2971291" cy="219074"/>
+          </a:xfrm>
+          <a:prstGeom prst="rect">
+            <a:avLst/>
+          </a:prstGeom>
+          <a:noFill/>
+        </p:spPr>
+        <p:txBody>
+          <a:bodyPr wrap="none" lIns="0" rIns="0" tIns="0" bIns="0">
+            <a:spAutoFit/>
+          </a:bodyPr>
+          <a:lstStyle/>
+          <a:p>
+            <a:r>
+              <a:rPr sz="1725" b="0">
+                <a:solidFill>
+                  <a:srgbClr val="718096"/>
+                </a:solidFill>
+                <a:latin typeface="Microsoft JhengHei"/>
+                <a:ea typeface="Microsoft JhengHei"/>
+              </a:rPr>
+              <a:t>• 晨間半天服務，沉浸溫馨書香氣息</a:t>
+            </a:r>
+          </a:p>
+        </p:txBody>
+      </p:sp>
+      <p:sp>
+        <p:nvSpPr>
+          <p:cNvPr id="27" name="TextBox 26"/>
+          <p:cNvSpPr txBox="1"/>
+          <p:nvPr/>
+        </p:nvSpPr>
+        <p:spPr>
+          <a:xfrm>
+            <a:off x="6616699" y="4089400"/>
+            <a:ext cx="759459" cy="190500"/>
+          </a:xfrm>
+          <a:prstGeom prst="rect">
+            <a:avLst/>
+          </a:prstGeom>
+          <a:noFill/>
+        </p:spPr>
+        <p:txBody>
+          <a:bodyPr wrap="none" lIns="0" rIns="0" tIns="0" bIns="0">
+            <a:spAutoFit/>
+          </a:bodyPr>
+          <a:lstStyle/>
+          <a:p>
+            <a:r>
+              <a:rPr sz="1500" b="1">
+                <a:solidFill>
+                  <a:srgbClr val="FFFFFF"/>
+                </a:solidFill>
+                <a:latin typeface="Microsoft JhengHei"/>
+                <a:ea typeface="Microsoft JhengHei"/>
+              </a:rPr>
+              <a:t>特別說明</a:t>
+            </a:r>
+          </a:p>
+        </p:txBody>
+      </p:sp>
+      <p:sp>
+        <p:nvSpPr>
+          <p:cNvPr id="28" name="TextBox 27"/>
+          <p:cNvSpPr txBox="1"/>
+          <p:nvPr/>
+        </p:nvSpPr>
+        <p:spPr>
+          <a:xfrm>
+            <a:off x="7302499" y="4076699"/>
+            <a:ext cx="2068067" cy="228600"/>
+          </a:xfrm>
+          <a:prstGeom prst="rect">
+            <a:avLst/>
+          </a:prstGeom>
+          <a:noFill/>
+        </p:spPr>
+        <p:txBody>
+          <a:bodyPr wrap="none" lIns="0" rIns="0" tIns="0" bIns="0">
+            <a:spAutoFit/>
+          </a:bodyPr>
+          <a:lstStyle/>
+          <a:p>
+            <a:r>
+              <a:rPr sz="1800" b="1">
+                <a:solidFill>
+                  <a:srgbClr val="2C5E8A"/>
+                </a:solidFill>
+                <a:latin typeface="Microsoft JhengHei"/>
+                <a:ea typeface="Microsoft JhengHei"/>
+              </a:rPr>
+              <a:t>先登記意願，開館即排班</a:t>
+            </a:r>
+          </a:p>
+        </p:txBody>
+      </p:sp>
+      <p:sp>
+        <p:nvSpPr>
+          <p:cNvPr id="29" name="TextBox 28"/>
+          <p:cNvSpPr txBox="1"/>
+          <p:nvPr/>
+        </p:nvSpPr>
+        <p:spPr>
+          <a:xfrm>
+            <a:off x="6540499" y="4337050"/>
+            <a:ext cx="4258563" cy="209549"/>
+          </a:xfrm>
+          <a:prstGeom prst="rect">
+            <a:avLst/>
+          </a:prstGeom>
+          <a:noFill/>
+        </p:spPr>
+        <p:txBody>
+          <a:bodyPr wrap="none" lIns="0" rIns="0" tIns="0" bIns="0">
+            <a:spAutoFit/>
+          </a:bodyPr>
+          <a:lstStyle/>
+          <a:p>
+            <a:r>
+              <a:rPr sz="1650" b="0">
+                <a:solidFill>
+                  <a:srgbClr val="2D3748"/>
+                </a:solidFill>
+                <a:latin typeface="Microsoft JhengHei"/>
+                <a:ea typeface="Microsoft JhengHei"/>
+              </a:rPr>
+              <a:t>※ 待學校活動中心整修驗收完畢後，即刻安排入館值勤！</a:t>
+            </a:r>
+          </a:p>
+        </p:txBody>
+      </p:sp>
+      <p:sp>
+        <p:nvSpPr>
+          <p:cNvPr id="30" name="TextBox 29"/>
+          <p:cNvSpPr txBox="1"/>
+          <p:nvPr/>
+        </p:nvSpPr>
+        <p:spPr>
+          <a:xfrm>
+            <a:off x="914399" y="5289550"/>
+            <a:ext cx="1129283" cy="209549"/>
+          </a:xfrm>
+          <a:prstGeom prst="rect">
+            <a:avLst/>
+          </a:prstGeom>
+          <a:noFill/>
+        </p:spPr>
+        <p:txBody>
+          <a:bodyPr wrap="none" lIns="0" rIns="0" tIns="0" bIns="0">
+            <a:spAutoFit/>
+          </a:bodyPr>
+          <a:lstStyle/>
+          <a:p>
+            <a:r>
+              <a:rPr sz="1650" b="1">
+                <a:solidFill>
+                  <a:srgbClr val="FFFFFF"/>
+                </a:solidFill>
+                <a:latin typeface="Microsoft JhengHei"/>
+                <a:ea typeface="Microsoft JhengHei"/>
+              </a:rPr>
+              <a:t>志工報名方式</a:t>
+            </a:r>
+          </a:p>
+        </p:txBody>
+      </p:sp>
+      <p:sp>
+        <p:nvSpPr>
+          <p:cNvPr id="31" name="TextBox 30"/>
+          <p:cNvSpPr txBox="1"/>
+          <p:nvPr/>
+        </p:nvSpPr>
+        <p:spPr>
+          <a:xfrm>
+            <a:off x="761999" y="5575300"/>
+            <a:ext cx="6662419" cy="247649"/>
           </a:xfrm>
           <a:prstGeom prst="rect">
             <a:avLst/>
@@ -13277,292 +13768,47 @@
             <a:r>
               <a:rPr sz="1950" b="1">
                 <a:solidFill>
-                  <a:srgbClr val="FFFFFF"/>
-                </a:solidFill>
-                <a:latin typeface="Microsoft JhengHei"/>
-                <a:ea typeface="Microsoft JhengHei"/>
-              </a:rPr>
-              <a:t>緊急突發狀況</a:t>
-            </a:r>
-          </a:p>
-        </p:txBody>
-      </p:sp>
-      <p:sp>
-        <p:nvSpPr>
-          <p:cNvPr id="15" name="TextBox 14"/>
-          <p:cNvSpPr txBox="1"/>
-          <p:nvPr/>
-        </p:nvSpPr>
-        <p:spPr>
-          <a:xfrm>
-            <a:off x="6222999" y="2432049"/>
-            <a:ext cx="2580131" cy="400049"/>
-          </a:xfrm>
-          <a:prstGeom prst="rect">
-            <a:avLst/>
-          </a:prstGeom>
-          <a:noFill/>
-        </p:spPr>
-        <p:txBody>
-          <a:bodyPr wrap="none" lIns="0" rIns="0" tIns="0" bIns="0">
-            <a:spAutoFit/>
-          </a:bodyPr>
-          <a:lstStyle/>
-          <a:p>
-            <a:r>
-              <a:rPr sz="3150" b="1">
-                <a:solidFill>
-                  <a:srgbClr val="E88D67"/>
-                </a:solidFill>
-                <a:latin typeface="Microsoft JhengHei"/>
-                <a:ea typeface="Microsoft JhengHei"/>
-              </a:rPr>
-              <a:t>導師專線電話直撥</a:t>
-            </a:r>
-          </a:p>
-        </p:txBody>
-      </p:sp>
-      <p:sp>
-        <p:nvSpPr>
-          <p:cNvPr id="16" name="TextBox 15"/>
-          <p:cNvSpPr txBox="1"/>
-          <p:nvPr/>
-        </p:nvSpPr>
-        <p:spPr>
-          <a:xfrm>
-            <a:off x="6565899" y="3130549"/>
-            <a:ext cx="873251" cy="228600"/>
-          </a:xfrm>
-          <a:prstGeom prst="rect">
-            <a:avLst/>
-          </a:prstGeom>
-          <a:noFill/>
-        </p:spPr>
-        <p:txBody>
-          <a:bodyPr wrap="none" lIns="0" rIns="0" tIns="0" bIns="0">
-            <a:spAutoFit/>
-          </a:bodyPr>
-          <a:lstStyle/>
-          <a:p>
-            <a:r>
-              <a:rPr sz="1800" b="1">
-                <a:solidFill>
-                  <a:srgbClr val="FFFFFF"/>
-                </a:solidFill>
-                <a:latin typeface="Microsoft JhengHei"/>
-                <a:ea typeface="Microsoft JhengHei"/>
-              </a:rPr>
-              <a:t>專線直撥</a:t>
-            </a:r>
-          </a:p>
-        </p:txBody>
-      </p:sp>
-      <p:sp>
-        <p:nvSpPr>
-          <p:cNvPr id="17" name="TextBox 16"/>
-          <p:cNvSpPr txBox="1"/>
-          <p:nvPr/>
-        </p:nvSpPr>
-        <p:spPr>
-          <a:xfrm>
-            <a:off x="7365999" y="3067050"/>
-            <a:ext cx="3774947" cy="400049"/>
-          </a:xfrm>
-          <a:prstGeom prst="rect">
-            <a:avLst/>
-          </a:prstGeom>
-          <a:noFill/>
-        </p:spPr>
-        <p:txBody>
-          <a:bodyPr wrap="none" lIns="0" rIns="0" tIns="0" bIns="0">
-            <a:spAutoFit/>
-          </a:bodyPr>
-          <a:lstStyle/>
-          <a:p>
-            <a:r>
-              <a:rPr sz="3150" b="1">
+                  <a:srgbClr val="2D3748"/>
+                </a:solidFill>
+                <a:latin typeface="Microsoft JhengHei"/>
+                <a:ea typeface="Microsoft JhengHei"/>
+              </a:rPr>
+              <a:t>1. 紙本回條：填寫通知單回條並勾選組別與方便時段，交由孩子帶回學校。</a:t>
+            </a:r>
+          </a:p>
+        </p:txBody>
+      </p:sp>
+      <p:sp>
+        <p:nvSpPr>
+          <p:cNvPr id="32" name="TextBox 31"/>
+          <p:cNvSpPr txBox="1"/>
+          <p:nvPr/>
+        </p:nvSpPr>
+        <p:spPr>
+          <a:xfrm>
+            <a:off x="761999" y="5797550"/>
+            <a:ext cx="7586979" cy="247649"/>
+          </a:xfrm>
+          <a:prstGeom prst="rect">
+            <a:avLst/>
+          </a:prstGeom>
+          <a:noFill/>
+        </p:spPr>
+        <p:txBody>
+          <a:bodyPr wrap="none" lIns="0" rIns="0" tIns="0" bIns="0">
+            <a:spAutoFit/>
+          </a:bodyPr>
+          <a:lstStyle/>
+          <a:p>
+            <a:r>
+              <a:rPr sz="1950" b="1">
                 <a:solidFill>
                   <a:srgbClr val="2C5E8A"/>
                 </a:solidFill>
                 <a:latin typeface="Microsoft JhengHei"/>
                 <a:ea typeface="Microsoft JhengHei"/>
               </a:rPr>
-              <a:t>0963-159-896</a:t>
-            </a:r>
-          </a:p>
-        </p:txBody>
-      </p:sp>
-      <p:sp>
-        <p:nvSpPr>
-          <p:cNvPr id="18" name="TextBox 17"/>
-          <p:cNvSpPr txBox="1"/>
-          <p:nvPr/>
-        </p:nvSpPr>
-        <p:spPr>
-          <a:xfrm>
-            <a:off x="6476999" y="3797300"/>
-            <a:ext cx="2779267" cy="266699"/>
-          </a:xfrm>
-          <a:prstGeom prst="rect">
-            <a:avLst/>
-          </a:prstGeom>
-          <a:noFill/>
-        </p:spPr>
-        <p:txBody>
-          <a:bodyPr wrap="none" lIns="0" rIns="0" tIns="0" bIns="0">
-            <a:spAutoFit/>
-          </a:bodyPr>
-          <a:lstStyle/>
-          <a:p>
-            <a:r>
-              <a:rPr sz="2100" b="0">
-                <a:solidFill>
-                  <a:srgbClr val="2D3748"/>
-                </a:solidFill>
-                <a:latin typeface="Microsoft JhengHei"/>
-                <a:ea typeface="Microsoft JhengHei"/>
-              </a:rPr>
-              <a:t>孩子突發身體急症或意外受傷</a:t>
-            </a:r>
-          </a:p>
-        </p:txBody>
-      </p:sp>
-      <p:sp>
-        <p:nvSpPr>
-          <p:cNvPr id="19" name="TextBox 18"/>
-          <p:cNvSpPr txBox="1"/>
-          <p:nvPr/>
-        </p:nvSpPr>
-        <p:spPr>
-          <a:xfrm>
-            <a:off x="6476999" y="4152899"/>
-            <a:ext cx="2779267" cy="266699"/>
-          </a:xfrm>
-          <a:prstGeom prst="rect">
-            <a:avLst/>
-          </a:prstGeom>
-          <a:noFill/>
-        </p:spPr>
-        <p:txBody>
-          <a:bodyPr wrap="none" lIns="0" rIns="0" tIns="0" bIns="0">
-            <a:spAutoFit/>
-          </a:bodyPr>
-          <a:lstStyle/>
-          <a:p>
-            <a:r>
-              <a:rPr sz="2100" b="0">
-                <a:solidFill>
-                  <a:srgbClr val="2D3748"/>
-                </a:solidFill>
-                <a:latin typeface="Microsoft JhengHei"/>
-                <a:ea typeface="Microsoft JhengHei"/>
-              </a:rPr>
-              <a:t>早晨臨時請假需即時口頭通報</a:t>
-            </a:r>
-          </a:p>
-        </p:txBody>
-      </p:sp>
-      <p:sp>
-        <p:nvSpPr>
-          <p:cNvPr id="20" name="TextBox 19"/>
-          <p:cNvSpPr txBox="1"/>
-          <p:nvPr/>
-        </p:nvSpPr>
-        <p:spPr>
-          <a:xfrm>
-            <a:off x="6476999" y="4508500"/>
-            <a:ext cx="4173219" cy="266699"/>
-          </a:xfrm>
-          <a:prstGeom prst="rect">
-            <a:avLst/>
-          </a:prstGeom>
-          <a:noFill/>
-        </p:spPr>
-        <p:txBody>
-          <a:bodyPr wrap="none" lIns="0" rIns="0" tIns="0" bIns="0">
-            <a:spAutoFit/>
-          </a:bodyPr>
-          <a:lstStyle/>
-          <a:p>
-            <a:r>
-              <a:rPr sz="2100" b="0">
-                <a:solidFill>
-                  <a:srgbClr val="2D3748"/>
-                </a:solidFill>
-                <a:latin typeface="Microsoft JhengHei"/>
-                <a:ea typeface="Microsoft JhengHei"/>
-              </a:rPr>
-              <a:t>提醒：若遇忙線未接，老師一看到立刻回撥！</a:t>
-            </a:r>
-          </a:p>
-        </p:txBody>
-      </p:sp>
-      <p:sp>
-        <p:nvSpPr>
-          <p:cNvPr id="21" name="TextBox 20"/>
-          <p:cNvSpPr txBox="1"/>
-          <p:nvPr/>
-        </p:nvSpPr>
-        <p:spPr>
-          <a:xfrm>
-            <a:off x="914399" y="5289550"/>
-            <a:ext cx="1442211" cy="209549"/>
-          </a:xfrm>
-          <a:prstGeom prst="rect">
-            <a:avLst/>
-          </a:prstGeom>
-          <a:noFill/>
-        </p:spPr>
-        <p:txBody>
-          <a:bodyPr wrap="none" lIns="0" rIns="0" tIns="0" bIns="0">
-            <a:spAutoFit/>
-          </a:bodyPr>
-          <a:lstStyle/>
-          <a:p>
-            <a:r>
-              <a:rPr sz="1650" b="1">
-                <a:solidFill>
-                  <a:srgbClr val="FFFFFF"/>
-                </a:solidFill>
-                <a:latin typeface="Microsoft JhengHei"/>
-                <a:ea typeface="Microsoft JhengHei"/>
-              </a:rPr>
-              <a:t>高老師的溝通原則</a:t>
-            </a:r>
-          </a:p>
-        </p:txBody>
-      </p:sp>
-      <p:sp>
-        <p:nvSpPr>
-          <p:cNvPr id="22" name="TextBox 21"/>
-          <p:cNvSpPr txBox="1"/>
-          <p:nvPr/>
-        </p:nvSpPr>
-        <p:spPr>
-          <a:xfrm>
-            <a:off x="761999" y="5575300"/>
-            <a:ext cx="9749027" cy="266699"/>
-          </a:xfrm>
-          <a:prstGeom prst="rect">
-            <a:avLst/>
-          </a:prstGeom>
-          <a:noFill/>
-        </p:spPr>
-        <p:txBody>
-          <a:bodyPr wrap="none" lIns="0" rIns="0" tIns="0" bIns="0">
-            <a:spAutoFit/>
-          </a:bodyPr>
-          <a:lstStyle/>
-          <a:p>
-            <a:r>
-              <a:rPr sz="2100" b="1">
-                <a:solidFill>
-                  <a:srgbClr val="2D3748"/>
-                </a:solidFill>
-                <a:latin typeface="Microsoft JhengHei"/>
-                <a:ea typeface="Microsoft JhengHei"/>
-              </a:rPr>
-              <a:t>「孩子有任何狀況，請第一時間與我聯繫。我們坦誠對話、互相合作，讓小問題在第一時間得到最好照顧。」</a:t>
+              <a:t>2. 導師登記：亦可直接向高志賢老師口頭登記，或於 LINE 班級官方訊息報名！</a:t>
             </a:r>
           </a:p>
         </p:txBody>
@@ -13587,7 +13833,7 @@
       <p:grpSpPr/>
       <p:pic>
         <p:nvPicPr>
-          <p:cNvPr id="2" name="Picture 1" descr="24-message.png"/>
+          <p:cNvPr id="2" name="Picture 1" descr="24-communication.png"/>
           <p:cNvPicPr>
             <a:picLocks noChangeAspect="1"/>
           </p:cNvPicPr>
@@ -13674,7 +13920,7 @@
                 <a:latin typeface="Microsoft JhengHei"/>
                 <a:ea typeface="Microsoft JhengHei"/>
               </a:rPr>
-              <a:t>PAGE 24 / 26</a:t>
+              <a:t>PAGE 24 / 27</a:t>
             </a:r>
           </a:p>
         </p:txBody>
@@ -13688,7 +13934,7 @@
         <p:spPr>
           <a:xfrm>
             <a:off x="507999" y="717550"/>
-            <a:ext cx="7217155" cy="495299"/>
+            <a:ext cx="6477507" cy="495299"/>
           </a:xfrm>
           <a:prstGeom prst="rect">
             <a:avLst/>
@@ -13709,7 +13955,7 @@
                 <a:latin typeface="Microsoft JhengHei"/>
                 <a:ea typeface="Microsoft JhengHei"/>
               </a:rPr>
-              <a:t>給家長的一封信：並肩走一段平穩堅定的路</a:t>
+              <a:t>親師即時連線：攜手同行做孩子的橋樑</a:t>
             </a:r>
           </a:p>
         </p:txBody>
@@ -13744,7 +13990,7 @@
                 <a:latin typeface="Microsoft JhengHei"/>
                 <a:ea typeface="Microsoft JhengHei"/>
               </a:rPr>
-              <a:t>六年級是童年的尾聲，也是青春的序曲・讓我們給予孩子展翅飛翔的底氣</a:t>
+              <a:t>孩子有任何狀況請第一時間與導師聯繫・親師互信合作比事後焦慮更有效</a:t>
             </a:r>
           </a:p>
         </p:txBody>
@@ -13757,8 +14003,533 @@
         </p:nvSpPr>
         <p:spPr>
           <a:xfrm>
-            <a:off x="1295399" y="2019299"/>
-            <a:ext cx="1385315" cy="266699"/>
+            <a:off x="977899" y="2019299"/>
+            <a:ext cx="1299971" cy="247649"/>
+          </a:xfrm>
+          <a:prstGeom prst="rect">
+            <a:avLst/>
+          </a:prstGeom>
+          <a:noFill/>
+        </p:spPr>
+        <p:txBody>
+          <a:bodyPr wrap="none" lIns="0" rIns="0" tIns="0" bIns="0">
+            <a:spAutoFit/>
+          </a:bodyPr>
+          <a:lstStyle/>
+          <a:p>
+            <a:r>
+              <a:rPr sz="1950" b="1">
+                <a:solidFill>
+                  <a:srgbClr val="FFFFFF"/>
+                </a:solidFill>
+                <a:latin typeface="Microsoft JhengHei"/>
+                <a:ea typeface="Microsoft JhengHei"/>
+              </a:rPr>
+              <a:t>平時日常聯繫</a:t>
+            </a:r>
+          </a:p>
+        </p:txBody>
+      </p:sp>
+      <p:sp>
+        <p:nvSpPr>
+          <p:cNvPr id="8" name="TextBox 7"/>
+          <p:cNvSpPr txBox="1"/>
+          <p:nvPr/>
+        </p:nvSpPr>
+        <p:spPr>
+          <a:xfrm>
+            <a:off x="825499" y="2432049"/>
+            <a:ext cx="4073651" cy="400049"/>
+          </a:xfrm>
+          <a:prstGeom prst="rect">
+            <a:avLst/>
+          </a:prstGeom>
+          <a:noFill/>
+        </p:spPr>
+        <p:txBody>
+          <a:bodyPr wrap="none" lIns="0" rIns="0" tIns="0" bIns="0">
+            <a:spAutoFit/>
+          </a:bodyPr>
+          <a:lstStyle/>
+          <a:p>
+            <a:r>
+              <a:rPr sz="3150" b="1">
+                <a:solidFill>
+                  <a:srgbClr val="58A47E"/>
+                </a:solidFill>
+                <a:latin typeface="Microsoft JhengHei"/>
+                <a:ea typeface="Microsoft JhengHei"/>
+              </a:rPr>
+              <a:t>LINE 官方訊息（推薦）</a:t>
+            </a:r>
+          </a:p>
+        </p:txBody>
+      </p:sp>
+      <p:sp>
+        <p:nvSpPr>
+          <p:cNvPr id="9" name="TextBox 8"/>
+          <p:cNvSpPr txBox="1"/>
+          <p:nvPr/>
+        </p:nvSpPr>
+        <p:spPr>
+          <a:xfrm>
+            <a:off x="1079499" y="2940050"/>
+            <a:ext cx="3177539" cy="266699"/>
+          </a:xfrm>
+          <a:prstGeom prst="rect">
+            <a:avLst/>
+          </a:prstGeom>
+          <a:noFill/>
+        </p:spPr>
+        <p:txBody>
+          <a:bodyPr wrap="none" lIns="0" rIns="0" tIns="0" bIns="0">
+            <a:spAutoFit/>
+          </a:bodyPr>
+          <a:lstStyle/>
+          <a:p>
+            <a:r>
+              <a:rPr sz="2100" b="0">
+                <a:solidFill>
+                  <a:srgbClr val="2D3748"/>
+                </a:solidFill>
+                <a:latin typeface="Microsoft JhengHei"/>
+                <a:ea typeface="Microsoft JhengHei"/>
+              </a:rPr>
+              <a:t>適用孩子平日學習狀況與作業諮詢</a:t>
+            </a:r>
+          </a:p>
+        </p:txBody>
+      </p:sp>
+      <p:sp>
+        <p:nvSpPr>
+          <p:cNvPr id="10" name="TextBox 9"/>
+          <p:cNvSpPr txBox="1"/>
+          <p:nvPr/>
+        </p:nvSpPr>
+        <p:spPr>
+          <a:xfrm>
+            <a:off x="1079499" y="3295650"/>
+            <a:ext cx="3376675" cy="266699"/>
+          </a:xfrm>
+          <a:prstGeom prst="rect">
+            <a:avLst/>
+          </a:prstGeom>
+          <a:noFill/>
+        </p:spPr>
+        <p:txBody>
+          <a:bodyPr wrap="none" lIns="0" rIns="0" tIns="0" bIns="0">
+            <a:spAutoFit/>
+          </a:bodyPr>
+          <a:lstStyle/>
+          <a:p>
+            <a:r>
+              <a:rPr sz="2100" b="0">
+                <a:solidFill>
+                  <a:srgbClr val="2D3748"/>
+                </a:solidFill>
+                <a:latin typeface="Microsoft JhengHei"/>
+                <a:ea typeface="Microsoft JhengHei"/>
+              </a:rPr>
+              <a:t>班級常規、作息或常態活動訊息交流</a:t>
+            </a:r>
+          </a:p>
+        </p:txBody>
+      </p:sp>
+      <p:sp>
+        <p:nvSpPr>
+          <p:cNvPr id="11" name="TextBox 10"/>
+          <p:cNvSpPr txBox="1"/>
+          <p:nvPr/>
+        </p:nvSpPr>
+        <p:spPr>
+          <a:xfrm>
+            <a:off x="1079499" y="3651250"/>
+            <a:ext cx="2779267" cy="266699"/>
+          </a:xfrm>
+          <a:prstGeom prst="rect">
+            <a:avLst/>
+          </a:prstGeom>
+          <a:noFill/>
+        </p:spPr>
+        <p:txBody>
+          <a:bodyPr wrap="none" lIns="0" rIns="0" tIns="0" bIns="0">
+            <a:spAutoFit/>
+          </a:bodyPr>
+          <a:lstStyle/>
+          <a:p>
+            <a:r>
+              <a:rPr sz="2100" b="0">
+                <a:solidFill>
+                  <a:srgbClr val="2D3748"/>
+                </a:solidFill>
+                <a:latin typeface="Microsoft JhengHei"/>
+                <a:ea typeface="Microsoft JhengHei"/>
+              </a:rPr>
+              <a:t>上課期間老師全心在孩子身上</a:t>
+            </a:r>
+          </a:p>
+        </p:txBody>
+      </p:sp>
+      <p:sp>
+        <p:nvSpPr>
+          <p:cNvPr id="12" name="TextBox 11"/>
+          <p:cNvSpPr txBox="1"/>
+          <p:nvPr/>
+        </p:nvSpPr>
+        <p:spPr>
+          <a:xfrm>
+            <a:off x="1079499" y="4006850"/>
+            <a:ext cx="3575811" cy="266699"/>
+          </a:xfrm>
+          <a:prstGeom prst="rect">
+            <a:avLst/>
+          </a:prstGeom>
+          <a:noFill/>
+        </p:spPr>
+        <p:txBody>
+          <a:bodyPr wrap="none" lIns="0" rIns="0" tIns="0" bIns="0">
+            <a:spAutoFit/>
+          </a:bodyPr>
+          <a:lstStyle/>
+          <a:p>
+            <a:r>
+              <a:rPr sz="2100" b="0">
+                <a:solidFill>
+                  <a:srgbClr val="2D3748"/>
+                </a:solidFill>
+                <a:latin typeface="Microsoft JhengHei"/>
+                <a:ea typeface="Microsoft JhengHei"/>
+              </a:rPr>
+              <a:t>老師會利用課間空檔或放學後詳細回覆</a:t>
+            </a:r>
+          </a:p>
+        </p:txBody>
+      </p:sp>
+      <p:sp>
+        <p:nvSpPr>
+          <p:cNvPr id="13" name="TextBox 12"/>
+          <p:cNvSpPr txBox="1"/>
+          <p:nvPr/>
+        </p:nvSpPr>
+        <p:spPr>
+          <a:xfrm>
+            <a:off x="1079499" y="4362450"/>
+            <a:ext cx="2978403" cy="266699"/>
+          </a:xfrm>
+          <a:prstGeom prst="rect">
+            <a:avLst/>
+          </a:prstGeom>
+          <a:noFill/>
+        </p:spPr>
+        <p:txBody>
+          <a:bodyPr wrap="none" lIns="0" rIns="0" tIns="0" bIns="0">
+            <a:spAutoFit/>
+          </a:bodyPr>
+          <a:lstStyle/>
+          <a:p>
+            <a:r>
+              <a:rPr sz="2100" b="0">
+                <a:solidFill>
+                  <a:srgbClr val="2D3748"/>
+                </a:solidFill>
+                <a:latin typeface="Microsoft JhengHei"/>
+                <a:ea typeface="Microsoft JhengHei"/>
+              </a:rPr>
+              <a:t>歡迎隨時留言，不必擔心打擾！</a:t>
+            </a:r>
+          </a:p>
+        </p:txBody>
+      </p:sp>
+      <p:sp>
+        <p:nvSpPr>
+          <p:cNvPr id="14" name="TextBox 13"/>
+          <p:cNvSpPr txBox="1"/>
+          <p:nvPr/>
+        </p:nvSpPr>
+        <p:spPr>
+          <a:xfrm>
+            <a:off x="6375399" y="2019299"/>
+            <a:ext cx="1299971" cy="247649"/>
+          </a:xfrm>
+          <a:prstGeom prst="rect">
+            <a:avLst/>
+          </a:prstGeom>
+          <a:noFill/>
+        </p:spPr>
+        <p:txBody>
+          <a:bodyPr wrap="none" lIns="0" rIns="0" tIns="0" bIns="0">
+            <a:spAutoFit/>
+          </a:bodyPr>
+          <a:lstStyle/>
+          <a:p>
+            <a:r>
+              <a:rPr sz="1950" b="1">
+                <a:solidFill>
+                  <a:srgbClr val="FFFFFF"/>
+                </a:solidFill>
+                <a:latin typeface="Microsoft JhengHei"/>
+                <a:ea typeface="Microsoft JhengHei"/>
+              </a:rPr>
+              <a:t>緊急突發狀況</a:t>
+            </a:r>
+          </a:p>
+        </p:txBody>
+      </p:sp>
+      <p:sp>
+        <p:nvSpPr>
+          <p:cNvPr id="15" name="TextBox 14"/>
+          <p:cNvSpPr txBox="1"/>
+          <p:nvPr/>
+        </p:nvSpPr>
+        <p:spPr>
+          <a:xfrm>
+            <a:off x="6222999" y="2432049"/>
+            <a:ext cx="2580131" cy="400049"/>
+          </a:xfrm>
+          <a:prstGeom prst="rect">
+            <a:avLst/>
+          </a:prstGeom>
+          <a:noFill/>
+        </p:spPr>
+        <p:txBody>
+          <a:bodyPr wrap="none" lIns="0" rIns="0" tIns="0" bIns="0">
+            <a:spAutoFit/>
+          </a:bodyPr>
+          <a:lstStyle/>
+          <a:p>
+            <a:r>
+              <a:rPr sz="3150" b="1">
+                <a:solidFill>
+                  <a:srgbClr val="E88D67"/>
+                </a:solidFill>
+                <a:latin typeface="Microsoft JhengHei"/>
+                <a:ea typeface="Microsoft JhengHei"/>
+              </a:rPr>
+              <a:t>導師專線電話直撥</a:t>
+            </a:r>
+          </a:p>
+        </p:txBody>
+      </p:sp>
+      <p:sp>
+        <p:nvSpPr>
+          <p:cNvPr id="16" name="TextBox 15"/>
+          <p:cNvSpPr txBox="1"/>
+          <p:nvPr/>
+        </p:nvSpPr>
+        <p:spPr>
+          <a:xfrm>
+            <a:off x="6565899" y="3130549"/>
+            <a:ext cx="873251" cy="228600"/>
+          </a:xfrm>
+          <a:prstGeom prst="rect">
+            <a:avLst/>
+          </a:prstGeom>
+          <a:noFill/>
+        </p:spPr>
+        <p:txBody>
+          <a:bodyPr wrap="none" lIns="0" rIns="0" tIns="0" bIns="0">
+            <a:spAutoFit/>
+          </a:bodyPr>
+          <a:lstStyle/>
+          <a:p>
+            <a:r>
+              <a:rPr sz="1800" b="1">
+                <a:solidFill>
+                  <a:srgbClr val="FFFFFF"/>
+                </a:solidFill>
+                <a:latin typeface="Microsoft JhengHei"/>
+                <a:ea typeface="Microsoft JhengHei"/>
+              </a:rPr>
+              <a:t>專線直撥</a:t>
+            </a:r>
+          </a:p>
+        </p:txBody>
+      </p:sp>
+      <p:sp>
+        <p:nvSpPr>
+          <p:cNvPr id="17" name="TextBox 16"/>
+          <p:cNvSpPr txBox="1"/>
+          <p:nvPr/>
+        </p:nvSpPr>
+        <p:spPr>
+          <a:xfrm>
+            <a:off x="7365999" y="3067050"/>
+            <a:ext cx="3774947" cy="400049"/>
+          </a:xfrm>
+          <a:prstGeom prst="rect">
+            <a:avLst/>
+          </a:prstGeom>
+          <a:noFill/>
+        </p:spPr>
+        <p:txBody>
+          <a:bodyPr wrap="none" lIns="0" rIns="0" tIns="0" bIns="0">
+            <a:spAutoFit/>
+          </a:bodyPr>
+          <a:lstStyle/>
+          <a:p>
+            <a:r>
+              <a:rPr sz="3150" b="1">
+                <a:solidFill>
+                  <a:srgbClr val="2C5E8A"/>
+                </a:solidFill>
+                <a:latin typeface="Microsoft JhengHei"/>
+                <a:ea typeface="Microsoft JhengHei"/>
+              </a:rPr>
+              <a:t>0963-159-896</a:t>
+            </a:r>
+          </a:p>
+        </p:txBody>
+      </p:sp>
+      <p:sp>
+        <p:nvSpPr>
+          <p:cNvPr id="18" name="TextBox 17"/>
+          <p:cNvSpPr txBox="1"/>
+          <p:nvPr/>
+        </p:nvSpPr>
+        <p:spPr>
+          <a:xfrm>
+            <a:off x="6476999" y="3797300"/>
+            <a:ext cx="2779267" cy="266699"/>
+          </a:xfrm>
+          <a:prstGeom prst="rect">
+            <a:avLst/>
+          </a:prstGeom>
+          <a:noFill/>
+        </p:spPr>
+        <p:txBody>
+          <a:bodyPr wrap="none" lIns="0" rIns="0" tIns="0" bIns="0">
+            <a:spAutoFit/>
+          </a:bodyPr>
+          <a:lstStyle/>
+          <a:p>
+            <a:r>
+              <a:rPr sz="2100" b="0">
+                <a:solidFill>
+                  <a:srgbClr val="2D3748"/>
+                </a:solidFill>
+                <a:latin typeface="Microsoft JhengHei"/>
+                <a:ea typeface="Microsoft JhengHei"/>
+              </a:rPr>
+              <a:t>孩子突發身體急症或意外受傷</a:t>
+            </a:r>
+          </a:p>
+        </p:txBody>
+      </p:sp>
+      <p:sp>
+        <p:nvSpPr>
+          <p:cNvPr id="19" name="TextBox 18"/>
+          <p:cNvSpPr txBox="1"/>
+          <p:nvPr/>
+        </p:nvSpPr>
+        <p:spPr>
+          <a:xfrm>
+            <a:off x="6476999" y="4152899"/>
+            <a:ext cx="2779267" cy="266699"/>
+          </a:xfrm>
+          <a:prstGeom prst="rect">
+            <a:avLst/>
+          </a:prstGeom>
+          <a:noFill/>
+        </p:spPr>
+        <p:txBody>
+          <a:bodyPr wrap="none" lIns="0" rIns="0" tIns="0" bIns="0">
+            <a:spAutoFit/>
+          </a:bodyPr>
+          <a:lstStyle/>
+          <a:p>
+            <a:r>
+              <a:rPr sz="2100" b="0">
+                <a:solidFill>
+                  <a:srgbClr val="2D3748"/>
+                </a:solidFill>
+                <a:latin typeface="Microsoft JhengHei"/>
+                <a:ea typeface="Microsoft JhengHei"/>
+              </a:rPr>
+              <a:t>早晨臨時請假需即時口頭通報</a:t>
+            </a:r>
+          </a:p>
+        </p:txBody>
+      </p:sp>
+      <p:sp>
+        <p:nvSpPr>
+          <p:cNvPr id="20" name="TextBox 19"/>
+          <p:cNvSpPr txBox="1"/>
+          <p:nvPr/>
+        </p:nvSpPr>
+        <p:spPr>
+          <a:xfrm>
+            <a:off x="6476999" y="4508500"/>
+            <a:ext cx="4173219" cy="266699"/>
+          </a:xfrm>
+          <a:prstGeom prst="rect">
+            <a:avLst/>
+          </a:prstGeom>
+          <a:noFill/>
+        </p:spPr>
+        <p:txBody>
+          <a:bodyPr wrap="none" lIns="0" rIns="0" tIns="0" bIns="0">
+            <a:spAutoFit/>
+          </a:bodyPr>
+          <a:lstStyle/>
+          <a:p>
+            <a:r>
+              <a:rPr sz="2100" b="0">
+                <a:solidFill>
+                  <a:srgbClr val="2D3748"/>
+                </a:solidFill>
+                <a:latin typeface="Microsoft JhengHei"/>
+                <a:ea typeface="Microsoft JhengHei"/>
+              </a:rPr>
+              <a:t>提醒：若遇忙線未接，老師一看到立刻回撥！</a:t>
+            </a:r>
+          </a:p>
+        </p:txBody>
+      </p:sp>
+      <p:sp>
+        <p:nvSpPr>
+          <p:cNvPr id="21" name="TextBox 20"/>
+          <p:cNvSpPr txBox="1"/>
+          <p:nvPr/>
+        </p:nvSpPr>
+        <p:spPr>
+          <a:xfrm>
+            <a:off x="914399" y="5289550"/>
+            <a:ext cx="1442211" cy="209549"/>
+          </a:xfrm>
+          <a:prstGeom prst="rect">
+            <a:avLst/>
+          </a:prstGeom>
+          <a:noFill/>
+        </p:spPr>
+        <p:txBody>
+          <a:bodyPr wrap="none" lIns="0" rIns="0" tIns="0" bIns="0">
+            <a:spAutoFit/>
+          </a:bodyPr>
+          <a:lstStyle/>
+          <a:p>
+            <a:r>
+              <a:rPr sz="1650" b="1">
+                <a:solidFill>
+                  <a:srgbClr val="FFFFFF"/>
+                </a:solidFill>
+                <a:latin typeface="Microsoft JhengHei"/>
+                <a:ea typeface="Microsoft JhengHei"/>
+              </a:rPr>
+              <a:t>高老師的溝通原則</a:t>
+            </a:r>
+          </a:p>
+        </p:txBody>
+      </p:sp>
+      <p:sp>
+        <p:nvSpPr>
+          <p:cNvPr id="22" name="TextBox 21"/>
+          <p:cNvSpPr txBox="1"/>
+          <p:nvPr/>
+        </p:nvSpPr>
+        <p:spPr>
+          <a:xfrm>
+            <a:off x="761999" y="5575300"/>
+            <a:ext cx="9749027" cy="266699"/>
           </a:xfrm>
           <a:prstGeom prst="rect">
             <a:avLst/>
@@ -13774,327 +14545,12 @@
             <a:r>
               <a:rPr sz="2100" b="1">
                 <a:solidFill>
-                  <a:srgbClr val="FFFFFF"/>
-                </a:solidFill>
-                <a:latin typeface="Microsoft JhengHei"/>
-                <a:ea typeface="Microsoft JhengHei"/>
-              </a:rPr>
-              <a:t>導師的心裡話</a:t>
-            </a:r>
-          </a:p>
-        </p:txBody>
-      </p:sp>
-      <p:sp>
-        <p:nvSpPr>
-          <p:cNvPr id="8" name="TextBox 7"/>
-          <p:cNvSpPr txBox="1"/>
-          <p:nvPr/>
-        </p:nvSpPr>
-        <p:spPr>
-          <a:xfrm>
-            <a:off x="1142999" y="2400300"/>
-            <a:ext cx="1556003" cy="304800"/>
-          </a:xfrm>
-          <a:prstGeom prst="rect">
-            <a:avLst/>
-          </a:prstGeom>
-          <a:noFill/>
-        </p:spPr>
-        <p:txBody>
-          <a:bodyPr wrap="none" lIns="0" rIns="0" tIns="0" bIns="0">
-            <a:spAutoFit/>
-          </a:bodyPr>
-          <a:lstStyle/>
-          <a:p>
-            <a:r>
-              <a:rPr sz="2400" b="1">
-                <a:solidFill>
-                  <a:srgbClr val="2C5E8A"/>
-                </a:solidFill>
-                <a:latin typeface="Microsoft JhengHei"/>
-                <a:ea typeface="Microsoft JhengHei"/>
-              </a:rPr>
-              <a:t>親愛的家長：</a:t>
-            </a:r>
-          </a:p>
-        </p:txBody>
-      </p:sp>
-      <p:sp>
-        <p:nvSpPr>
-          <p:cNvPr id="9" name="TextBox 8"/>
-          <p:cNvSpPr txBox="1"/>
-          <p:nvPr/>
-        </p:nvSpPr>
-        <p:spPr>
-          <a:xfrm>
-            <a:off x="1142999" y="2844799"/>
-            <a:ext cx="4521707" cy="276225"/>
-          </a:xfrm>
-          <a:prstGeom prst="rect">
-            <a:avLst/>
-          </a:prstGeom>
-          <a:noFill/>
-        </p:spPr>
-        <p:txBody>
-          <a:bodyPr wrap="none" lIns="0" rIns="0" tIns="0" bIns="0">
-            <a:spAutoFit/>
-          </a:bodyPr>
-          <a:lstStyle/>
-          <a:p>
-            <a:r>
-              <a:rPr sz="2175" b="0">
-                <a:solidFill>
-                  <a:srgbClr val="2D3748"/>
-                </a:solidFill>
-                <a:latin typeface="Microsoft JhengHei"/>
-                <a:ea typeface="Microsoft JhengHei"/>
-              </a:rPr>
-              <a:t>六年級，是小學階段最特別、也最關鍵的一年。</a:t>
-            </a:r>
-          </a:p>
-        </p:txBody>
-      </p:sp>
-      <p:sp>
-        <p:nvSpPr>
-          <p:cNvPr id="10" name="TextBox 9"/>
-          <p:cNvSpPr txBox="1"/>
-          <p:nvPr/>
-        </p:nvSpPr>
-        <p:spPr>
-          <a:xfrm>
-            <a:off x="1142999" y="3149600"/>
-            <a:ext cx="8646667" cy="276225"/>
-          </a:xfrm>
-          <a:prstGeom prst="rect">
-            <a:avLst/>
-          </a:prstGeom>
-          <a:noFill/>
-        </p:spPr>
-        <p:txBody>
-          <a:bodyPr wrap="none" lIns="0" rIns="0" tIns="0" bIns="0">
-            <a:spAutoFit/>
-          </a:bodyPr>
-          <a:lstStyle/>
-          <a:p>
-            <a:r>
-              <a:rPr sz="2175" b="0">
-                <a:solidFill>
-                  <a:srgbClr val="2D3748"/>
-                </a:solidFill>
-                <a:latin typeface="Microsoft JhengHei"/>
-                <a:ea typeface="Microsoft JhengHei"/>
-              </a:rPr>
-              <a:t>孩子正在經歷從依賴走向獨立的拔節時刻，他們渴望證明自己，心底卻極度需要大人的支持。</a:t>
-            </a:r>
-          </a:p>
-        </p:txBody>
-      </p:sp>
-      <p:sp>
-        <p:nvSpPr>
-          <p:cNvPr id="11" name="TextBox 10"/>
-          <p:cNvSpPr txBox="1"/>
-          <p:nvPr/>
-        </p:nvSpPr>
-        <p:spPr>
-          <a:xfrm>
-            <a:off x="1142999" y="3594100"/>
-            <a:ext cx="7231379" cy="285750"/>
-          </a:xfrm>
-          <a:prstGeom prst="rect">
-            <a:avLst/>
-          </a:prstGeom>
-          <a:noFill/>
-        </p:spPr>
-        <p:txBody>
-          <a:bodyPr wrap="none" lIns="0" rIns="0" tIns="0" bIns="0">
-            <a:spAutoFit/>
-          </a:bodyPr>
-          <a:lstStyle/>
-          <a:p>
-            <a:r>
-              <a:rPr sz="2250" b="1">
-                <a:solidFill>
-                  <a:srgbClr val="E88D67"/>
-                </a:solidFill>
-                <a:latin typeface="Microsoft JhengHei"/>
-                <a:ea typeface="Microsoft JhengHei"/>
-              </a:rPr>
-              <a:t>我們無法替孩子走完人生的每一步路，也無法替他經歷所有的考試與挫折；</a:t>
-            </a:r>
-          </a:p>
-        </p:txBody>
-      </p:sp>
-      <p:sp>
-        <p:nvSpPr>
-          <p:cNvPr id="12" name="TextBox 11"/>
-          <p:cNvSpPr txBox="1"/>
-          <p:nvPr/>
-        </p:nvSpPr>
-        <p:spPr>
-          <a:xfrm>
-            <a:off x="1142999" y="3898899"/>
-            <a:ext cx="4109211" cy="276225"/>
-          </a:xfrm>
-          <a:prstGeom prst="rect">
-            <a:avLst/>
-          </a:prstGeom>
-          <a:noFill/>
-        </p:spPr>
-        <p:txBody>
-          <a:bodyPr wrap="none" lIns="0" rIns="0" tIns="0" bIns="0">
-            <a:spAutoFit/>
-          </a:bodyPr>
-          <a:lstStyle/>
-          <a:p>
-            <a:r>
-              <a:rPr sz="2175" b="0">
-                <a:solidFill>
-                  <a:srgbClr val="2D3748"/>
-                </a:solidFill>
-                <a:latin typeface="Microsoft JhengHei"/>
-                <a:ea typeface="Microsoft JhengHei"/>
-              </a:rPr>
-              <a:t>但我們可以在他跑累的時候遞上一杯溫水，</a:t>
-            </a:r>
-          </a:p>
-        </p:txBody>
-      </p:sp>
-      <p:sp>
-        <p:nvSpPr>
-          <p:cNvPr id="13" name="TextBox 12"/>
-          <p:cNvSpPr txBox="1"/>
-          <p:nvPr/>
-        </p:nvSpPr>
-        <p:spPr>
-          <a:xfrm>
-            <a:off x="1142999" y="4203700"/>
-            <a:ext cx="5951219" cy="285750"/>
-          </a:xfrm>
-          <a:prstGeom prst="rect">
-            <a:avLst/>
-          </a:prstGeom>
-          <a:noFill/>
-        </p:spPr>
-        <p:txBody>
-          <a:bodyPr wrap="none" lIns="0" rIns="0" tIns="0" bIns="0">
-            <a:spAutoFit/>
-          </a:bodyPr>
-          <a:lstStyle/>
-          <a:p>
-            <a:r>
-              <a:rPr sz="2250" b="1">
-                <a:solidFill>
-                  <a:srgbClr val="E88D67"/>
-                </a:solidFill>
-                <a:latin typeface="Microsoft JhengHei"/>
-                <a:ea typeface="Microsoft JhengHei"/>
-              </a:rPr>
-              <a:t>在他跌倒時抱抱他，讓他明白——他隨時可以再勇敢站起來。</a:t>
-            </a:r>
-          </a:p>
-        </p:txBody>
-      </p:sp>
-      <p:sp>
-        <p:nvSpPr>
-          <p:cNvPr id="14" name="TextBox 13"/>
-          <p:cNvSpPr txBox="1"/>
-          <p:nvPr/>
-        </p:nvSpPr>
-        <p:spPr>
-          <a:xfrm>
-            <a:off x="1142999" y="4648200"/>
-            <a:ext cx="5424931" cy="304800"/>
-          </a:xfrm>
-          <a:prstGeom prst="rect">
-            <a:avLst/>
-          </a:prstGeom>
-          <a:noFill/>
-        </p:spPr>
-        <p:txBody>
-          <a:bodyPr wrap="none" lIns="0" rIns="0" tIns="0" bIns="0">
-            <a:spAutoFit/>
-          </a:bodyPr>
-          <a:lstStyle/>
-          <a:p>
-            <a:r>
-              <a:rPr sz="2400" b="1">
-                <a:solidFill>
-                  <a:srgbClr val="2C5E8A"/>
-                </a:solidFill>
-                <a:latin typeface="Microsoft JhengHei"/>
-                <a:ea typeface="Microsoft JhengHei"/>
-              </a:rPr>
-              <a:t>感謝各位家長六年來的悉心灌溉。小學的最後一年，</a:t>
-            </a:r>
-          </a:p>
-        </p:txBody>
-      </p:sp>
-      <p:sp>
-        <p:nvSpPr>
-          <p:cNvPr id="15" name="TextBox 14"/>
-          <p:cNvSpPr txBox="1"/>
-          <p:nvPr/>
-        </p:nvSpPr>
-        <p:spPr>
-          <a:xfrm>
-            <a:off x="1142999" y="4952999"/>
-            <a:ext cx="7615427" cy="276225"/>
-          </a:xfrm>
-          <a:prstGeom prst="rect">
-            <a:avLst/>
-          </a:prstGeom>
-          <a:noFill/>
-        </p:spPr>
-        <p:txBody>
-          <a:bodyPr wrap="none" lIns="0" rIns="0" tIns="0" bIns="0">
-            <a:spAutoFit/>
-          </a:bodyPr>
-          <a:lstStyle/>
-          <a:p>
-            <a:r>
-              <a:rPr sz="2175" b="0">
-                <a:solidFill>
-                  <a:srgbClr val="2D3748"/>
-                </a:solidFill>
-                <a:latin typeface="Microsoft JhengHei"/>
-                <a:ea typeface="Microsoft JhengHei"/>
-              </a:rPr>
-              <a:t>高老師會竭盡全力陪伴六年一班的每一個孩子，帶著豐盛的勇氣與愛，航向未來！</a:t>
-            </a:r>
-          </a:p>
-        </p:txBody>
-      </p:sp>
-      <p:sp>
-        <p:nvSpPr>
-          <p:cNvPr id="16" name="TextBox 15"/>
-          <p:cNvSpPr txBox="1"/>
-          <p:nvPr/>
-        </p:nvSpPr>
-        <p:spPr>
-          <a:xfrm>
-            <a:off x="8254999" y="5289550"/>
-            <a:ext cx="3334003" cy="323849"/>
-          </a:xfrm>
-          <a:prstGeom prst="rect">
-            <a:avLst/>
-          </a:prstGeom>
-          <a:noFill/>
-        </p:spPr>
-        <p:txBody>
-          <a:bodyPr wrap="none" lIns="0" rIns="0" tIns="0" bIns="0">
-            <a:spAutoFit/>
-          </a:bodyPr>
-          <a:lstStyle/>
-          <a:p>
-            <a:r>
-              <a:rPr sz="2550" b="1">
-                <a:solidFill>
-                  <a:srgbClr val="2C5E8A"/>
-                </a:solidFill>
-                <a:latin typeface="Microsoft JhengHei"/>
-                <a:ea typeface="Microsoft JhengHei"/>
-              </a:rPr>
-              <a:t>六年一班導師 高志賢 敬上</a:t>
+                  <a:srgbClr val="2D3748"/>
+                </a:solidFill>
+                <a:latin typeface="Microsoft JhengHei"/>
+                <a:ea typeface="Microsoft JhengHei"/>
+              </a:rPr>
+              <a:t>「孩子有任何狀況，請第一時間與我聯繫。我們坦誠對話、互相合作，讓小問題在第一時間得到最好照顧。」</a:t>
             </a:r>
           </a:p>
         </p:txBody>
@@ -14119,7 +14575,7 @@
       <p:grpSpPr/>
       <p:pic>
         <p:nvPicPr>
-          <p:cNvPr id="2" name="Picture 1" descr="25-qa.png"/>
+          <p:cNvPr id="2" name="Picture 1" descr="25-message.png"/>
           <p:cNvPicPr>
             <a:picLocks noChangeAspect="1"/>
           </p:cNvPicPr>
@@ -14206,7 +14662,7 @@
                 <a:latin typeface="Microsoft JhengHei"/>
                 <a:ea typeface="Microsoft JhengHei"/>
               </a:rPr>
-              <a:t>PAGE 25 / 26</a:t>
+              <a:t>PAGE 25 / 27</a:t>
             </a:r>
           </a:p>
         </p:txBody>
@@ -14220,7 +14676,7 @@
         <p:spPr>
           <a:xfrm>
             <a:off x="507999" y="717550"/>
-            <a:ext cx="5368035" cy="495299"/>
+            <a:ext cx="7217155" cy="495299"/>
           </a:xfrm>
           <a:prstGeom prst="rect">
             <a:avLst/>
@@ -14241,7 +14697,7 @@
                 <a:latin typeface="Microsoft JhengHei"/>
                 <a:ea typeface="Microsoft JhengHei"/>
               </a:rPr>
-              <a:t>感謝聆聽．交流時間（Q&amp;A）</a:t>
+              <a:t>給家長的一封信：並肩走一段平穩堅定的路</a:t>
             </a:r>
           </a:p>
         </p:txBody>
@@ -14255,7 +14711,7 @@
         <p:spPr>
           <a:xfrm>
             <a:off x="507999" y="1162050"/>
-            <a:ext cx="6477507" cy="247649"/>
+            <a:ext cx="6107683" cy="247649"/>
           </a:xfrm>
           <a:prstGeom prst="rect">
             <a:avLst/>
@@ -14276,7 +14732,7 @@
                 <a:latin typeface="Microsoft JhengHei"/>
                 <a:ea typeface="Microsoft JhengHei"/>
               </a:rPr>
-              <a:t>臺中市沙鹿區鹿陽國民小學 六年一班・讓我們一起成為孩子最好的神隊友！</a:t>
+              <a:t>六年級是童年的尾聲，也是青春的序曲・讓我們給予孩子展翅飛翔的底氣</a:t>
             </a:r>
           </a:p>
         </p:txBody>
@@ -14289,7 +14745,7 @@
         </p:nvSpPr>
         <p:spPr>
           <a:xfrm>
-            <a:off x="977899" y="1987550"/>
+            <a:off x="1295399" y="2019299"/>
             <a:ext cx="1385315" cy="266699"/>
           </a:xfrm>
           <a:prstGeom prst="rect">
@@ -14311,7 +14767,7 @@
                 <a:latin typeface="Microsoft JhengHei"/>
                 <a:ea typeface="Microsoft JhengHei"/>
               </a:rPr>
-              <a:t>現場互動環節</a:t>
+              <a:t>導師的心裡話</a:t>
             </a:r>
           </a:p>
         </p:txBody>
@@ -14324,29 +14780,29 @@
         </p:nvSpPr>
         <p:spPr>
           <a:xfrm>
-            <a:off x="825499" y="2368550"/>
-            <a:ext cx="3134867" cy="438149"/>
-          </a:xfrm>
-          <a:prstGeom prst="rect">
-            <a:avLst/>
-          </a:prstGeom>
-          <a:noFill/>
-        </p:spPr>
-        <p:txBody>
-          <a:bodyPr wrap="none" lIns="0" rIns="0" tIns="0" bIns="0">
-            <a:spAutoFit/>
-          </a:bodyPr>
-          <a:lstStyle/>
-          <a:p>
-            <a:r>
-              <a:rPr sz="3450" b="1">
+            <a:off x="1142999" y="2400300"/>
+            <a:ext cx="1556003" cy="304800"/>
+          </a:xfrm>
+          <a:prstGeom prst="rect">
+            <a:avLst/>
+          </a:prstGeom>
+          <a:noFill/>
+        </p:spPr>
+        <p:txBody>
+          <a:bodyPr wrap="none" lIns="0" rIns="0" tIns="0" bIns="0">
+            <a:spAutoFit/>
+          </a:bodyPr>
+          <a:lstStyle/>
+          <a:p>
+            <a:r>
+              <a:rPr sz="2400" b="1">
                 <a:solidFill>
                   <a:srgbClr val="2C5E8A"/>
                 </a:solidFill>
                 <a:latin typeface="Microsoft JhengHei"/>
                 <a:ea typeface="Microsoft JhengHei"/>
               </a:rPr>
-              <a:t>自由提問與意見分享</a:t>
+              <a:t>親愛的家長：</a:t>
             </a:r>
           </a:p>
         </p:txBody>
@@ -14359,8 +14815,253 @@
         </p:nvSpPr>
         <p:spPr>
           <a:xfrm>
-            <a:off x="1079499" y="2940050"/>
-            <a:ext cx="1641347" cy="323849"/>
+            <a:off x="1142999" y="2844799"/>
+            <a:ext cx="4521707" cy="276225"/>
+          </a:xfrm>
+          <a:prstGeom prst="rect">
+            <a:avLst/>
+          </a:prstGeom>
+          <a:noFill/>
+        </p:spPr>
+        <p:txBody>
+          <a:bodyPr wrap="none" lIns="0" rIns="0" tIns="0" bIns="0">
+            <a:spAutoFit/>
+          </a:bodyPr>
+          <a:lstStyle/>
+          <a:p>
+            <a:r>
+              <a:rPr sz="2175" b="0">
+                <a:solidFill>
+                  <a:srgbClr val="2D3748"/>
+                </a:solidFill>
+                <a:latin typeface="Microsoft JhengHei"/>
+                <a:ea typeface="Microsoft JhengHei"/>
+              </a:rPr>
+              <a:t>六年級，是小學階段最特別、也最關鍵的一年。</a:t>
+            </a:r>
+          </a:p>
+        </p:txBody>
+      </p:sp>
+      <p:sp>
+        <p:nvSpPr>
+          <p:cNvPr id="10" name="TextBox 9"/>
+          <p:cNvSpPr txBox="1"/>
+          <p:nvPr/>
+        </p:nvSpPr>
+        <p:spPr>
+          <a:xfrm>
+            <a:off x="1142999" y="3149600"/>
+            <a:ext cx="8646667" cy="276225"/>
+          </a:xfrm>
+          <a:prstGeom prst="rect">
+            <a:avLst/>
+          </a:prstGeom>
+          <a:noFill/>
+        </p:spPr>
+        <p:txBody>
+          <a:bodyPr wrap="none" lIns="0" rIns="0" tIns="0" bIns="0">
+            <a:spAutoFit/>
+          </a:bodyPr>
+          <a:lstStyle/>
+          <a:p>
+            <a:r>
+              <a:rPr sz="2175" b="0">
+                <a:solidFill>
+                  <a:srgbClr val="2D3748"/>
+                </a:solidFill>
+                <a:latin typeface="Microsoft JhengHei"/>
+                <a:ea typeface="Microsoft JhengHei"/>
+              </a:rPr>
+              <a:t>孩子正在經歷從依賴走向獨立的拔節時刻，他們渴望證明自己，心底卻極度需要大人的支持。</a:t>
+            </a:r>
+          </a:p>
+        </p:txBody>
+      </p:sp>
+      <p:sp>
+        <p:nvSpPr>
+          <p:cNvPr id="11" name="TextBox 10"/>
+          <p:cNvSpPr txBox="1"/>
+          <p:nvPr/>
+        </p:nvSpPr>
+        <p:spPr>
+          <a:xfrm>
+            <a:off x="1142999" y="3594100"/>
+            <a:ext cx="7231379" cy="285750"/>
+          </a:xfrm>
+          <a:prstGeom prst="rect">
+            <a:avLst/>
+          </a:prstGeom>
+          <a:noFill/>
+        </p:spPr>
+        <p:txBody>
+          <a:bodyPr wrap="none" lIns="0" rIns="0" tIns="0" bIns="0">
+            <a:spAutoFit/>
+          </a:bodyPr>
+          <a:lstStyle/>
+          <a:p>
+            <a:r>
+              <a:rPr sz="2250" b="1">
+                <a:solidFill>
+                  <a:srgbClr val="E88D67"/>
+                </a:solidFill>
+                <a:latin typeface="Microsoft JhengHei"/>
+                <a:ea typeface="Microsoft JhengHei"/>
+              </a:rPr>
+              <a:t>我們無法替孩子走完人生的每一步路，也無法替他經歷所有的考試與挫折；</a:t>
+            </a:r>
+          </a:p>
+        </p:txBody>
+      </p:sp>
+      <p:sp>
+        <p:nvSpPr>
+          <p:cNvPr id="12" name="TextBox 11"/>
+          <p:cNvSpPr txBox="1"/>
+          <p:nvPr/>
+        </p:nvSpPr>
+        <p:spPr>
+          <a:xfrm>
+            <a:off x="1142999" y="3898899"/>
+            <a:ext cx="4109211" cy="276225"/>
+          </a:xfrm>
+          <a:prstGeom prst="rect">
+            <a:avLst/>
+          </a:prstGeom>
+          <a:noFill/>
+        </p:spPr>
+        <p:txBody>
+          <a:bodyPr wrap="none" lIns="0" rIns="0" tIns="0" bIns="0">
+            <a:spAutoFit/>
+          </a:bodyPr>
+          <a:lstStyle/>
+          <a:p>
+            <a:r>
+              <a:rPr sz="2175" b="0">
+                <a:solidFill>
+                  <a:srgbClr val="2D3748"/>
+                </a:solidFill>
+                <a:latin typeface="Microsoft JhengHei"/>
+                <a:ea typeface="Microsoft JhengHei"/>
+              </a:rPr>
+              <a:t>但我們可以在他跑累的時候遞上一杯溫水，</a:t>
+            </a:r>
+          </a:p>
+        </p:txBody>
+      </p:sp>
+      <p:sp>
+        <p:nvSpPr>
+          <p:cNvPr id="13" name="TextBox 12"/>
+          <p:cNvSpPr txBox="1"/>
+          <p:nvPr/>
+        </p:nvSpPr>
+        <p:spPr>
+          <a:xfrm>
+            <a:off x="1142999" y="4203700"/>
+            <a:ext cx="5951219" cy="285750"/>
+          </a:xfrm>
+          <a:prstGeom prst="rect">
+            <a:avLst/>
+          </a:prstGeom>
+          <a:noFill/>
+        </p:spPr>
+        <p:txBody>
+          <a:bodyPr wrap="none" lIns="0" rIns="0" tIns="0" bIns="0">
+            <a:spAutoFit/>
+          </a:bodyPr>
+          <a:lstStyle/>
+          <a:p>
+            <a:r>
+              <a:rPr sz="2250" b="1">
+                <a:solidFill>
+                  <a:srgbClr val="E88D67"/>
+                </a:solidFill>
+                <a:latin typeface="Microsoft JhengHei"/>
+                <a:ea typeface="Microsoft JhengHei"/>
+              </a:rPr>
+              <a:t>在他跌倒時抱抱他，讓他明白——他隨時可以再勇敢站起來。</a:t>
+            </a:r>
+          </a:p>
+        </p:txBody>
+      </p:sp>
+      <p:sp>
+        <p:nvSpPr>
+          <p:cNvPr id="14" name="TextBox 13"/>
+          <p:cNvSpPr txBox="1"/>
+          <p:nvPr/>
+        </p:nvSpPr>
+        <p:spPr>
+          <a:xfrm>
+            <a:off x="1142999" y="4648200"/>
+            <a:ext cx="5424931" cy="304800"/>
+          </a:xfrm>
+          <a:prstGeom prst="rect">
+            <a:avLst/>
+          </a:prstGeom>
+          <a:noFill/>
+        </p:spPr>
+        <p:txBody>
+          <a:bodyPr wrap="none" lIns="0" rIns="0" tIns="0" bIns="0">
+            <a:spAutoFit/>
+          </a:bodyPr>
+          <a:lstStyle/>
+          <a:p>
+            <a:r>
+              <a:rPr sz="2400" b="1">
+                <a:solidFill>
+                  <a:srgbClr val="2C5E8A"/>
+                </a:solidFill>
+                <a:latin typeface="Microsoft JhengHei"/>
+                <a:ea typeface="Microsoft JhengHei"/>
+              </a:rPr>
+              <a:t>感謝各位家長六年來的悉心灌溉。小學的最後一年，</a:t>
+            </a:r>
+          </a:p>
+        </p:txBody>
+      </p:sp>
+      <p:sp>
+        <p:nvSpPr>
+          <p:cNvPr id="15" name="TextBox 14"/>
+          <p:cNvSpPr txBox="1"/>
+          <p:nvPr/>
+        </p:nvSpPr>
+        <p:spPr>
+          <a:xfrm>
+            <a:off x="1142999" y="4952999"/>
+            <a:ext cx="7615427" cy="276225"/>
+          </a:xfrm>
+          <a:prstGeom prst="rect">
+            <a:avLst/>
+          </a:prstGeom>
+          <a:noFill/>
+        </p:spPr>
+        <p:txBody>
+          <a:bodyPr wrap="none" lIns="0" rIns="0" tIns="0" bIns="0">
+            <a:spAutoFit/>
+          </a:bodyPr>
+          <a:lstStyle/>
+          <a:p>
+            <a:r>
+              <a:rPr sz="2175" b="0">
+                <a:solidFill>
+                  <a:srgbClr val="2D3748"/>
+                </a:solidFill>
+                <a:latin typeface="Microsoft JhengHei"/>
+                <a:ea typeface="Microsoft JhengHei"/>
+              </a:rPr>
+              <a:t>高老師會竭盡全力陪伴六年一班的每一個孩子，帶著豐盛的勇氣與愛，航向未來！</a:t>
+            </a:r>
+          </a:p>
+        </p:txBody>
+      </p:sp>
+      <p:sp>
+        <p:nvSpPr>
+          <p:cNvPr id="16" name="TextBox 15"/>
+          <p:cNvSpPr txBox="1"/>
+          <p:nvPr/>
+        </p:nvSpPr>
+        <p:spPr>
+          <a:xfrm>
+            <a:off x="8254999" y="5289550"/>
+            <a:ext cx="3334003" cy="323849"/>
           </a:xfrm>
           <a:prstGeom prst="rect">
             <a:avLst/>
@@ -14376,537 +15077,12 @@
             <a:r>
               <a:rPr sz="2550" b="1">
                 <a:solidFill>
-                  <a:srgbClr val="E88D67"/>
-                </a:solidFill>
-                <a:latin typeface="Microsoft JhengHei"/>
-                <a:ea typeface="Microsoft JhengHei"/>
-              </a:rPr>
-              <a:t>自由提問交流</a:t>
-            </a:r>
-          </a:p>
-        </p:txBody>
-      </p:sp>
-      <p:sp>
-        <p:nvSpPr>
-          <p:cNvPr id="10" name="TextBox 9"/>
-          <p:cNvSpPr txBox="1"/>
-          <p:nvPr/>
-        </p:nvSpPr>
-        <p:spPr>
-          <a:xfrm>
-            <a:off x="1079499" y="3232149"/>
-            <a:ext cx="4372355" cy="266699"/>
-          </a:xfrm>
-          <a:prstGeom prst="rect">
-            <a:avLst/>
-          </a:prstGeom>
-          <a:noFill/>
-        </p:spPr>
-        <p:txBody>
-          <a:bodyPr wrap="none" lIns="0" rIns="0" tIns="0" bIns="0">
-            <a:spAutoFit/>
-          </a:bodyPr>
-          <a:lstStyle/>
-          <a:p>
-            <a:r>
-              <a:rPr sz="2100" b="0">
-                <a:solidFill>
-                  <a:srgbClr val="2D3748"/>
-                </a:solidFill>
-                <a:latin typeface="Microsoft JhengHei"/>
-                <a:ea typeface="Microsoft JhengHei"/>
-              </a:rPr>
-              <a:t>對孩子學習、作息與常規有任何想法均可提出。</a:t>
-            </a:r>
-          </a:p>
-        </p:txBody>
-      </p:sp>
-      <p:sp>
-        <p:nvSpPr>
-          <p:cNvPr id="11" name="TextBox 10"/>
-          <p:cNvSpPr txBox="1"/>
-          <p:nvPr/>
-        </p:nvSpPr>
-        <p:spPr>
-          <a:xfrm>
-            <a:off x="1079499" y="3587749"/>
-            <a:ext cx="1641347" cy="323849"/>
-          </a:xfrm>
-          <a:prstGeom prst="rect">
-            <a:avLst/>
-          </a:prstGeom>
-          <a:noFill/>
-        </p:spPr>
-        <p:txBody>
-          <a:bodyPr wrap="none" lIns="0" rIns="0" tIns="0" bIns="0">
-            <a:spAutoFit/>
-          </a:bodyPr>
-          <a:lstStyle/>
-          <a:p>
-            <a:r>
-              <a:rPr sz="2550" b="1">
-                <a:solidFill>
-                  <a:srgbClr val="E88D67"/>
-                </a:solidFill>
-                <a:latin typeface="Microsoft JhengHei"/>
-                <a:ea typeface="Microsoft JhengHei"/>
-              </a:rPr>
-              <a:t>班親幹部推選</a:t>
-            </a:r>
-          </a:p>
-        </p:txBody>
-      </p:sp>
-      <p:sp>
-        <p:nvSpPr>
-          <p:cNvPr id="12" name="TextBox 11"/>
-          <p:cNvSpPr txBox="1"/>
-          <p:nvPr/>
-        </p:nvSpPr>
-        <p:spPr>
-          <a:xfrm>
-            <a:off x="1079499" y="3879850"/>
-            <a:ext cx="4969763" cy="266699"/>
-          </a:xfrm>
-          <a:prstGeom prst="rect">
-            <a:avLst/>
-          </a:prstGeom>
-          <a:noFill/>
-        </p:spPr>
-        <p:txBody>
-          <a:bodyPr wrap="none" lIns="0" rIns="0" tIns="0" bIns="0">
-            <a:spAutoFit/>
-          </a:bodyPr>
-          <a:lstStyle/>
-          <a:p>
-            <a:r>
-              <a:rPr sz="2100" b="0">
-                <a:solidFill>
-                  <a:srgbClr val="2D3748"/>
-                </a:solidFill>
-                <a:latin typeface="Microsoft JhengHei"/>
-                <a:ea typeface="Microsoft JhengHei"/>
-              </a:rPr>
-              <a:t>現場推選班親會「會長」與「總務」，共同把關經費。</a:t>
-            </a:r>
-          </a:p>
-        </p:txBody>
-      </p:sp>
-      <p:sp>
-        <p:nvSpPr>
-          <p:cNvPr id="13" name="TextBox 12"/>
-          <p:cNvSpPr txBox="1"/>
-          <p:nvPr/>
-        </p:nvSpPr>
-        <p:spPr>
-          <a:xfrm>
-            <a:off x="1079499" y="4235449"/>
-            <a:ext cx="1641347" cy="323849"/>
-          </a:xfrm>
-          <a:prstGeom prst="rect">
-            <a:avLst/>
-          </a:prstGeom>
-          <a:noFill/>
-        </p:spPr>
-        <p:txBody>
-          <a:bodyPr wrap="none" lIns="0" rIns="0" tIns="0" bIns="0">
-            <a:spAutoFit/>
-          </a:bodyPr>
-          <a:lstStyle/>
-          <a:p>
-            <a:r>
-              <a:rPr sz="2550" b="1">
-                <a:solidFill>
-                  <a:srgbClr val="E88D67"/>
-                </a:solidFill>
-                <a:latin typeface="Microsoft JhengHei"/>
-                <a:ea typeface="Microsoft JhengHei"/>
-              </a:rPr>
-              <a:t>畢業專案討論</a:t>
-            </a:r>
-          </a:p>
-        </p:txBody>
-      </p:sp>
-      <p:sp>
-        <p:nvSpPr>
-          <p:cNvPr id="14" name="TextBox 13"/>
-          <p:cNvSpPr txBox="1"/>
-          <p:nvPr/>
-        </p:nvSpPr>
-        <p:spPr>
-          <a:xfrm>
-            <a:off x="1079499" y="4527550"/>
-            <a:ext cx="4173219" cy="266699"/>
-          </a:xfrm>
-          <a:prstGeom prst="rect">
-            <a:avLst/>
-          </a:prstGeom>
-          <a:noFill/>
-        </p:spPr>
-        <p:txBody>
-          <a:bodyPr wrap="none" lIns="0" rIns="0" tIns="0" bIns="0">
-            <a:spAutoFit/>
-          </a:bodyPr>
-          <a:lstStyle/>
-          <a:p>
-            <a:r>
-              <a:rPr sz="2100" b="0">
-                <a:solidFill>
-                  <a:srgbClr val="2D3748"/>
-                </a:solidFill>
-                <a:latin typeface="Microsoft JhengHei"/>
-                <a:ea typeface="Microsoft JhengHei"/>
-              </a:rPr>
-              <a:t>畢業旅行期望、活動規劃與紀念冊製作交流。</a:t>
-            </a:r>
-          </a:p>
-        </p:txBody>
-      </p:sp>
-      <p:sp>
-        <p:nvSpPr>
-          <p:cNvPr id="15" name="TextBox 14"/>
-          <p:cNvSpPr txBox="1"/>
-          <p:nvPr/>
-        </p:nvSpPr>
-        <p:spPr>
-          <a:xfrm>
-            <a:off x="1079499" y="4883150"/>
-            <a:ext cx="1641347" cy="323849"/>
-          </a:xfrm>
-          <a:prstGeom prst="rect">
-            <a:avLst/>
-          </a:prstGeom>
-          <a:noFill/>
-        </p:spPr>
-        <p:txBody>
-          <a:bodyPr wrap="none" lIns="0" rIns="0" tIns="0" bIns="0">
-            <a:spAutoFit/>
-          </a:bodyPr>
-          <a:lstStyle/>
-          <a:p>
-            <a:r>
-              <a:rPr sz="2550" b="1">
-                <a:solidFill>
-                  <a:srgbClr val="E88D67"/>
-                </a:solidFill>
-                <a:latin typeface="Microsoft JhengHei"/>
-                <a:ea typeface="Microsoft JhengHei"/>
-              </a:rPr>
-              <a:t>填寫回饋表單</a:t>
-            </a:r>
-          </a:p>
-        </p:txBody>
-      </p:sp>
-      <p:sp>
-        <p:nvSpPr>
-          <p:cNvPr id="16" name="TextBox 15"/>
-          <p:cNvSpPr txBox="1"/>
-          <p:nvPr/>
-        </p:nvSpPr>
-        <p:spPr>
-          <a:xfrm>
-            <a:off x="1079499" y="5175250"/>
-            <a:ext cx="5368035" cy="266699"/>
-          </a:xfrm>
-          <a:prstGeom prst="rect">
-            <a:avLst/>
-          </a:prstGeom>
-          <a:noFill/>
-        </p:spPr>
-        <p:txBody>
-          <a:bodyPr wrap="none" lIns="0" rIns="0" tIns="0" bIns="0">
-            <a:spAutoFit/>
-          </a:bodyPr>
-          <a:lstStyle/>
-          <a:p>
-            <a:r>
-              <a:rPr sz="2100" b="0">
-                <a:solidFill>
-                  <a:srgbClr val="2D3748"/>
-                </a:solidFill>
-                <a:latin typeface="Microsoft JhengHei"/>
-                <a:ea typeface="Microsoft JhengHei"/>
-              </a:rPr>
-              <a:t>歡迎家長掃描 QR Code 或填寫紙本，提供建言。</a:t>
-            </a:r>
-          </a:p>
-        </p:txBody>
-      </p:sp>
-      <p:sp>
-        <p:nvSpPr>
-          <p:cNvPr id="17" name="TextBox 16"/>
-          <p:cNvSpPr txBox="1"/>
-          <p:nvPr/>
-        </p:nvSpPr>
-        <p:spPr>
-          <a:xfrm>
-            <a:off x="6629399" y="1987550"/>
-            <a:ext cx="1584451" cy="266699"/>
-          </a:xfrm>
-          <a:prstGeom prst="rect">
-            <a:avLst/>
-          </a:prstGeom>
-          <a:noFill/>
-        </p:spPr>
-        <p:txBody>
-          <a:bodyPr wrap="none" lIns="0" rIns="0" tIns="0" bIns="0">
-            <a:spAutoFit/>
-          </a:bodyPr>
-          <a:lstStyle/>
-          <a:p>
-            <a:r>
-              <a:rPr sz="2100" b="1">
-                <a:solidFill>
-                  <a:srgbClr val="FFFFFF"/>
-                </a:solidFill>
-                <a:latin typeface="Microsoft JhengHei"/>
-                <a:ea typeface="Microsoft JhengHei"/>
-              </a:rPr>
-              <a:t>親師聯繫總整理</a:t>
-            </a:r>
-          </a:p>
-        </p:txBody>
-      </p:sp>
-      <p:sp>
-        <p:nvSpPr>
-          <p:cNvPr id="18" name="TextBox 17"/>
-          <p:cNvSpPr txBox="1"/>
-          <p:nvPr/>
-        </p:nvSpPr>
-        <p:spPr>
-          <a:xfrm>
-            <a:off x="6476999" y="2368550"/>
-            <a:ext cx="3134867" cy="438149"/>
-          </a:xfrm>
-          <a:prstGeom prst="rect">
-            <a:avLst/>
-          </a:prstGeom>
-          <a:noFill/>
-        </p:spPr>
-        <p:txBody>
-          <a:bodyPr wrap="none" lIns="0" rIns="0" tIns="0" bIns="0">
-            <a:spAutoFit/>
-          </a:bodyPr>
-          <a:lstStyle/>
-          <a:p>
-            <a:r>
-              <a:rPr sz="3450" b="1">
-                <a:solidFill>
-                  <a:srgbClr val="58A47E"/>
-                </a:solidFill>
-                <a:latin typeface="Microsoft JhengHei"/>
-                <a:ea typeface="Microsoft JhengHei"/>
-              </a:rPr>
-              <a:t>陪伴孩子，隨時連線</a:t>
-            </a:r>
-          </a:p>
-        </p:txBody>
-      </p:sp>
-      <p:sp>
-        <p:nvSpPr>
-          <p:cNvPr id="19" name="TextBox 18"/>
-          <p:cNvSpPr txBox="1"/>
-          <p:nvPr/>
-        </p:nvSpPr>
-        <p:spPr>
-          <a:xfrm>
-            <a:off x="6762749" y="3003549"/>
-            <a:ext cx="1470659" cy="342900"/>
-          </a:xfrm>
-          <a:prstGeom prst="rect">
-            <a:avLst/>
-          </a:prstGeom>
-          <a:noFill/>
-        </p:spPr>
-        <p:txBody>
-          <a:bodyPr wrap="none" lIns="0" rIns="0" tIns="0" bIns="0">
-            <a:spAutoFit/>
-          </a:bodyPr>
-          <a:lstStyle/>
-          <a:p>
-            <a:r>
-              <a:rPr sz="2700" b="1">
-                <a:solidFill>
                   <a:srgbClr val="2C5E8A"/>
                 </a:solidFill>
                 <a:latin typeface="Microsoft JhengHei"/>
                 <a:ea typeface="Microsoft JhengHei"/>
               </a:rPr>
-              <a:t>平常溝通：</a:t>
-            </a:r>
-          </a:p>
-        </p:txBody>
-      </p:sp>
-      <p:sp>
-        <p:nvSpPr>
-          <p:cNvPr id="20" name="TextBox 19"/>
-          <p:cNvSpPr txBox="1"/>
-          <p:nvPr/>
-        </p:nvSpPr>
-        <p:spPr>
-          <a:xfrm>
-            <a:off x="6762749" y="3314700"/>
-            <a:ext cx="4287011" cy="304800"/>
-          </a:xfrm>
-          <a:prstGeom prst="rect">
-            <a:avLst/>
-          </a:prstGeom>
-          <a:noFill/>
-        </p:spPr>
-        <p:txBody>
-          <a:bodyPr wrap="none" lIns="0" rIns="0" tIns="0" bIns="0">
-            <a:spAutoFit/>
-          </a:bodyPr>
-          <a:lstStyle/>
-          <a:p>
-            <a:r>
-              <a:rPr sz="2400" b="0">
-                <a:solidFill>
-                  <a:srgbClr val="2D3748"/>
-                </a:solidFill>
-                <a:latin typeface="Microsoft JhengHei"/>
-                <a:ea typeface="Microsoft JhengHei"/>
-              </a:rPr>
-              <a:t>LINE 官方班級社群 / 私訊留言</a:t>
-            </a:r>
-          </a:p>
-        </p:txBody>
-      </p:sp>
-      <p:sp>
-        <p:nvSpPr>
-          <p:cNvPr id="21" name="TextBox 20"/>
-          <p:cNvSpPr txBox="1"/>
-          <p:nvPr/>
-        </p:nvSpPr>
-        <p:spPr>
-          <a:xfrm>
-            <a:off x="6762749" y="3829050"/>
-            <a:ext cx="3518915" cy="342900"/>
-          </a:xfrm>
-          <a:prstGeom prst="rect">
-            <a:avLst/>
-          </a:prstGeom>
-          <a:noFill/>
-        </p:spPr>
-        <p:txBody>
-          <a:bodyPr wrap="none" lIns="0" rIns="0" tIns="0" bIns="0">
-            <a:spAutoFit/>
-          </a:bodyPr>
-          <a:lstStyle/>
-          <a:p>
-            <a:r>
-              <a:rPr sz="2700" b="1">
-                <a:solidFill>
-                  <a:srgbClr val="2C5E8A"/>
-                </a:solidFill>
-                <a:latin typeface="Microsoft JhengHei"/>
-                <a:ea typeface="Microsoft JhengHei"/>
-              </a:rPr>
-              <a:t>導師專線手機（緊急直撥）：</a:t>
-            </a:r>
-          </a:p>
-        </p:txBody>
-      </p:sp>
-      <p:sp>
-        <p:nvSpPr>
-          <p:cNvPr id="22" name="TextBox 21"/>
-          <p:cNvSpPr txBox="1"/>
-          <p:nvPr/>
-        </p:nvSpPr>
-        <p:spPr>
-          <a:xfrm>
-            <a:off x="6762749" y="4140200"/>
-            <a:ext cx="3945635" cy="419099"/>
-          </a:xfrm>
-          <a:prstGeom prst="rect">
-            <a:avLst/>
-          </a:prstGeom>
-          <a:noFill/>
-        </p:spPr>
-        <p:txBody>
-          <a:bodyPr wrap="none" lIns="0" rIns="0" tIns="0" bIns="0">
-            <a:spAutoFit/>
-          </a:bodyPr>
-          <a:lstStyle/>
-          <a:p>
-            <a:r>
-              <a:rPr sz="3300" b="1">
-                <a:solidFill>
-                  <a:srgbClr val="E88D67"/>
-                </a:solidFill>
-                <a:latin typeface="Microsoft JhengHei"/>
-                <a:ea typeface="Microsoft JhengHei"/>
-              </a:rPr>
-              <a:t>0963-159-896</a:t>
-            </a:r>
-          </a:p>
-        </p:txBody>
-      </p:sp>
-      <p:sp>
-        <p:nvSpPr>
-          <p:cNvPr id="23" name="TextBox 22"/>
-          <p:cNvSpPr txBox="1"/>
-          <p:nvPr/>
-        </p:nvSpPr>
-        <p:spPr>
-          <a:xfrm>
-            <a:off x="6762749" y="4654550"/>
-            <a:ext cx="3518915" cy="342900"/>
-          </a:xfrm>
-          <a:prstGeom prst="rect">
-            <a:avLst/>
-          </a:prstGeom>
-          <a:noFill/>
-        </p:spPr>
-        <p:txBody>
-          <a:bodyPr wrap="none" lIns="0" rIns="0" tIns="0" bIns="0">
-            <a:spAutoFit/>
-          </a:bodyPr>
-          <a:lstStyle/>
-          <a:p>
-            <a:r>
-              <a:rPr sz="2700" b="1">
-                <a:solidFill>
-                  <a:srgbClr val="2C5E8A"/>
-                </a:solidFill>
-                <a:latin typeface="Microsoft JhengHei"/>
-                <a:ea typeface="Microsoft JhengHei"/>
-              </a:rPr>
-              <a:t>學校總機（差勤請假專線）：</a:t>
-            </a:r>
-          </a:p>
-        </p:txBody>
-      </p:sp>
-      <p:sp>
-        <p:nvSpPr>
-          <p:cNvPr id="24" name="TextBox 23"/>
-          <p:cNvSpPr txBox="1"/>
-          <p:nvPr/>
-        </p:nvSpPr>
-        <p:spPr>
-          <a:xfrm>
-            <a:off x="6762749" y="4965700"/>
-            <a:ext cx="5292090" cy="304800"/>
-          </a:xfrm>
-          <a:prstGeom prst="rect">
-            <a:avLst/>
-          </a:prstGeom>
-          <a:noFill/>
-        </p:spPr>
-        <p:txBody>
-          <a:bodyPr wrap="none" lIns="0" rIns="0" tIns="0" bIns="0">
-            <a:spAutoFit/>
-          </a:bodyPr>
-          <a:lstStyle/>
-          <a:p>
-            <a:r>
-              <a:rPr sz="2400" b="0">
-                <a:solidFill>
-                  <a:srgbClr val="2D3748"/>
-                </a:solidFill>
-                <a:latin typeface="Microsoft JhengHei"/>
-                <a:ea typeface="Microsoft JhengHei"/>
-              </a:rPr>
-              <a:t>04-26567968（分機 720 / 724）</a:t>
+              <a:t>六年一班導師 高志賢 敬上</a:t>
             </a:r>
           </a:p>
         </p:txBody>
@@ -14931,7 +15107,7 @@
       <p:grpSpPr/>
       <p:pic>
         <p:nvPicPr>
-          <p:cNvPr id="2" name="Picture 1" descr="26-reminder.png"/>
+          <p:cNvPr id="2" name="Picture 1" descr="26-qa.png"/>
           <p:cNvPicPr>
             <a:picLocks noChangeAspect="1"/>
           </p:cNvPicPr>
@@ -15018,7 +15194,819 @@
                 <a:latin typeface="Microsoft JhengHei"/>
                 <a:ea typeface="Microsoft JhengHei"/>
               </a:rPr>
-              <a:t>PAGE 26 / 26</a:t>
+              <a:t>PAGE 26 / 27</a:t>
+            </a:r>
+          </a:p>
+        </p:txBody>
+      </p:sp>
+      <p:sp>
+        <p:nvSpPr>
+          <p:cNvPr id="5" name="TextBox 4"/>
+          <p:cNvSpPr txBox="1"/>
+          <p:nvPr/>
+        </p:nvSpPr>
+        <p:spPr>
+          <a:xfrm>
+            <a:off x="507999" y="717550"/>
+            <a:ext cx="5368035" cy="495299"/>
+          </a:xfrm>
+          <a:prstGeom prst="rect">
+            <a:avLst/>
+          </a:prstGeom>
+          <a:noFill/>
+        </p:spPr>
+        <p:txBody>
+          <a:bodyPr wrap="none" lIns="0" rIns="0" tIns="0" bIns="0">
+            <a:spAutoFit/>
+          </a:bodyPr>
+          <a:lstStyle/>
+          <a:p>
+            <a:r>
+              <a:rPr sz="3900" b="1">
+                <a:solidFill>
+                  <a:srgbClr val="2D3748"/>
+                </a:solidFill>
+                <a:latin typeface="Microsoft JhengHei"/>
+                <a:ea typeface="Microsoft JhengHei"/>
+              </a:rPr>
+              <a:t>感謝聆聽．交流時間（Q&amp;A）</a:t>
+            </a:r>
+          </a:p>
+        </p:txBody>
+      </p:sp>
+      <p:sp>
+        <p:nvSpPr>
+          <p:cNvPr id="6" name="TextBox 5"/>
+          <p:cNvSpPr txBox="1"/>
+          <p:nvPr/>
+        </p:nvSpPr>
+        <p:spPr>
+          <a:xfrm>
+            <a:off x="507999" y="1162050"/>
+            <a:ext cx="6477507" cy="247649"/>
+          </a:xfrm>
+          <a:prstGeom prst="rect">
+            <a:avLst/>
+          </a:prstGeom>
+          <a:noFill/>
+        </p:spPr>
+        <p:txBody>
+          <a:bodyPr wrap="none" lIns="0" rIns="0" tIns="0" bIns="0">
+            <a:spAutoFit/>
+          </a:bodyPr>
+          <a:lstStyle/>
+          <a:p>
+            <a:r>
+              <a:rPr sz="1950" b="0">
+                <a:solidFill>
+                  <a:srgbClr val="718096"/>
+                </a:solidFill>
+                <a:latin typeface="Microsoft JhengHei"/>
+                <a:ea typeface="Microsoft JhengHei"/>
+              </a:rPr>
+              <a:t>臺中市沙鹿區鹿陽國民小學 六年一班・讓我們一起成為孩子最好的神隊友！</a:t>
+            </a:r>
+          </a:p>
+        </p:txBody>
+      </p:sp>
+      <p:sp>
+        <p:nvSpPr>
+          <p:cNvPr id="7" name="TextBox 6"/>
+          <p:cNvSpPr txBox="1"/>
+          <p:nvPr/>
+        </p:nvSpPr>
+        <p:spPr>
+          <a:xfrm>
+            <a:off x="977899" y="1987550"/>
+            <a:ext cx="1385315" cy="266699"/>
+          </a:xfrm>
+          <a:prstGeom prst="rect">
+            <a:avLst/>
+          </a:prstGeom>
+          <a:noFill/>
+        </p:spPr>
+        <p:txBody>
+          <a:bodyPr wrap="none" lIns="0" rIns="0" tIns="0" bIns="0">
+            <a:spAutoFit/>
+          </a:bodyPr>
+          <a:lstStyle/>
+          <a:p>
+            <a:r>
+              <a:rPr sz="2100" b="1">
+                <a:solidFill>
+                  <a:srgbClr val="FFFFFF"/>
+                </a:solidFill>
+                <a:latin typeface="Microsoft JhengHei"/>
+                <a:ea typeface="Microsoft JhengHei"/>
+              </a:rPr>
+              <a:t>現場互動環節</a:t>
+            </a:r>
+          </a:p>
+        </p:txBody>
+      </p:sp>
+      <p:sp>
+        <p:nvSpPr>
+          <p:cNvPr id="8" name="TextBox 7"/>
+          <p:cNvSpPr txBox="1"/>
+          <p:nvPr/>
+        </p:nvSpPr>
+        <p:spPr>
+          <a:xfrm>
+            <a:off x="825499" y="2368550"/>
+            <a:ext cx="3134867" cy="438149"/>
+          </a:xfrm>
+          <a:prstGeom prst="rect">
+            <a:avLst/>
+          </a:prstGeom>
+          <a:noFill/>
+        </p:spPr>
+        <p:txBody>
+          <a:bodyPr wrap="none" lIns="0" rIns="0" tIns="0" bIns="0">
+            <a:spAutoFit/>
+          </a:bodyPr>
+          <a:lstStyle/>
+          <a:p>
+            <a:r>
+              <a:rPr sz="3450" b="1">
+                <a:solidFill>
+                  <a:srgbClr val="2C5E8A"/>
+                </a:solidFill>
+                <a:latin typeface="Microsoft JhengHei"/>
+                <a:ea typeface="Microsoft JhengHei"/>
+              </a:rPr>
+              <a:t>自由提問與意見分享</a:t>
+            </a:r>
+          </a:p>
+        </p:txBody>
+      </p:sp>
+      <p:sp>
+        <p:nvSpPr>
+          <p:cNvPr id="9" name="TextBox 8"/>
+          <p:cNvSpPr txBox="1"/>
+          <p:nvPr/>
+        </p:nvSpPr>
+        <p:spPr>
+          <a:xfrm>
+            <a:off x="1079499" y="2940050"/>
+            <a:ext cx="1641347" cy="323849"/>
+          </a:xfrm>
+          <a:prstGeom prst="rect">
+            <a:avLst/>
+          </a:prstGeom>
+          <a:noFill/>
+        </p:spPr>
+        <p:txBody>
+          <a:bodyPr wrap="none" lIns="0" rIns="0" tIns="0" bIns="0">
+            <a:spAutoFit/>
+          </a:bodyPr>
+          <a:lstStyle/>
+          <a:p>
+            <a:r>
+              <a:rPr sz="2550" b="1">
+                <a:solidFill>
+                  <a:srgbClr val="E88D67"/>
+                </a:solidFill>
+                <a:latin typeface="Microsoft JhengHei"/>
+                <a:ea typeface="Microsoft JhengHei"/>
+              </a:rPr>
+              <a:t>自由提問交流</a:t>
+            </a:r>
+          </a:p>
+        </p:txBody>
+      </p:sp>
+      <p:sp>
+        <p:nvSpPr>
+          <p:cNvPr id="10" name="TextBox 9"/>
+          <p:cNvSpPr txBox="1"/>
+          <p:nvPr/>
+        </p:nvSpPr>
+        <p:spPr>
+          <a:xfrm>
+            <a:off x="1079499" y="3232149"/>
+            <a:ext cx="4372355" cy="266699"/>
+          </a:xfrm>
+          <a:prstGeom prst="rect">
+            <a:avLst/>
+          </a:prstGeom>
+          <a:noFill/>
+        </p:spPr>
+        <p:txBody>
+          <a:bodyPr wrap="none" lIns="0" rIns="0" tIns="0" bIns="0">
+            <a:spAutoFit/>
+          </a:bodyPr>
+          <a:lstStyle/>
+          <a:p>
+            <a:r>
+              <a:rPr sz="2100" b="0">
+                <a:solidFill>
+                  <a:srgbClr val="2D3748"/>
+                </a:solidFill>
+                <a:latin typeface="Microsoft JhengHei"/>
+                <a:ea typeface="Microsoft JhengHei"/>
+              </a:rPr>
+              <a:t>對孩子學習、作息與常規有任何想法均可提出。</a:t>
+            </a:r>
+          </a:p>
+        </p:txBody>
+      </p:sp>
+      <p:sp>
+        <p:nvSpPr>
+          <p:cNvPr id="11" name="TextBox 10"/>
+          <p:cNvSpPr txBox="1"/>
+          <p:nvPr/>
+        </p:nvSpPr>
+        <p:spPr>
+          <a:xfrm>
+            <a:off x="1079499" y="3587749"/>
+            <a:ext cx="1641347" cy="323849"/>
+          </a:xfrm>
+          <a:prstGeom prst="rect">
+            <a:avLst/>
+          </a:prstGeom>
+          <a:noFill/>
+        </p:spPr>
+        <p:txBody>
+          <a:bodyPr wrap="none" lIns="0" rIns="0" tIns="0" bIns="0">
+            <a:spAutoFit/>
+          </a:bodyPr>
+          <a:lstStyle/>
+          <a:p>
+            <a:r>
+              <a:rPr sz="2550" b="1">
+                <a:solidFill>
+                  <a:srgbClr val="E88D67"/>
+                </a:solidFill>
+                <a:latin typeface="Microsoft JhengHei"/>
+                <a:ea typeface="Microsoft JhengHei"/>
+              </a:rPr>
+              <a:t>班親幹部推選</a:t>
+            </a:r>
+          </a:p>
+        </p:txBody>
+      </p:sp>
+      <p:sp>
+        <p:nvSpPr>
+          <p:cNvPr id="12" name="TextBox 11"/>
+          <p:cNvSpPr txBox="1"/>
+          <p:nvPr/>
+        </p:nvSpPr>
+        <p:spPr>
+          <a:xfrm>
+            <a:off x="1079499" y="3879850"/>
+            <a:ext cx="4969763" cy="266699"/>
+          </a:xfrm>
+          <a:prstGeom prst="rect">
+            <a:avLst/>
+          </a:prstGeom>
+          <a:noFill/>
+        </p:spPr>
+        <p:txBody>
+          <a:bodyPr wrap="none" lIns="0" rIns="0" tIns="0" bIns="0">
+            <a:spAutoFit/>
+          </a:bodyPr>
+          <a:lstStyle/>
+          <a:p>
+            <a:r>
+              <a:rPr sz="2100" b="0">
+                <a:solidFill>
+                  <a:srgbClr val="2D3748"/>
+                </a:solidFill>
+                <a:latin typeface="Microsoft JhengHei"/>
+                <a:ea typeface="Microsoft JhengHei"/>
+              </a:rPr>
+              <a:t>現場推選班親會「會長」與「總務」，共同把關經費。</a:t>
+            </a:r>
+          </a:p>
+        </p:txBody>
+      </p:sp>
+      <p:sp>
+        <p:nvSpPr>
+          <p:cNvPr id="13" name="TextBox 12"/>
+          <p:cNvSpPr txBox="1"/>
+          <p:nvPr/>
+        </p:nvSpPr>
+        <p:spPr>
+          <a:xfrm>
+            <a:off x="1079499" y="4235449"/>
+            <a:ext cx="1641347" cy="323849"/>
+          </a:xfrm>
+          <a:prstGeom prst="rect">
+            <a:avLst/>
+          </a:prstGeom>
+          <a:noFill/>
+        </p:spPr>
+        <p:txBody>
+          <a:bodyPr wrap="none" lIns="0" rIns="0" tIns="0" bIns="0">
+            <a:spAutoFit/>
+          </a:bodyPr>
+          <a:lstStyle/>
+          <a:p>
+            <a:r>
+              <a:rPr sz="2550" b="1">
+                <a:solidFill>
+                  <a:srgbClr val="E88D67"/>
+                </a:solidFill>
+                <a:latin typeface="Microsoft JhengHei"/>
+                <a:ea typeface="Microsoft JhengHei"/>
+              </a:rPr>
+              <a:t>畢業專案討論</a:t>
+            </a:r>
+          </a:p>
+        </p:txBody>
+      </p:sp>
+      <p:sp>
+        <p:nvSpPr>
+          <p:cNvPr id="14" name="TextBox 13"/>
+          <p:cNvSpPr txBox="1"/>
+          <p:nvPr/>
+        </p:nvSpPr>
+        <p:spPr>
+          <a:xfrm>
+            <a:off x="1079499" y="4527550"/>
+            <a:ext cx="4173219" cy="266699"/>
+          </a:xfrm>
+          <a:prstGeom prst="rect">
+            <a:avLst/>
+          </a:prstGeom>
+          <a:noFill/>
+        </p:spPr>
+        <p:txBody>
+          <a:bodyPr wrap="none" lIns="0" rIns="0" tIns="0" bIns="0">
+            <a:spAutoFit/>
+          </a:bodyPr>
+          <a:lstStyle/>
+          <a:p>
+            <a:r>
+              <a:rPr sz="2100" b="0">
+                <a:solidFill>
+                  <a:srgbClr val="2D3748"/>
+                </a:solidFill>
+                <a:latin typeface="Microsoft JhengHei"/>
+                <a:ea typeface="Microsoft JhengHei"/>
+              </a:rPr>
+              <a:t>畢業旅行期望、活動規劃與紀念冊製作交流。</a:t>
+            </a:r>
+          </a:p>
+        </p:txBody>
+      </p:sp>
+      <p:sp>
+        <p:nvSpPr>
+          <p:cNvPr id="15" name="TextBox 14"/>
+          <p:cNvSpPr txBox="1"/>
+          <p:nvPr/>
+        </p:nvSpPr>
+        <p:spPr>
+          <a:xfrm>
+            <a:off x="1079499" y="4883150"/>
+            <a:ext cx="1641347" cy="323849"/>
+          </a:xfrm>
+          <a:prstGeom prst="rect">
+            <a:avLst/>
+          </a:prstGeom>
+          <a:noFill/>
+        </p:spPr>
+        <p:txBody>
+          <a:bodyPr wrap="none" lIns="0" rIns="0" tIns="0" bIns="0">
+            <a:spAutoFit/>
+          </a:bodyPr>
+          <a:lstStyle/>
+          <a:p>
+            <a:r>
+              <a:rPr sz="2550" b="1">
+                <a:solidFill>
+                  <a:srgbClr val="E88D67"/>
+                </a:solidFill>
+                <a:latin typeface="Microsoft JhengHei"/>
+                <a:ea typeface="Microsoft JhengHei"/>
+              </a:rPr>
+              <a:t>填寫回饋表單</a:t>
+            </a:r>
+          </a:p>
+        </p:txBody>
+      </p:sp>
+      <p:sp>
+        <p:nvSpPr>
+          <p:cNvPr id="16" name="TextBox 15"/>
+          <p:cNvSpPr txBox="1"/>
+          <p:nvPr/>
+        </p:nvSpPr>
+        <p:spPr>
+          <a:xfrm>
+            <a:off x="1079499" y="5175250"/>
+            <a:ext cx="5368035" cy="266699"/>
+          </a:xfrm>
+          <a:prstGeom prst="rect">
+            <a:avLst/>
+          </a:prstGeom>
+          <a:noFill/>
+        </p:spPr>
+        <p:txBody>
+          <a:bodyPr wrap="none" lIns="0" rIns="0" tIns="0" bIns="0">
+            <a:spAutoFit/>
+          </a:bodyPr>
+          <a:lstStyle/>
+          <a:p>
+            <a:r>
+              <a:rPr sz="2100" b="0">
+                <a:solidFill>
+                  <a:srgbClr val="2D3748"/>
+                </a:solidFill>
+                <a:latin typeface="Microsoft JhengHei"/>
+                <a:ea typeface="Microsoft JhengHei"/>
+              </a:rPr>
+              <a:t>歡迎家長掃描 QR Code 或填寫紙本，提供建言。</a:t>
+            </a:r>
+          </a:p>
+        </p:txBody>
+      </p:sp>
+      <p:sp>
+        <p:nvSpPr>
+          <p:cNvPr id="17" name="TextBox 16"/>
+          <p:cNvSpPr txBox="1"/>
+          <p:nvPr/>
+        </p:nvSpPr>
+        <p:spPr>
+          <a:xfrm>
+            <a:off x="6629399" y="1987550"/>
+            <a:ext cx="1584451" cy="266699"/>
+          </a:xfrm>
+          <a:prstGeom prst="rect">
+            <a:avLst/>
+          </a:prstGeom>
+          <a:noFill/>
+        </p:spPr>
+        <p:txBody>
+          <a:bodyPr wrap="none" lIns="0" rIns="0" tIns="0" bIns="0">
+            <a:spAutoFit/>
+          </a:bodyPr>
+          <a:lstStyle/>
+          <a:p>
+            <a:r>
+              <a:rPr sz="2100" b="1">
+                <a:solidFill>
+                  <a:srgbClr val="FFFFFF"/>
+                </a:solidFill>
+                <a:latin typeface="Microsoft JhengHei"/>
+                <a:ea typeface="Microsoft JhengHei"/>
+              </a:rPr>
+              <a:t>親師聯繫總整理</a:t>
+            </a:r>
+          </a:p>
+        </p:txBody>
+      </p:sp>
+      <p:sp>
+        <p:nvSpPr>
+          <p:cNvPr id="18" name="TextBox 17"/>
+          <p:cNvSpPr txBox="1"/>
+          <p:nvPr/>
+        </p:nvSpPr>
+        <p:spPr>
+          <a:xfrm>
+            <a:off x="6476999" y="2368550"/>
+            <a:ext cx="3134867" cy="438149"/>
+          </a:xfrm>
+          <a:prstGeom prst="rect">
+            <a:avLst/>
+          </a:prstGeom>
+          <a:noFill/>
+        </p:spPr>
+        <p:txBody>
+          <a:bodyPr wrap="none" lIns="0" rIns="0" tIns="0" bIns="0">
+            <a:spAutoFit/>
+          </a:bodyPr>
+          <a:lstStyle/>
+          <a:p>
+            <a:r>
+              <a:rPr sz="3450" b="1">
+                <a:solidFill>
+                  <a:srgbClr val="58A47E"/>
+                </a:solidFill>
+                <a:latin typeface="Microsoft JhengHei"/>
+                <a:ea typeface="Microsoft JhengHei"/>
+              </a:rPr>
+              <a:t>陪伴孩子，隨時連線</a:t>
+            </a:r>
+          </a:p>
+        </p:txBody>
+      </p:sp>
+      <p:sp>
+        <p:nvSpPr>
+          <p:cNvPr id="19" name="TextBox 18"/>
+          <p:cNvSpPr txBox="1"/>
+          <p:nvPr/>
+        </p:nvSpPr>
+        <p:spPr>
+          <a:xfrm>
+            <a:off x="6762749" y="3003549"/>
+            <a:ext cx="1470659" cy="342900"/>
+          </a:xfrm>
+          <a:prstGeom prst="rect">
+            <a:avLst/>
+          </a:prstGeom>
+          <a:noFill/>
+        </p:spPr>
+        <p:txBody>
+          <a:bodyPr wrap="none" lIns="0" rIns="0" tIns="0" bIns="0">
+            <a:spAutoFit/>
+          </a:bodyPr>
+          <a:lstStyle/>
+          <a:p>
+            <a:r>
+              <a:rPr sz="2700" b="1">
+                <a:solidFill>
+                  <a:srgbClr val="2C5E8A"/>
+                </a:solidFill>
+                <a:latin typeface="Microsoft JhengHei"/>
+                <a:ea typeface="Microsoft JhengHei"/>
+              </a:rPr>
+              <a:t>平常溝通：</a:t>
+            </a:r>
+          </a:p>
+        </p:txBody>
+      </p:sp>
+      <p:sp>
+        <p:nvSpPr>
+          <p:cNvPr id="20" name="TextBox 19"/>
+          <p:cNvSpPr txBox="1"/>
+          <p:nvPr/>
+        </p:nvSpPr>
+        <p:spPr>
+          <a:xfrm>
+            <a:off x="6762749" y="3314700"/>
+            <a:ext cx="4287011" cy="304800"/>
+          </a:xfrm>
+          <a:prstGeom prst="rect">
+            <a:avLst/>
+          </a:prstGeom>
+          <a:noFill/>
+        </p:spPr>
+        <p:txBody>
+          <a:bodyPr wrap="none" lIns="0" rIns="0" tIns="0" bIns="0">
+            <a:spAutoFit/>
+          </a:bodyPr>
+          <a:lstStyle/>
+          <a:p>
+            <a:r>
+              <a:rPr sz="2400" b="0">
+                <a:solidFill>
+                  <a:srgbClr val="2D3748"/>
+                </a:solidFill>
+                <a:latin typeface="Microsoft JhengHei"/>
+                <a:ea typeface="Microsoft JhengHei"/>
+              </a:rPr>
+              <a:t>LINE 官方班級社群 / 私訊留言</a:t>
+            </a:r>
+          </a:p>
+        </p:txBody>
+      </p:sp>
+      <p:sp>
+        <p:nvSpPr>
+          <p:cNvPr id="21" name="TextBox 20"/>
+          <p:cNvSpPr txBox="1"/>
+          <p:nvPr/>
+        </p:nvSpPr>
+        <p:spPr>
+          <a:xfrm>
+            <a:off x="6762749" y="3829050"/>
+            <a:ext cx="3518915" cy="342900"/>
+          </a:xfrm>
+          <a:prstGeom prst="rect">
+            <a:avLst/>
+          </a:prstGeom>
+          <a:noFill/>
+        </p:spPr>
+        <p:txBody>
+          <a:bodyPr wrap="none" lIns="0" rIns="0" tIns="0" bIns="0">
+            <a:spAutoFit/>
+          </a:bodyPr>
+          <a:lstStyle/>
+          <a:p>
+            <a:r>
+              <a:rPr sz="2700" b="1">
+                <a:solidFill>
+                  <a:srgbClr val="2C5E8A"/>
+                </a:solidFill>
+                <a:latin typeface="Microsoft JhengHei"/>
+                <a:ea typeface="Microsoft JhengHei"/>
+              </a:rPr>
+              <a:t>導師專線手機（緊急直撥）：</a:t>
+            </a:r>
+          </a:p>
+        </p:txBody>
+      </p:sp>
+      <p:sp>
+        <p:nvSpPr>
+          <p:cNvPr id="22" name="TextBox 21"/>
+          <p:cNvSpPr txBox="1"/>
+          <p:nvPr/>
+        </p:nvSpPr>
+        <p:spPr>
+          <a:xfrm>
+            <a:off x="6762749" y="4140200"/>
+            <a:ext cx="3945635" cy="419099"/>
+          </a:xfrm>
+          <a:prstGeom prst="rect">
+            <a:avLst/>
+          </a:prstGeom>
+          <a:noFill/>
+        </p:spPr>
+        <p:txBody>
+          <a:bodyPr wrap="none" lIns="0" rIns="0" tIns="0" bIns="0">
+            <a:spAutoFit/>
+          </a:bodyPr>
+          <a:lstStyle/>
+          <a:p>
+            <a:r>
+              <a:rPr sz="3300" b="1">
+                <a:solidFill>
+                  <a:srgbClr val="E88D67"/>
+                </a:solidFill>
+                <a:latin typeface="Microsoft JhengHei"/>
+                <a:ea typeface="Microsoft JhengHei"/>
+              </a:rPr>
+              <a:t>0963-159-896</a:t>
+            </a:r>
+          </a:p>
+        </p:txBody>
+      </p:sp>
+      <p:sp>
+        <p:nvSpPr>
+          <p:cNvPr id="23" name="TextBox 22"/>
+          <p:cNvSpPr txBox="1"/>
+          <p:nvPr/>
+        </p:nvSpPr>
+        <p:spPr>
+          <a:xfrm>
+            <a:off x="6762749" y="4654550"/>
+            <a:ext cx="3518915" cy="342900"/>
+          </a:xfrm>
+          <a:prstGeom prst="rect">
+            <a:avLst/>
+          </a:prstGeom>
+          <a:noFill/>
+        </p:spPr>
+        <p:txBody>
+          <a:bodyPr wrap="none" lIns="0" rIns="0" tIns="0" bIns="0">
+            <a:spAutoFit/>
+          </a:bodyPr>
+          <a:lstStyle/>
+          <a:p>
+            <a:r>
+              <a:rPr sz="2700" b="1">
+                <a:solidFill>
+                  <a:srgbClr val="2C5E8A"/>
+                </a:solidFill>
+                <a:latin typeface="Microsoft JhengHei"/>
+                <a:ea typeface="Microsoft JhengHei"/>
+              </a:rPr>
+              <a:t>學校總機（差勤請假專線）：</a:t>
+            </a:r>
+          </a:p>
+        </p:txBody>
+      </p:sp>
+      <p:sp>
+        <p:nvSpPr>
+          <p:cNvPr id="24" name="TextBox 23"/>
+          <p:cNvSpPr txBox="1"/>
+          <p:nvPr/>
+        </p:nvSpPr>
+        <p:spPr>
+          <a:xfrm>
+            <a:off x="6762749" y="4965700"/>
+            <a:ext cx="5292090" cy="304800"/>
+          </a:xfrm>
+          <a:prstGeom prst="rect">
+            <a:avLst/>
+          </a:prstGeom>
+          <a:noFill/>
+        </p:spPr>
+        <p:txBody>
+          <a:bodyPr wrap="none" lIns="0" rIns="0" tIns="0" bIns="0">
+            <a:spAutoFit/>
+          </a:bodyPr>
+          <a:lstStyle/>
+          <a:p>
+            <a:r>
+              <a:rPr sz="2400" b="0">
+                <a:solidFill>
+                  <a:srgbClr val="2D3748"/>
+                </a:solidFill>
+                <a:latin typeface="Microsoft JhengHei"/>
+                <a:ea typeface="Microsoft JhengHei"/>
+              </a:rPr>
+              <a:t>04-26567968（分機 720 / 724）</a:t>
+            </a:r>
+          </a:p>
+        </p:txBody>
+      </p:sp>
+    </p:spTree>
+  </p:cSld>
+  <p:clrMapOvr>
+    <a:masterClrMapping/>
+  </p:clrMapOvr>
+</p:sld>
+</file>
+
+<file path=ppt/slides/slide27.xml><?xml version="1.0" encoding="utf-8"?>
+<p:sld xmlns:a="http://schemas.openxmlformats.org/drawingml/2006/main" xmlns:p="http://schemas.openxmlformats.org/presentationml/2006/main" xmlns:r="http://schemas.openxmlformats.org/officeDocument/2006/relationships">
+  <p:cSld>
+    <p:spTree>
+      <p:nvGrpSpPr>
+        <p:cNvPr id="1" name=""/>
+        <p:cNvGrpSpPr/>
+        <p:nvPr/>
+      </p:nvGrpSpPr>
+      <p:grpSpPr/>
+      <p:pic>
+        <p:nvPicPr>
+          <p:cNvPr id="2" name="Picture 1" descr="27-reminder.png"/>
+          <p:cNvPicPr>
+            <a:picLocks noChangeAspect="1"/>
+          </p:cNvPicPr>
+          <p:nvPr/>
+        </p:nvPicPr>
+        <p:blipFill>
+          <a:blip r:embed="rId2"/>
+          <a:stretch>
+            <a:fillRect/>
+          </a:stretch>
+        </p:blipFill>
+        <p:spPr>
+          <a:xfrm>
+            <a:off x="0" y="0"/>
+            <a:ext cx="12191999" cy="6858000"/>
+          </a:xfrm>
+          <a:prstGeom prst="rect">
+            <a:avLst/>
+          </a:prstGeom>
+        </p:spPr>
+      </p:pic>
+      <p:sp>
+        <p:nvSpPr>
+          <p:cNvPr id="3" name="TextBox 2"/>
+          <p:cNvSpPr txBox="1"/>
+          <p:nvPr/>
+        </p:nvSpPr>
+        <p:spPr>
+          <a:xfrm>
+            <a:off x="660399" y="336550"/>
+            <a:ext cx="3476243" cy="209549"/>
+          </a:xfrm>
+          <a:prstGeom prst="rect">
+            <a:avLst/>
+          </a:prstGeom>
+          <a:noFill/>
+        </p:spPr>
+        <p:txBody>
+          <a:bodyPr wrap="none" lIns="0" rIns="0" tIns="0" bIns="0">
+            <a:spAutoFit/>
+          </a:bodyPr>
+          <a:lstStyle/>
+          <a:p>
+            <a:r>
+              <a:rPr sz="1650" b="1">
+                <a:solidFill>
+                  <a:srgbClr val="FFFFFF"/>
+                </a:solidFill>
+                <a:latin typeface="Microsoft JhengHei"/>
+                <a:ea typeface="Microsoft JhengHei"/>
+              </a:rPr>
+              <a:t>臺中市沙鹿區鹿陽國民小學 六年一班 班親會</a:t>
+            </a:r>
+          </a:p>
+        </p:txBody>
+      </p:sp>
+      <p:sp>
+        <p:nvSpPr>
+          <p:cNvPr id="4" name="TextBox 3"/>
+          <p:cNvSpPr txBox="1"/>
+          <p:nvPr/>
+        </p:nvSpPr>
+        <p:spPr>
+          <a:xfrm>
+            <a:off x="10477499" y="317500"/>
+            <a:ext cx="1577340" cy="247649"/>
+          </a:xfrm>
+          <a:prstGeom prst="rect">
+            <a:avLst/>
+          </a:prstGeom>
+          <a:noFill/>
+        </p:spPr>
+        <p:txBody>
+          <a:bodyPr wrap="none" lIns="0" rIns="0" tIns="0" bIns="0">
+            <a:spAutoFit/>
+          </a:bodyPr>
+          <a:lstStyle/>
+          <a:p>
+            <a:r>
+              <a:rPr sz="1950" b="1">
+                <a:solidFill>
+                  <a:srgbClr val="718096"/>
+                </a:solidFill>
+                <a:latin typeface="Microsoft JhengHei"/>
+                <a:ea typeface="Microsoft JhengHei"/>
+              </a:rPr>
+              <a:t>PAGE 27 / 27</a:t>
             </a:r>
           </a:p>
         </p:txBody>
@@ -16005,7 +16993,7 @@
                 <a:latin typeface="Microsoft JhengHei"/>
                 <a:ea typeface="Microsoft JhengHei"/>
               </a:rPr>
-              <a:t>PAGE 03 / 26</a:t>
+              <a:t>PAGE 03 / 27</a:t>
             </a:r>
           </a:p>
         </p:txBody>
@@ -16502,7 +17490,7 @@
                 <a:latin typeface="Microsoft JhengHei"/>
                 <a:ea typeface="Microsoft JhengHei"/>
               </a:rPr>
-              <a:t>PAGE 04 / 26</a:t>
+              <a:t>PAGE 04 / 27</a:t>
             </a:r>
           </a:p>
         </p:txBody>
@@ -16894,7 +17882,7 @@
                 <a:latin typeface="Microsoft JhengHei"/>
                 <a:ea typeface="Microsoft JhengHei"/>
               </a:rPr>
-              <a:t>PAGE 05 / 26</a:t>
+              <a:t>PAGE 05 / 27</a:t>
             </a:r>
           </a:p>
         </p:txBody>
@@ -17601,7 +18589,7 @@
                 <a:latin typeface="Microsoft JhengHei"/>
                 <a:ea typeface="Microsoft JhengHei"/>
               </a:rPr>
-              <a:t>PAGE 06 / 26</a:t>
+              <a:t>PAGE 06 / 27</a:t>
             </a:r>
           </a:p>
         </p:txBody>
@@ -18063,7 +19051,7 @@
                 <a:latin typeface="Microsoft JhengHei"/>
                 <a:ea typeface="Microsoft JhengHei"/>
               </a:rPr>
-              <a:t>PAGE 07 / 26</a:t>
+              <a:t>PAGE 07 / 27</a:t>
             </a:r>
           </a:p>
         </p:txBody>
@@ -18945,7 +19933,7 @@
                 <a:latin typeface="Microsoft JhengHei"/>
                 <a:ea typeface="Microsoft JhengHei"/>
               </a:rPr>
-              <a:t>PAGE 08 / 26</a:t>
+              <a:t>PAGE 08 / 27</a:t>
             </a:r>
           </a:p>
         </p:txBody>
@@ -19967,7 +20955,7 @@
                 <a:latin typeface="Microsoft JhengHei"/>
                 <a:ea typeface="Microsoft JhengHei"/>
               </a:rPr>
-              <a:t>PAGE 09 / 26</a:t>
+              <a:t>PAGE 09 / 27</a:t>
             </a:r>
           </a:p>
         </p:txBody>

--- a/六年一班班親會_全套簡報.pptx
+++ b/六年一班班親會_全套簡報.pptx
@@ -3419,6 +3419,181 @@
           </a:p>
         </p:txBody>
       </p:sp>
+      <p:sp>
+        <p:nvSpPr>
+          <p:cNvPr id="11" name="TextBox 10"/>
+          <p:cNvSpPr txBox="1"/>
+          <p:nvPr/>
+        </p:nvSpPr>
+        <p:spPr>
+          <a:xfrm>
+            <a:off x="9277349" y="1549400"/>
+            <a:ext cx="1129283" cy="209549"/>
+          </a:xfrm>
+          <a:prstGeom prst="rect">
+            <a:avLst/>
+          </a:prstGeom>
+          <a:noFill/>
+        </p:spPr>
+        <p:txBody>
+          <a:bodyPr wrap="none" lIns="0" rIns="0" tIns="0" bIns="0">
+            <a:spAutoFit/>
+          </a:bodyPr>
+          <a:lstStyle/>
+          <a:p>
+            <a:r>
+              <a:rPr sz="1650" b="1">
+                <a:solidFill>
+                  <a:srgbClr val="FFFFFF"/>
+                </a:solidFill>
+                <a:latin typeface="Microsoft JhengHei"/>
+                <a:ea typeface="Microsoft JhengHei"/>
+              </a:rPr>
+              <a:t>班親專屬網站</a:t>
+            </a:r>
+          </a:p>
+        </p:txBody>
+      </p:sp>
+      <p:sp>
+        <p:nvSpPr>
+          <p:cNvPr id="12" name="TextBox 11"/>
+          <p:cNvSpPr txBox="1"/>
+          <p:nvPr/>
+        </p:nvSpPr>
+        <p:spPr>
+          <a:xfrm>
+            <a:off x="9175749" y="1828800"/>
+            <a:ext cx="2011171" cy="304800"/>
+          </a:xfrm>
+          <a:prstGeom prst="rect">
+            <a:avLst/>
+          </a:prstGeom>
+          <a:noFill/>
+        </p:spPr>
+        <p:txBody>
+          <a:bodyPr wrap="none" lIns="0" rIns="0" tIns="0" bIns="0">
+            <a:spAutoFit/>
+          </a:bodyPr>
+          <a:lstStyle/>
+          <a:p>
+            <a:r>
+              <a:rPr sz="2400" b="1">
+                <a:solidFill>
+                  <a:srgbClr val="2C5E8A"/>
+                </a:solidFill>
+                <a:latin typeface="Microsoft JhengHei"/>
+                <a:ea typeface="Microsoft JhengHei"/>
+              </a:rPr>
+              <a:t>掃描開啟班親手冊</a:t>
+            </a:r>
+          </a:p>
+        </p:txBody>
+      </p:sp>
+      <p:sp>
+        <p:nvSpPr>
+          <p:cNvPr id="13" name="TextBox 12"/>
+          <p:cNvSpPr txBox="1"/>
+          <p:nvPr/>
+        </p:nvSpPr>
+        <p:spPr>
+          <a:xfrm>
+            <a:off x="9175749" y="2114550"/>
+            <a:ext cx="2039619" cy="190500"/>
+          </a:xfrm>
+          <a:prstGeom prst="rect">
+            <a:avLst/>
+          </a:prstGeom>
+          <a:noFill/>
+        </p:spPr>
+        <p:txBody>
+          <a:bodyPr wrap="none" lIns="0" rIns="0" tIns="0" bIns="0">
+            <a:spAutoFit/>
+          </a:bodyPr>
+          <a:lstStyle/>
+          <a:p>
+            <a:r>
+              <a:rPr sz="1500" b="0">
+                <a:solidFill>
+                  <a:srgbClr val="718096"/>
+                </a:solidFill>
+                <a:latin typeface="Microsoft JhengHei"/>
+                <a:ea typeface="Microsoft JhengHei"/>
+              </a:rPr>
+              <a:t>現場免抄筆記・線上同步瀏覽</a:t>
+            </a:r>
+          </a:p>
+        </p:txBody>
+      </p:sp>
+      <p:sp>
+        <p:nvSpPr>
+          <p:cNvPr id="14" name="TextBox 13"/>
+          <p:cNvSpPr txBox="1"/>
+          <p:nvPr/>
+        </p:nvSpPr>
+        <p:spPr>
+          <a:xfrm>
+            <a:off x="9207499" y="3987799"/>
+            <a:ext cx="2847340" cy="152400"/>
+          </a:xfrm>
+          <a:prstGeom prst="rect">
+            <a:avLst/>
+          </a:prstGeom>
+          <a:noFill/>
+        </p:spPr>
+        <p:txBody>
+          <a:bodyPr wrap="none" lIns="0" rIns="0" tIns="0" bIns="0">
+            <a:spAutoFit/>
+          </a:bodyPr>
+          <a:lstStyle/>
+          <a:p>
+            <a:r>
+              <a:rPr sz="1200" b="0">
+                <a:solidFill>
+                  <a:srgbClr val="718096"/>
+                </a:solidFill>
+                <a:latin typeface="Microsoft JhengHei"/>
+                <a:ea typeface="Microsoft JhengHei"/>
+              </a:rPr>
+              <a:t>網址：clive520.github.io/parent-meeting</a:t>
+            </a:r>
+          </a:p>
+        </p:txBody>
+      </p:sp>
+      <p:sp>
+        <p:nvSpPr>
+          <p:cNvPr id="15" name="TextBox 14"/>
+          <p:cNvSpPr txBox="1"/>
+          <p:nvPr/>
+        </p:nvSpPr>
+        <p:spPr>
+          <a:xfrm>
+            <a:off x="9372599" y="4216400"/>
+            <a:ext cx="1726691" cy="171450"/>
+          </a:xfrm>
+          <a:prstGeom prst="rect">
+            <a:avLst/>
+          </a:prstGeom>
+          <a:noFill/>
+        </p:spPr>
+        <p:txBody>
+          <a:bodyPr wrap="none" lIns="0" rIns="0" tIns="0" bIns="0">
+            <a:spAutoFit/>
+          </a:bodyPr>
+          <a:lstStyle/>
+          <a:p>
+            <a:r>
+              <a:rPr sz="1350" b="1">
+                <a:solidFill>
+                  <a:srgbClr val="2C5E8A"/>
+                </a:solidFill>
+                <a:latin typeface="Microsoft JhengHei"/>
+                <a:ea typeface="Microsoft JhengHei"/>
+              </a:rPr>
+              <a:t>免排隊零等待・全彩隨身看</a:t>
+            </a:r>
+          </a:p>
+        </p:txBody>
+      </p:sp>
     </p:spTree>
   </p:cSld>
   <p:clrMapOvr>
@@ -17694,7 +17869,7 @@
                 <a:latin typeface="Microsoft JhengHei"/>
                 <a:ea typeface="Microsoft JhengHei"/>
               </a:rPr>
-              <a:t>感謝各位家長熱情參與・離席前請協助確認完成以下三項核心要事</a:t>
+              <a:t>感謝各位家長熱情參與・離席前請協助確認完成以下三大核心要事</a:t>
             </a:r>
           </a:p>
         </p:txBody>
@@ -17707,22 +17882,22 @@
         </p:nvSpPr>
         <p:spPr>
           <a:xfrm>
-            <a:off x="850899" y="1892299"/>
-            <a:ext cx="1484883" cy="247649"/>
-          </a:xfrm>
-          <a:prstGeom prst="rect">
-            <a:avLst/>
-          </a:prstGeom>
-          <a:noFill/>
-        </p:spPr>
-        <p:txBody>
-          <a:bodyPr wrap="none" lIns="0" rIns="0" tIns="0" bIns="0">
-            <a:spAutoFit/>
-          </a:bodyPr>
-          <a:lstStyle/>
-          <a:p>
-            <a:r>
-              <a:rPr sz="1950" b="1">
+            <a:off x="787399" y="1860550"/>
+            <a:ext cx="1385315" cy="228600"/>
+          </a:xfrm>
+          <a:prstGeom prst="rect">
+            <a:avLst/>
+          </a:prstGeom>
+          <a:noFill/>
+        </p:spPr>
+        <p:txBody>
+          <a:bodyPr wrap="none" lIns="0" rIns="0" tIns="0" bIns="0">
+            <a:spAutoFit/>
+          </a:bodyPr>
+          <a:lstStyle/>
+          <a:p>
+            <a:r>
+              <a:rPr sz="1800" b="1">
                 <a:solidFill>
                   <a:srgbClr val="FFFFFF"/>
                 </a:solidFill>
@@ -17742,22 +17917,22 @@
         </p:nvSpPr>
         <p:spPr>
           <a:xfrm>
-            <a:off x="698499" y="2273300"/>
-            <a:ext cx="1812035" cy="361950"/>
-          </a:xfrm>
-          <a:prstGeom prst="rect">
-            <a:avLst/>
-          </a:prstGeom>
-          <a:noFill/>
-        </p:spPr>
-        <p:txBody>
-          <a:bodyPr wrap="none" lIns="0" rIns="0" tIns="0" bIns="0">
-            <a:spAutoFit/>
-          </a:bodyPr>
-          <a:lstStyle/>
-          <a:p>
-            <a:r>
-              <a:rPr sz="2850" b="1">
+            <a:off x="634999" y="2209800"/>
+            <a:ext cx="1641347" cy="323849"/>
+          </a:xfrm>
+          <a:prstGeom prst="rect">
+            <a:avLst/>
+          </a:prstGeom>
+          <a:noFill/>
+        </p:spPr>
+        <p:txBody>
+          <a:bodyPr wrap="none" lIns="0" rIns="0" tIns="0" bIns="0">
+            <a:spAutoFit/>
+          </a:bodyPr>
+          <a:lstStyle/>
+          <a:p>
+            <a:r>
+              <a:rPr sz="2550" b="1">
                 <a:solidFill>
                   <a:srgbClr val="2C5E8A"/>
                 </a:solidFill>
@@ -17777,22 +17952,22 @@
         </p:nvSpPr>
         <p:spPr>
           <a:xfrm>
-            <a:off x="787399" y="2679700"/>
-            <a:ext cx="1470659" cy="190500"/>
-          </a:xfrm>
-          <a:prstGeom prst="rect">
-            <a:avLst/>
-          </a:prstGeom>
-          <a:noFill/>
-        </p:spPr>
-        <p:txBody>
-          <a:bodyPr wrap="none" lIns="0" rIns="0" tIns="0" bIns="0">
-            <a:spAutoFit/>
-          </a:bodyPr>
-          <a:lstStyle/>
-          <a:p>
-            <a:r>
-              <a:rPr sz="1500" b="1">
+            <a:off x="711199" y="2616200"/>
+            <a:ext cx="1406651" cy="180975"/>
+          </a:xfrm>
+          <a:prstGeom prst="rect">
+            <a:avLst/>
+          </a:prstGeom>
+          <a:noFill/>
+        </p:spPr>
+        <p:txBody>
+          <a:bodyPr wrap="none" lIns="0" rIns="0" tIns="0" bIns="0">
+            <a:spAutoFit/>
+          </a:bodyPr>
+          <a:lstStyle/>
+          <a:p>
+            <a:r>
+              <a:rPr sz="1425" b="1">
                 <a:solidFill>
                   <a:srgbClr val="2C5E8A"/>
                 </a:solidFill>
@@ -17812,22 +17987,22 @@
         </p:nvSpPr>
         <p:spPr>
           <a:xfrm>
-            <a:off x="920749" y="3067050"/>
-            <a:ext cx="1854707" cy="247649"/>
-          </a:xfrm>
-          <a:prstGeom prst="rect">
-            <a:avLst/>
-          </a:prstGeom>
-          <a:noFill/>
-        </p:spPr>
-        <p:txBody>
-          <a:bodyPr wrap="none" lIns="0" rIns="0" tIns="0" bIns="0">
-            <a:spAutoFit/>
-          </a:bodyPr>
-          <a:lstStyle/>
-          <a:p>
-            <a:r>
-              <a:rPr sz="1950" b="1">
+            <a:off x="793749" y="3003549"/>
+            <a:ext cx="1726691" cy="228600"/>
+          </a:xfrm>
+          <a:prstGeom prst="rect">
+            <a:avLst/>
+          </a:prstGeom>
+          <a:noFill/>
+        </p:spPr>
+        <p:txBody>
+          <a:bodyPr wrap="none" lIns="0" rIns="0" tIns="0" bIns="0">
+            <a:spAutoFit/>
+          </a:bodyPr>
+          <a:lstStyle/>
+          <a:p>
+            <a:r>
+              <a:rPr sz="1800" b="1">
                 <a:solidFill>
                   <a:srgbClr val="2D3748"/>
                 </a:solidFill>
@@ -17847,22 +18022,22 @@
         </p:nvSpPr>
         <p:spPr>
           <a:xfrm>
-            <a:off x="920749" y="3511550"/>
-            <a:ext cx="1669795" cy="247649"/>
-          </a:xfrm>
-          <a:prstGeom prst="rect">
-            <a:avLst/>
-          </a:prstGeom>
-          <a:noFill/>
-        </p:spPr>
-        <p:txBody>
-          <a:bodyPr wrap="none" lIns="0" rIns="0" tIns="0" bIns="0">
-            <a:spAutoFit/>
-          </a:bodyPr>
-          <a:lstStyle/>
-          <a:p>
-            <a:r>
-              <a:rPr sz="1950" b="1">
+            <a:off x="793749" y="3460749"/>
+            <a:ext cx="1556003" cy="228600"/>
+          </a:xfrm>
+          <a:prstGeom prst="rect">
+            <a:avLst/>
+          </a:prstGeom>
+          <a:noFill/>
+        </p:spPr>
+        <p:txBody>
+          <a:bodyPr wrap="none" lIns="0" rIns="0" tIns="0" bIns="0">
+            <a:spAutoFit/>
+          </a:bodyPr>
+          <a:lstStyle/>
+          <a:p>
+            <a:r>
+              <a:rPr sz="1800" b="1">
                 <a:solidFill>
                   <a:srgbClr val="2D3748"/>
                 </a:solidFill>
@@ -17882,29 +18057,29 @@
         </p:nvSpPr>
         <p:spPr>
           <a:xfrm>
-            <a:off x="920749" y="3956049"/>
-            <a:ext cx="2039619" cy="247649"/>
-          </a:xfrm>
-          <a:prstGeom prst="rect">
-            <a:avLst/>
-          </a:prstGeom>
-          <a:noFill/>
-        </p:spPr>
-        <p:txBody>
-          <a:bodyPr wrap="none" lIns="0" rIns="0" tIns="0" bIns="0">
-            <a:spAutoFit/>
-          </a:bodyPr>
-          <a:lstStyle/>
-          <a:p>
-            <a:r>
-              <a:rPr sz="1950" b="1">
-                <a:solidFill>
-                  <a:srgbClr val="2D3748"/>
-                </a:solidFill>
-                <a:latin typeface="Microsoft JhengHei"/>
-                <a:ea typeface="Microsoft JhengHei"/>
-              </a:rPr>
-              <a:t>領取各處室書面通知單</a:t>
+            <a:off x="793749" y="3917950"/>
+            <a:ext cx="1556003" cy="228600"/>
+          </a:xfrm>
+          <a:prstGeom prst="rect">
+            <a:avLst/>
+          </a:prstGeom>
+          <a:noFill/>
+        </p:spPr>
+        <p:txBody>
+          <a:bodyPr wrap="none" lIns="0" rIns="0" tIns="0" bIns="0">
+            <a:spAutoFit/>
+          </a:bodyPr>
+          <a:lstStyle/>
+          <a:p>
+            <a:r>
+              <a:rPr sz="1800" b="1">
+                <a:solidFill>
+                  <a:srgbClr val="2D3748"/>
+                </a:solidFill>
+                <a:latin typeface="Microsoft JhengHei"/>
+                <a:ea typeface="Microsoft JhengHei"/>
+              </a:rPr>
+              <a:t>領取各處室通知單</a:t>
             </a:r>
           </a:p>
         </p:txBody>
@@ -17917,29 +18092,29 @@
         </p:nvSpPr>
         <p:spPr>
           <a:xfrm>
-            <a:off x="920749" y="4400550"/>
-            <a:ext cx="2039619" cy="247649"/>
-          </a:xfrm>
-          <a:prstGeom prst="rect">
-            <a:avLst/>
-          </a:prstGeom>
-          <a:noFill/>
-        </p:spPr>
-        <p:txBody>
-          <a:bodyPr wrap="none" lIns="0" rIns="0" tIns="0" bIns="0">
-            <a:spAutoFit/>
-          </a:bodyPr>
-          <a:lstStyle/>
-          <a:p>
-            <a:r>
-              <a:rPr sz="1950" b="1">
-                <a:solidFill>
-                  <a:srgbClr val="2D3748"/>
-                </a:solidFill>
-                <a:latin typeface="Microsoft JhengHei"/>
-                <a:ea typeface="Microsoft JhengHei"/>
-              </a:rPr>
-              <a:t>確保親師通訊管道暢通</a:t>
+            <a:off x="793749" y="4375150"/>
+            <a:ext cx="1556003" cy="228600"/>
+          </a:xfrm>
+          <a:prstGeom prst="rect">
+            <a:avLst/>
+          </a:prstGeom>
+          <a:noFill/>
+        </p:spPr>
+        <p:txBody>
+          <a:bodyPr wrap="none" lIns="0" rIns="0" tIns="0" bIns="0">
+            <a:spAutoFit/>
+          </a:bodyPr>
+          <a:lstStyle/>
+          <a:p>
+            <a:r>
+              <a:rPr sz="1800" b="1">
+                <a:solidFill>
+                  <a:srgbClr val="2D3748"/>
+                </a:solidFill>
+                <a:latin typeface="Microsoft JhengHei"/>
+                <a:ea typeface="Microsoft JhengHei"/>
+              </a:rPr>
+              <a:t>確保通訊管道暢通</a:t>
             </a:r>
           </a:p>
         </p:txBody>
@@ -17952,22 +18127,22 @@
         </p:nvSpPr>
         <p:spPr>
           <a:xfrm>
-            <a:off x="4724399" y="1892299"/>
-            <a:ext cx="1484883" cy="247649"/>
-          </a:xfrm>
-          <a:prstGeom prst="rect">
-            <a:avLst/>
-          </a:prstGeom>
-          <a:noFill/>
-        </p:spPr>
-        <p:txBody>
-          <a:bodyPr wrap="none" lIns="0" rIns="0" tIns="0" bIns="0">
-            <a:spAutoFit/>
-          </a:bodyPr>
-          <a:lstStyle/>
-          <a:p>
-            <a:r>
-              <a:rPr sz="1950" b="1">
+            <a:off x="3613149" y="1860550"/>
+            <a:ext cx="1385315" cy="228600"/>
+          </a:xfrm>
+          <a:prstGeom prst="rect">
+            <a:avLst/>
+          </a:prstGeom>
+          <a:noFill/>
+        </p:spPr>
+        <p:txBody>
+          <a:bodyPr wrap="none" lIns="0" rIns="0" tIns="0" bIns="0">
+            <a:spAutoFit/>
+          </a:bodyPr>
+          <a:lstStyle/>
+          <a:p>
+            <a:r>
+              <a:rPr sz="1800" b="1">
                 <a:solidFill>
                   <a:srgbClr val="FFFFFF"/>
                 </a:solidFill>
@@ -17987,22 +18162,22 @@
         </p:nvSpPr>
         <p:spPr>
           <a:xfrm>
-            <a:off x="4571999" y="2273300"/>
-            <a:ext cx="2082291" cy="361950"/>
-          </a:xfrm>
-          <a:prstGeom prst="rect">
-            <a:avLst/>
-          </a:prstGeom>
-          <a:noFill/>
-        </p:spPr>
-        <p:txBody>
-          <a:bodyPr wrap="none" lIns="0" rIns="0" tIns="0" bIns="0">
-            <a:spAutoFit/>
-          </a:bodyPr>
-          <a:lstStyle/>
-          <a:p>
-            <a:r>
-              <a:rPr sz="2850" b="1">
+            <a:off x="3460749" y="2209800"/>
+            <a:ext cx="1883155" cy="323849"/>
+          </a:xfrm>
+          <a:prstGeom prst="rect">
+            <a:avLst/>
+          </a:prstGeom>
+          <a:noFill/>
+        </p:spPr>
+        <p:txBody>
+          <a:bodyPr wrap="none" lIns="0" rIns="0" tIns="0" bIns="0">
+            <a:spAutoFit/>
+          </a:bodyPr>
+          <a:lstStyle/>
+          <a:p>
+            <a:r>
+              <a:rPr sz="2550" b="1">
                 <a:solidFill>
                   <a:srgbClr val="E88D67"/>
                 </a:solidFill>
@@ -18022,22 +18197,22 @@
         </p:nvSpPr>
         <p:spPr>
           <a:xfrm>
-            <a:off x="4660899" y="2679700"/>
-            <a:ext cx="1328419" cy="190500"/>
-          </a:xfrm>
-          <a:prstGeom prst="rect">
-            <a:avLst/>
-          </a:prstGeom>
-          <a:noFill/>
-        </p:spPr>
-        <p:txBody>
-          <a:bodyPr wrap="none" lIns="0" rIns="0" tIns="0" bIns="0">
-            <a:spAutoFit/>
-          </a:bodyPr>
-          <a:lstStyle/>
-          <a:p>
-            <a:r>
-              <a:rPr sz="1500" b="1">
+            <a:off x="3536949" y="2616200"/>
+            <a:ext cx="1271523" cy="180975"/>
+          </a:xfrm>
+          <a:prstGeom prst="rect">
+            <a:avLst/>
+          </a:prstGeom>
+          <a:noFill/>
+        </p:spPr>
+        <p:txBody>
+          <a:bodyPr wrap="none" lIns="0" rIns="0" tIns="0" bIns="0">
+            <a:spAutoFit/>
+          </a:bodyPr>
+          <a:lstStyle/>
+          <a:p>
+            <a:r>
+              <a:rPr sz="1425" b="1">
                 <a:solidFill>
                   <a:srgbClr val="E88D67"/>
                 </a:solidFill>
@@ -18057,29 +18232,29 @@
         </p:nvSpPr>
         <p:spPr>
           <a:xfrm>
-            <a:off x="4794249" y="3067050"/>
-            <a:ext cx="2779267" cy="247649"/>
-          </a:xfrm>
-          <a:prstGeom prst="rect">
-            <a:avLst/>
-          </a:prstGeom>
-          <a:noFill/>
-        </p:spPr>
-        <p:txBody>
-          <a:bodyPr wrap="none" lIns="0" rIns="0" tIns="0" bIns="0">
-            <a:spAutoFit/>
-          </a:bodyPr>
-          <a:lstStyle/>
-          <a:p>
-            <a:r>
-              <a:rPr sz="1950" b="1">
-                <a:solidFill>
-                  <a:srgbClr val="2D3748"/>
-                </a:solidFill>
-                <a:latin typeface="Microsoft JhengHei"/>
-                <a:ea typeface="Microsoft JhengHei"/>
-              </a:rPr>
-              <a:t>推選確認 601「班親會長」</a:t>
+            <a:off x="3619499" y="3003549"/>
+            <a:ext cx="2238755" cy="228600"/>
+          </a:xfrm>
+          <a:prstGeom prst="rect">
+            <a:avLst/>
+          </a:prstGeom>
+          <a:noFill/>
+        </p:spPr>
+        <p:txBody>
+          <a:bodyPr wrap="none" lIns="0" rIns="0" tIns="0" bIns="0">
+            <a:spAutoFit/>
+          </a:bodyPr>
+          <a:lstStyle/>
+          <a:p>
+            <a:r>
+              <a:rPr sz="1800" b="1">
+                <a:solidFill>
+                  <a:srgbClr val="2D3748"/>
+                </a:solidFill>
+                <a:latin typeface="Microsoft JhengHei"/>
+                <a:ea typeface="Microsoft JhengHei"/>
+              </a:rPr>
+              <a:t>推選確認 601「會長」</a:t>
             </a:r>
           </a:p>
         </p:txBody>
@@ -18092,29 +18267,29 @@
         </p:nvSpPr>
         <p:spPr>
           <a:xfrm>
-            <a:off x="4794249" y="3511550"/>
-            <a:ext cx="2409443" cy="247649"/>
-          </a:xfrm>
-          <a:prstGeom prst="rect">
-            <a:avLst/>
-          </a:prstGeom>
-          <a:noFill/>
-        </p:spPr>
-        <p:txBody>
-          <a:bodyPr wrap="none" lIns="0" rIns="0" tIns="0" bIns="0">
-            <a:spAutoFit/>
-          </a:bodyPr>
-          <a:lstStyle/>
-          <a:p>
-            <a:r>
-              <a:rPr sz="1950" b="1">
-                <a:solidFill>
-                  <a:srgbClr val="2D3748"/>
-                </a:solidFill>
-                <a:latin typeface="Microsoft JhengHei"/>
-                <a:ea typeface="Microsoft JhengHei"/>
-              </a:rPr>
-              <a:t>推選確認班級「總務幹部」</a:t>
+            <a:off x="3619499" y="3460749"/>
+            <a:ext cx="1897379" cy="228600"/>
+          </a:xfrm>
+          <a:prstGeom prst="rect">
+            <a:avLst/>
+          </a:prstGeom>
+          <a:noFill/>
+        </p:spPr>
+        <p:txBody>
+          <a:bodyPr wrap="none" lIns="0" rIns="0" tIns="0" bIns="0">
+            <a:spAutoFit/>
+          </a:bodyPr>
+          <a:lstStyle/>
+          <a:p>
+            <a:r>
+              <a:rPr sz="1800" b="1">
+                <a:solidFill>
+                  <a:srgbClr val="2D3748"/>
+                </a:solidFill>
+                <a:latin typeface="Microsoft JhengHei"/>
+                <a:ea typeface="Microsoft JhengHei"/>
+              </a:rPr>
+              <a:t>推選確認「總務幹部」</a:t>
             </a:r>
           </a:p>
         </p:txBody>
@@ -18127,29 +18302,29 @@
         </p:nvSpPr>
         <p:spPr>
           <a:xfrm>
-            <a:off x="4794249" y="3956049"/>
-            <a:ext cx="2594355" cy="247649"/>
-          </a:xfrm>
-          <a:prstGeom prst="rect">
-            <a:avLst/>
-          </a:prstGeom>
-          <a:noFill/>
-        </p:spPr>
-        <p:txBody>
-          <a:bodyPr wrap="none" lIns="0" rIns="0" tIns="0" bIns="0">
-            <a:spAutoFit/>
-          </a:bodyPr>
-          <a:lstStyle/>
-          <a:p>
-            <a:r>
-              <a:rPr sz="1950" b="1">
-                <a:solidFill>
-                  <a:srgbClr val="2D3748"/>
-                </a:solidFill>
-                <a:latin typeface="Microsoft JhengHei"/>
-                <a:ea typeface="Microsoft JhengHei"/>
-              </a:rPr>
-              <a:t>共同把關畢業專案與各項經費</a:t>
+            <a:off x="3619499" y="3917950"/>
+            <a:ext cx="1897379" cy="228600"/>
+          </a:xfrm>
+          <a:prstGeom prst="rect">
+            <a:avLst/>
+          </a:prstGeom>
+          <a:noFill/>
+        </p:spPr>
+        <p:txBody>
+          <a:bodyPr wrap="none" lIns="0" rIns="0" tIns="0" bIns="0">
+            <a:spAutoFit/>
+          </a:bodyPr>
+          <a:lstStyle/>
+          <a:p>
+            <a:r>
+              <a:rPr sz="1800" b="1">
+                <a:solidFill>
+                  <a:srgbClr val="2D3748"/>
+                </a:solidFill>
+                <a:latin typeface="Microsoft JhengHei"/>
+                <a:ea typeface="Microsoft JhengHei"/>
+              </a:rPr>
+              <a:t>共同把關畢業各項經費</a:t>
             </a:r>
           </a:p>
         </p:txBody>
@@ -18162,29 +18337,29 @@
         </p:nvSpPr>
         <p:spPr>
           <a:xfrm>
-            <a:off x="4794249" y="4400550"/>
-            <a:ext cx="2224531" cy="247649"/>
-          </a:xfrm>
-          <a:prstGeom prst="rect">
-            <a:avLst/>
-          </a:prstGeom>
-          <a:noFill/>
-        </p:spPr>
-        <p:txBody>
-          <a:bodyPr wrap="none" lIns="0" rIns="0" tIns="0" bIns="0">
-            <a:spAutoFit/>
-          </a:bodyPr>
-          <a:lstStyle/>
-          <a:p>
-            <a:r>
-              <a:rPr sz="1950" b="1">
-                <a:solidFill>
-                  <a:srgbClr val="2D3748"/>
-                </a:solidFill>
-                <a:latin typeface="Microsoft JhengHei"/>
-                <a:ea typeface="Microsoft JhengHei"/>
-              </a:rPr>
-              <a:t>親師攜手做孩子最強後援</a:t>
+            <a:off x="3619499" y="4375150"/>
+            <a:ext cx="1726691" cy="228600"/>
+          </a:xfrm>
+          <a:prstGeom prst="rect">
+            <a:avLst/>
+          </a:prstGeom>
+          <a:noFill/>
+        </p:spPr>
+        <p:txBody>
+          <a:bodyPr wrap="none" lIns="0" rIns="0" tIns="0" bIns="0">
+            <a:spAutoFit/>
+          </a:bodyPr>
+          <a:lstStyle/>
+          <a:p>
+            <a:r>
+              <a:rPr sz="1800" b="1">
+                <a:solidFill>
+                  <a:srgbClr val="2D3748"/>
+                </a:solidFill>
+                <a:latin typeface="Microsoft JhengHei"/>
+                <a:ea typeface="Microsoft JhengHei"/>
+              </a:rPr>
+              <a:t>親師攜手做最強後援</a:t>
             </a:r>
           </a:p>
         </p:txBody>
@@ -18197,22 +18372,22 @@
         </p:nvSpPr>
         <p:spPr>
           <a:xfrm>
-            <a:off x="8597899" y="1892299"/>
-            <a:ext cx="1484883" cy="247649"/>
-          </a:xfrm>
-          <a:prstGeom prst="rect">
-            <a:avLst/>
-          </a:prstGeom>
-          <a:noFill/>
-        </p:spPr>
-        <p:txBody>
-          <a:bodyPr wrap="none" lIns="0" rIns="0" tIns="0" bIns="0">
-            <a:spAutoFit/>
-          </a:bodyPr>
-          <a:lstStyle/>
-          <a:p>
-            <a:r>
-              <a:rPr sz="1950" b="1">
+            <a:off x="6438899" y="1860550"/>
+            <a:ext cx="1385315" cy="228600"/>
+          </a:xfrm>
+          <a:prstGeom prst="rect">
+            <a:avLst/>
+          </a:prstGeom>
+          <a:noFill/>
+        </p:spPr>
+        <p:txBody>
+          <a:bodyPr wrap="none" lIns="0" rIns="0" tIns="0" bIns="0">
+            <a:spAutoFit/>
+          </a:bodyPr>
+          <a:lstStyle/>
+          <a:p>
+            <a:r>
+              <a:rPr sz="1800" b="1">
                 <a:solidFill>
                   <a:srgbClr val="FFFFFF"/>
                 </a:solidFill>
@@ -18232,29 +18407,29 @@
         </p:nvSpPr>
         <p:spPr>
           <a:xfrm>
-            <a:off x="8445499" y="2273300"/>
-            <a:ext cx="2352547" cy="361950"/>
-          </a:xfrm>
-          <a:prstGeom prst="rect">
-            <a:avLst/>
-          </a:prstGeom>
-          <a:noFill/>
-        </p:spPr>
-        <p:txBody>
-          <a:bodyPr wrap="none" lIns="0" rIns="0" tIns="0" bIns="0">
-            <a:spAutoFit/>
-          </a:bodyPr>
-          <a:lstStyle/>
-          <a:p>
-            <a:r>
-              <a:rPr sz="2850" b="1">
+            <a:off x="6286499" y="2209800"/>
+            <a:ext cx="1641347" cy="323849"/>
+          </a:xfrm>
+          <a:prstGeom prst="rect">
+            <a:avLst/>
+          </a:prstGeom>
+          <a:noFill/>
+        </p:spPr>
+        <p:txBody>
+          <a:bodyPr wrap="none" lIns="0" rIns="0" tIns="0" bIns="0">
+            <a:spAutoFit/>
+          </a:bodyPr>
+          <a:lstStyle/>
+          <a:p>
+            <a:r>
+              <a:rPr sz="2550" b="1">
                 <a:solidFill>
                   <a:srgbClr val="58A47E"/>
                 </a:solidFill>
                 <a:latin typeface="Microsoft JhengHei"/>
                 <a:ea typeface="Microsoft JhengHei"/>
               </a:rPr>
-              <a:t>愛心志工意願登記</a:t>
+              <a:t>愛心志工意願</a:t>
             </a:r>
           </a:p>
         </p:txBody>
@@ -18267,22 +18442,22 @@
         </p:nvSpPr>
         <p:spPr>
           <a:xfrm>
-            <a:off x="8534399" y="2679700"/>
-            <a:ext cx="1328419" cy="190500"/>
-          </a:xfrm>
-          <a:prstGeom prst="rect">
-            <a:avLst/>
-          </a:prstGeom>
-          <a:noFill/>
-        </p:spPr>
-        <p:txBody>
-          <a:bodyPr wrap="none" lIns="0" rIns="0" tIns="0" bIns="0">
-            <a:spAutoFit/>
-          </a:bodyPr>
-          <a:lstStyle/>
-          <a:p>
-            <a:r>
-              <a:rPr sz="1500" b="1">
+            <a:off x="6362699" y="2616200"/>
+            <a:ext cx="1271523" cy="180975"/>
+          </a:xfrm>
+          <a:prstGeom prst="rect">
+            <a:avLst/>
+          </a:prstGeom>
+          <a:noFill/>
+        </p:spPr>
+        <p:txBody>
+          <a:bodyPr wrap="none" lIns="0" rIns="0" tIns="0" bIns="0">
+            <a:spAutoFit/>
+          </a:bodyPr>
+          <a:lstStyle/>
+          <a:p>
+            <a:r>
+              <a:rPr sz="1425" b="1">
                 <a:solidFill>
                   <a:srgbClr val="58A47E"/>
                 </a:solidFill>
@@ -18302,22 +18477,22 @@
         </p:nvSpPr>
         <p:spPr>
           <a:xfrm>
-            <a:off x="8667749" y="3067050"/>
-            <a:ext cx="2224531" cy="247649"/>
-          </a:xfrm>
-          <a:prstGeom prst="rect">
-            <a:avLst/>
-          </a:prstGeom>
-          <a:noFill/>
-        </p:spPr>
-        <p:txBody>
-          <a:bodyPr wrap="none" lIns="0" rIns="0" tIns="0" bIns="0">
-            <a:spAutoFit/>
-          </a:bodyPr>
-          <a:lstStyle/>
-          <a:p>
-            <a:r>
-              <a:rPr sz="1950" b="1">
+            <a:off x="6445249" y="3003549"/>
+            <a:ext cx="2068067" cy="228600"/>
+          </a:xfrm>
+          <a:prstGeom prst="rect">
+            <a:avLst/>
+          </a:prstGeom>
+          <a:noFill/>
+        </p:spPr>
+        <p:txBody>
+          <a:bodyPr wrap="none" lIns="0" rIns="0" tIns="0" bIns="0">
+            <a:spAutoFit/>
+          </a:bodyPr>
+          <a:lstStyle/>
+          <a:p>
+            <a:r>
+              <a:rPr sz="1800" b="1">
                 <a:solidFill>
                   <a:srgbClr val="2D3748"/>
                 </a:solidFill>
@@ -18337,29 +18512,29 @@
         </p:nvSpPr>
         <p:spPr>
           <a:xfrm>
-            <a:off x="8667749" y="3511550"/>
-            <a:ext cx="2409443" cy="247649"/>
-          </a:xfrm>
-          <a:prstGeom prst="rect">
-            <a:avLst/>
-          </a:prstGeom>
-          <a:noFill/>
-        </p:spPr>
-        <p:txBody>
-          <a:bodyPr wrap="none" lIns="0" rIns="0" tIns="0" bIns="0">
-            <a:spAutoFit/>
-          </a:bodyPr>
-          <a:lstStyle/>
-          <a:p>
-            <a:r>
-              <a:rPr sz="1950" b="1">
-                <a:solidFill>
-                  <a:srgbClr val="2D3748"/>
-                </a:solidFill>
-                <a:latin typeface="Microsoft JhengHei"/>
-                <a:ea typeface="Microsoft JhengHei"/>
-              </a:rPr>
-              <a:t>圖書組：晨間書籍借還推廣</a:t>
+            <a:off x="6445249" y="3460749"/>
+            <a:ext cx="1897379" cy="228600"/>
+          </a:xfrm>
+          <a:prstGeom prst="rect">
+            <a:avLst/>
+          </a:prstGeom>
+          <a:noFill/>
+        </p:spPr>
+        <p:txBody>
+          <a:bodyPr wrap="none" lIns="0" rIns="0" tIns="0" bIns="0">
+            <a:spAutoFit/>
+          </a:bodyPr>
+          <a:lstStyle/>
+          <a:p>
+            <a:r>
+              <a:rPr sz="1800" b="1">
+                <a:solidFill>
+                  <a:srgbClr val="2D3748"/>
+                </a:solidFill>
+                <a:latin typeface="Microsoft JhengHei"/>
+                <a:ea typeface="Microsoft JhengHei"/>
+              </a:rPr>
+              <a:t>圖書組：晨間書籍借還</a:t>
             </a:r>
           </a:p>
         </p:txBody>
@@ -18372,22 +18547,22 @@
         </p:nvSpPr>
         <p:spPr>
           <a:xfrm>
-            <a:off x="8667749" y="3956049"/>
-            <a:ext cx="2039619" cy="247649"/>
-          </a:xfrm>
-          <a:prstGeom prst="rect">
-            <a:avLst/>
-          </a:prstGeom>
-          <a:noFill/>
-        </p:spPr>
-        <p:txBody>
-          <a:bodyPr wrap="none" lIns="0" rIns="0" tIns="0" bIns="0">
-            <a:spAutoFit/>
-          </a:bodyPr>
-          <a:lstStyle/>
-          <a:p>
-            <a:r>
-              <a:rPr sz="1950" b="1">
+            <a:off x="6445249" y="3917950"/>
+            <a:ext cx="1897379" cy="228600"/>
+          </a:xfrm>
+          <a:prstGeom prst="rect">
+            <a:avLst/>
+          </a:prstGeom>
+          <a:noFill/>
+        </p:spPr>
+        <p:txBody>
+          <a:bodyPr wrap="none" lIns="0" rIns="0" tIns="0" bIns="0">
+            <a:spAutoFit/>
+          </a:bodyPr>
+          <a:lstStyle/>
+          <a:p>
+            <a:r>
+              <a:rPr sz="1800" b="1">
                 <a:solidFill>
                   <a:srgbClr val="2D3748"/>
                 </a:solidFill>
@@ -18407,29 +18582,29 @@
         </p:nvSpPr>
         <p:spPr>
           <a:xfrm>
-            <a:off x="8667749" y="4400550"/>
-            <a:ext cx="2409443" cy="247649"/>
-          </a:xfrm>
-          <a:prstGeom prst="rect">
-            <a:avLst/>
-          </a:prstGeom>
-          <a:noFill/>
-        </p:spPr>
-        <p:txBody>
-          <a:bodyPr wrap="none" lIns="0" rIns="0" tIns="0" bIns="0">
-            <a:spAutoFit/>
-          </a:bodyPr>
-          <a:lstStyle/>
-          <a:p>
-            <a:r>
-              <a:rPr sz="1950" b="1">
-                <a:solidFill>
-                  <a:srgbClr val="2D3748"/>
-                </a:solidFill>
-                <a:latin typeface="Microsoft JhengHei"/>
-                <a:ea typeface="Microsoft JhengHei"/>
-              </a:rPr>
-              <a:t>或填妥紙本回條由孩子帶來</a:t>
+            <a:off x="6445249" y="4375150"/>
+            <a:ext cx="1897379" cy="228600"/>
+          </a:xfrm>
+          <a:prstGeom prst="rect">
+            <a:avLst/>
+          </a:prstGeom>
+          <a:noFill/>
+        </p:spPr>
+        <p:txBody>
+          <a:bodyPr wrap="none" lIns="0" rIns="0" tIns="0" bIns="0">
+            <a:spAutoFit/>
+          </a:bodyPr>
+          <a:lstStyle/>
+          <a:p>
+            <a:r>
+              <a:rPr sz="1800" b="1">
+                <a:solidFill>
+                  <a:srgbClr val="2D3748"/>
+                </a:solidFill>
+                <a:latin typeface="Microsoft JhengHei"/>
+                <a:ea typeface="Microsoft JhengHei"/>
+              </a:rPr>
+              <a:t>或填妥回條由孩子帶來</a:t>
             </a:r>
           </a:p>
         </p:txBody>
@@ -18437,6 +18612,181 @@
       <p:sp>
         <p:nvSpPr>
           <p:cNvPr id="28" name="TextBox 27"/>
+          <p:cNvSpPr txBox="1"/>
+          <p:nvPr/>
+        </p:nvSpPr>
+        <p:spPr>
+          <a:xfrm>
+            <a:off x="9264649" y="1860550"/>
+            <a:ext cx="1214627" cy="228600"/>
+          </a:xfrm>
+          <a:prstGeom prst="rect">
+            <a:avLst/>
+          </a:prstGeom>
+          <a:noFill/>
+        </p:spPr>
+        <p:txBody>
+          <a:bodyPr wrap="none" lIns="0" rIns="0" tIns="0" bIns="0">
+            <a:spAutoFit/>
+          </a:bodyPr>
+          <a:lstStyle/>
+          <a:p>
+            <a:r>
+              <a:rPr sz="1800" b="1">
+                <a:solidFill>
+                  <a:srgbClr val="FFFFFF"/>
+                </a:solidFill>
+                <a:latin typeface="Microsoft JhengHei"/>
+                <a:ea typeface="Microsoft JhengHei"/>
+              </a:rPr>
+              <a:t>班親專屬網站</a:t>
+            </a:r>
+          </a:p>
+        </p:txBody>
+      </p:sp>
+      <p:sp>
+        <p:nvSpPr>
+          <p:cNvPr id="29" name="TextBox 28"/>
+          <p:cNvSpPr txBox="1"/>
+          <p:nvPr/>
+        </p:nvSpPr>
+        <p:spPr>
+          <a:xfrm>
+            <a:off x="9112249" y="2209800"/>
+            <a:ext cx="2011171" cy="304800"/>
+          </a:xfrm>
+          <a:prstGeom prst="rect">
+            <a:avLst/>
+          </a:prstGeom>
+          <a:noFill/>
+        </p:spPr>
+        <p:txBody>
+          <a:bodyPr wrap="none" lIns="0" rIns="0" tIns="0" bIns="0">
+            <a:spAutoFit/>
+          </a:bodyPr>
+          <a:lstStyle/>
+          <a:p>
+            <a:r>
+              <a:rPr sz="2400" b="1">
+                <a:solidFill>
+                  <a:srgbClr val="2C5E8A"/>
+                </a:solidFill>
+                <a:latin typeface="Microsoft JhengHei"/>
+                <a:ea typeface="Microsoft JhengHei"/>
+              </a:rPr>
+              <a:t>掃描帶走電子手冊</a:t>
+            </a:r>
+          </a:p>
+        </p:txBody>
+      </p:sp>
+      <p:sp>
+        <p:nvSpPr>
+          <p:cNvPr id="30" name="TextBox 29"/>
+          <p:cNvSpPr txBox="1"/>
+          <p:nvPr/>
+        </p:nvSpPr>
+        <p:spPr>
+          <a:xfrm>
+            <a:off x="9143999" y="4273550"/>
+            <a:ext cx="1911603" cy="209549"/>
+          </a:xfrm>
+          <a:prstGeom prst="rect">
+            <a:avLst/>
+          </a:prstGeom>
+          <a:noFill/>
+        </p:spPr>
+        <p:txBody>
+          <a:bodyPr wrap="none" lIns="0" rIns="0" tIns="0" bIns="0">
+            <a:spAutoFit/>
+          </a:bodyPr>
+          <a:lstStyle/>
+          <a:p>
+            <a:r>
+              <a:rPr sz="1650" b="1">
+                <a:solidFill>
+                  <a:srgbClr val="2D3748"/>
+                </a:solidFill>
+                <a:latin typeface="Microsoft JhengHei"/>
+                <a:ea typeface="Microsoft JhengHei"/>
+              </a:rPr>
+              <a:t>手機隨身查閱・轉傳家人</a:t>
+            </a:r>
+          </a:p>
+        </p:txBody>
+      </p:sp>
+      <p:sp>
+        <p:nvSpPr>
+          <p:cNvPr id="31" name="TextBox 30"/>
+          <p:cNvSpPr txBox="1"/>
+          <p:nvPr/>
+        </p:nvSpPr>
+        <p:spPr>
+          <a:xfrm>
+            <a:off x="9143999" y="4527550"/>
+            <a:ext cx="2352547" cy="180975"/>
+          </a:xfrm>
+          <a:prstGeom prst="rect">
+            <a:avLst/>
+          </a:prstGeom>
+          <a:noFill/>
+        </p:spPr>
+        <p:txBody>
+          <a:bodyPr wrap="none" lIns="0" rIns="0" tIns="0" bIns="0">
+            <a:spAutoFit/>
+          </a:bodyPr>
+          <a:lstStyle/>
+          <a:p>
+            <a:r>
+              <a:rPr sz="1425" b="0">
+                <a:solidFill>
+                  <a:srgbClr val="718096"/>
+                </a:solidFill>
+                <a:latin typeface="Microsoft JhengHei"/>
+                <a:ea typeface="Microsoft JhengHei"/>
+              </a:rPr>
+              <a:t>完整簡報 × 評量 × 畢冊報價</a:t>
+            </a:r>
+          </a:p>
+        </p:txBody>
+      </p:sp>
+      <p:sp>
+        <p:nvSpPr>
+          <p:cNvPr id="32" name="TextBox 31"/>
+          <p:cNvSpPr txBox="1"/>
+          <p:nvPr/>
+        </p:nvSpPr>
+        <p:spPr>
+          <a:xfrm>
+            <a:off x="9143999" y="4781549"/>
+            <a:ext cx="2910840" cy="152400"/>
+          </a:xfrm>
+          <a:prstGeom prst="rect">
+            <a:avLst/>
+          </a:prstGeom>
+          <a:noFill/>
+        </p:spPr>
+        <p:txBody>
+          <a:bodyPr wrap="none" lIns="0" rIns="0" tIns="0" bIns="0">
+            <a:spAutoFit/>
+          </a:bodyPr>
+          <a:lstStyle/>
+          <a:p>
+            <a:r>
+              <a:rPr sz="1200" b="0">
+                <a:solidFill>
+                  <a:srgbClr val="2C5E8A"/>
+                </a:solidFill>
+                <a:latin typeface="Microsoft JhengHei"/>
+                <a:ea typeface="Microsoft JhengHei"/>
+              </a:rPr>
+              <a:t>clive520.github.io/parent-meeting</a:t>
+            </a:r>
+          </a:p>
+        </p:txBody>
+      </p:sp>
+      <p:sp>
+        <p:nvSpPr>
+          <p:cNvPr id="33" name="TextBox 32"/>
           <p:cNvSpPr txBox="1"/>
           <p:nvPr/>
         </p:nvSpPr>
@@ -18471,7 +18821,7 @@
       </p:sp>
       <p:sp>
         <p:nvSpPr>
-          <p:cNvPr id="29" name="TextBox 28"/>
+          <p:cNvPr id="34" name="TextBox 33"/>
           <p:cNvSpPr txBox="1"/>
           <p:nvPr/>
         </p:nvSpPr>
